--- a/Session_2_Programmieren_Open_Roberta/S2_Folien.pptx
+++ b/Session_2_Programmieren_Open_Roberta/S2_Folien.pptx
@@ -955,7 +955,7 @@
           <a:p>
             <a:r>
               <a:rPr lang="en-US" dirty="0"/>
-              <a:t>Ausblick auf Sitzung 3: Erst selbst ausprobieren, dann planen – in Fachgruppen für eine Projektwoche in Klasse 7. mBot2 an die Ladestation.</a:t>
+              <a:t>Ausblick auf Sitzung 3: Erst selbst ausprobieren, dann planen – in Fachgruppen für eine Projektwoche; die Gruppe wählt eine gemeinsame Jahrgangsstufe (Voreinstellung Klasse 7). mBot2 an die Ladestation.</a:t>
             </a:r>
             <a:endParaRPr lang="en-US" dirty="0"/>
           </a:p>
@@ -1782,11 +1782,11 @@
             <a:r>
               <a:rPr lang="en-US" sz="1000" dirty="0">
                 <a:solidFill>
-                  <a:srgbClr val="5B6B73"/>
-                </a:solidFill>
-                <a:latin typeface="Calibri" pitchFamily="34" charset="0"/>
-                <a:ea typeface="Calibri" pitchFamily="34" charset="-122"/>
-                <a:cs typeface="Calibri" pitchFamily="34" charset="-120"/>
+                  <a:srgbClr val="706F6F"/>
+                </a:solidFill>
+                <a:latin typeface="Lucida Sans" pitchFamily="34" charset="0"/>
+                <a:ea typeface="Lucida Sans" pitchFamily="34" charset="-122"/>
+                <a:cs typeface="Lucida Sans" pitchFamily="34" charset="-120"/>
               </a:rPr>
               <a:t>Der mBot2 im Fachunterricht · Sitzung 2 · CC BY 4.0</a:t>
             </a:r>
@@ -1794,18 +1794,42 @@
           </a:p>
         </p:txBody>
       </p:sp>
-      <p:sp>
-        <p:nvSpPr>
-          <p:cNvPr id="3" name="Text 1"/>
+      <p:pic>
+        <p:nvPicPr>
+          <p:cNvPr id="3" name="Image 0" descr="/Users/h_tegelbeckers/Library/CloudStorage/Nextcloud-cloud.ovgu.de-HannesTegelbeckers/PROF_INGPED_TECHED/Admin/Personal/Lehre/Tegelbeckers Hannes/06_Lehrinhalte/Didaktikwerkstatt/DW-T 2026/Agent_Improved/assets/ovgu_fhw_logo.png">    </p:cNvPr>
+          <p:cNvPicPr>
+            <a:picLocks noChangeAspect="1"/>
+          </p:cNvPicPr>
+          <p:nvPr/>
+        </p:nvPicPr>
+        <p:blipFill>
+          <a:blip r:embed="rId1"/>
+          <a:stretch>
+            <a:fillRect/>
+          </a:stretch>
+        </p:blipFill>
+        <p:spPr>
+          <a:xfrm>
+            <a:off x="9174175" y="274320"/>
+            <a:ext cx="2468880" cy="564756"/>
+          </a:xfrm>
+          <a:prstGeom prst="rect">
+            <a:avLst/>
+          </a:prstGeom>
+        </p:spPr>
+      </p:pic>
+      <p:sp>
+        <p:nvSpPr>
+          <p:cNvPr id="4" name="Text 1"/>
           <p:cNvSpPr/>
           <p:nvPr>
-            <p:ph idx="101" type="title" hasCustomPrompt="1"/>
+            <p:ph idx="102" type="title" hasCustomPrompt="1"/>
           </p:nvPr>
         </p:nvSpPr>
         <p:spPr>
           <a:xfrm>
-            <a:off x="548640" y="320040"/>
-            <a:ext cx="11094415" cy="777240"/>
+            <a:off x="548640" y="274320"/>
+            <a:ext cx="8351215" cy="896112"/>
           </a:xfrm>
           <a:prstGeom prst="rect">
             <a:avLst/>
@@ -1816,23 +1840,23 @@
         <p:txBody>
           <a:bodyPr wrap="square" rtlCol="0"/>
           <a:lstStyle>
-            <a:lvl1pPr indent="0" marL="0">
-              <a:buNone/>
-              <a:defRPr lang="en-US" sz="3200" b="1" dirty="0">
-                <a:solidFill>
-                  <a:srgbClr val="0B3C49"/>
-                </a:solidFill>
-                <a:latin typeface="Cambria" pitchFamily="34" charset="0"/>
-                <a:ea typeface="Cambria" pitchFamily="34" charset="-122"/>
-                <a:cs typeface="Cambria" pitchFamily="34" charset="-120"/>
+            <a:lvl1pPr algn="l" indent="0" marL="0">
+              <a:buNone/>
+              <a:defRPr lang="en-US" sz="2600" b="1" dirty="0">
+                <a:solidFill>
+                  <a:srgbClr val="7A003F"/>
+                </a:solidFill>
+                <a:latin typeface="Lucida Sans" pitchFamily="34" charset="0"/>
+                <a:ea typeface="Lucida Sans" pitchFamily="34" charset="-122"/>
+                <a:cs typeface="Lucida Sans" pitchFamily="34" charset="-120"/>
               </a:defRPr>
             </a:lvl1pPr>
           </a:lstStyle>
           <a:p>
-            <a:pPr indent="0" marL="0">
-              <a:buNone/>
-            </a:pPr>
-            <a:endParaRPr lang="en-US" sz="3200" dirty="0"/>
+            <a:pPr algn="l" indent="0" marL="0">
+              <a:buNone/>
+            </a:pPr>
+            <a:endParaRPr lang="en-US" sz="2600" dirty="0"/>
           </a:p>
         </p:txBody>
       </p:sp>
@@ -1866,11 +1890,11 @@
             <a:lvl1pPr>
               <a:defRPr sz="1000">
                 <a:solidFill>
-                  <a:srgbClr val="5B6B73"/>
-                </a:solidFill>
-                <a:latin typeface="Calibri"/>
-                <a:ea typeface="Calibri"/>
-                <a:cs typeface="Calibri"/>
+                  <a:srgbClr val="706F6F"/>
+                </a:solidFill>
+                <a:latin typeface="Lucida Sans"/>
+                <a:ea typeface="Lucida Sans"/>
+                <a:cs typeface="Lucida Sans"/>
               </a:defRPr>
             </a:lvl1pPr>
           </a:lstStyle>
@@ -1894,11 +1918,11 @@
 
 <file path=ppt/slideLayouts/slideLayout3.xml><?xml version="1.0" encoding="utf-8"?>
 <p:sldLayout xmlns:a="http://schemas.openxmlformats.org/drawingml/2006/main" xmlns:r="http://schemas.openxmlformats.org/officeDocument/2006/relationships" xmlns:p="http://schemas.openxmlformats.org/presentationml/2006/main" preserve="1">
-  <p:cSld name="DUNKEL">
+  <p:cSld name="TITEL">
     <p:bg>
       <p:bgPr>
         <a:solidFill>
-          <a:srgbClr val="0B3C49"/>
+          <a:srgbClr val="FFFFFF"/>
         </a:solidFill>
       </p:bgPr>
     </p:bg>
@@ -1916,9 +1940,33 @@
           <a:chExt cx="0" cy="0"/>
         </a:xfrm>
       </p:grpSpPr>
-      <p:sp>
-        <p:nvSpPr>
-          <p:cNvPr id="2" name="Text 0"/>
+      <p:pic>
+        <p:nvPicPr>
+          <p:cNvPr id="2" name="Image 0" descr="/Users/h_tegelbeckers/Library/CloudStorage/Nextcloud-cloud.ovgu.de-HannesTegelbeckers/PROF_INGPED_TECHED/Admin/Personal/Lehre/Tegelbeckers Hannes/06_Lehrinhalte/Didaktikwerkstatt/DW-T 2026/Agent_Improved/assets/ovgu_fhw_logo.png">    </p:cNvPr>
+          <p:cNvPicPr>
+            <a:picLocks noChangeAspect="1"/>
+          </p:cNvPicPr>
+          <p:nvPr/>
+        </p:nvPicPr>
+        <p:blipFill>
+          <a:blip r:embed="rId1"/>
+          <a:stretch>
+            <a:fillRect/>
+          </a:stretch>
+        </p:blipFill>
+        <p:spPr>
+          <a:xfrm>
+            <a:off x="548640" y="457200"/>
+            <a:ext cx="5486400" cy="1255014"/>
+          </a:xfrm>
+          <a:prstGeom prst="rect">
+            <a:avLst/>
+          </a:prstGeom>
+        </p:spPr>
+      </p:pic>
+      <p:sp>
+        <p:nvSpPr>
+          <p:cNvPr id="3" name="Text 0"/>
           <p:cNvSpPr txBox="1"/>
           <p:nvPr/>
         </p:nvSpPr>
@@ -1943,11 +1991,11 @@
             <a:r>
               <a:rPr lang="en-US" sz="1000" dirty="0">
                 <a:solidFill>
-                  <a:srgbClr val="9FC3C0"/>
-                </a:solidFill>
-                <a:latin typeface="Calibri" pitchFamily="34" charset="0"/>
-                <a:ea typeface="Calibri" pitchFamily="34" charset="-122"/>
-                <a:cs typeface="Calibri" pitchFamily="34" charset="-120"/>
+                  <a:srgbClr val="706F6F"/>
+                </a:solidFill>
+                <a:latin typeface="Lucida Sans" pitchFamily="34" charset="0"/>
+                <a:ea typeface="Lucida Sans" pitchFamily="34" charset="-122"/>
+                <a:cs typeface="Lucida Sans" pitchFamily="34" charset="-120"/>
               </a:rPr>
               <a:t>Der mBot2 im Fachunterricht · Sitzung 2 · CC BY 4.0</a:t>
             </a:r>
@@ -2010,11 +2058,11 @@
             <a:lvl1pPr>
               <a:defRPr sz="1000">
                 <a:solidFill>
-                  <a:srgbClr val="5B6B73"/>
-                </a:solidFill>
-                <a:latin typeface="Calibri"/>
-                <a:ea typeface="Calibri"/>
-                <a:cs typeface="Calibri"/>
+                  <a:srgbClr val="706F6F"/>
+                </a:solidFill>
+                <a:latin typeface="Lucida Sans"/>
+                <a:ea typeface="Lucida Sans"/>
+                <a:cs typeface="Lucida Sans"/>
               </a:defRPr>
             </a:lvl1pPr>
           </a:lstStyle>
@@ -2315,8 +2363,8 @@
         </p:nvSpPr>
         <p:spPr>
           <a:xfrm>
-            <a:off x="548640" y="1188720"/>
-            <a:ext cx="9144000" cy="457200"/>
+            <a:off x="548640" y="2148840"/>
+            <a:ext cx="9144000" cy="411480"/>
           </a:xfrm>
           <a:prstGeom prst="rect">
             <a:avLst/>
@@ -2332,17 +2380,17 @@
               <a:buNone/>
             </a:pPr>
             <a:r>
-              <a:rPr lang="en-US" sz="1600" b="1" spc="200" kern="0" dirty="0">
-                <a:solidFill>
-                  <a:srgbClr val="F6B27A"/>
-                </a:solidFill>
-                <a:latin typeface="Calibri" pitchFamily="34" charset="0"/>
-                <a:ea typeface="Calibri" pitchFamily="34" charset="-122"/>
-                <a:cs typeface="Calibri" pitchFamily="34" charset="-120"/>
+              <a:rPr lang="en-US" sz="1400" b="1" spc="200" kern="0" dirty="0">
+                <a:solidFill>
+                  <a:srgbClr val="706F6F"/>
+                </a:solidFill>
+                <a:latin typeface="Lucida Sans" pitchFamily="34" charset="0"/>
+                <a:ea typeface="Lucida Sans" pitchFamily="34" charset="-122"/>
+                <a:cs typeface="Lucida Sans" pitchFamily="34" charset="-120"/>
               </a:rPr>
               <a:t>FORTBILDUNGSREIHE · DER mBOT2 IM FACHUNTERRICHT</a:t>
             </a:r>
-            <a:endParaRPr lang="en-US" sz="1600" dirty="0"/>
+            <a:endParaRPr lang="en-US" sz="1400" dirty="0"/>
           </a:p>
         </p:txBody>
       </p:sp>
@@ -2354,8 +2402,8 @@
         </p:nvSpPr>
         <p:spPr>
           <a:xfrm>
-            <a:off x="548640" y="1737360"/>
-            <a:ext cx="10515600" cy="1371600"/>
+            <a:off x="548640" y="2606040"/>
+            <a:ext cx="9509760" cy="1188720"/>
           </a:xfrm>
           <a:prstGeom prst="rect">
             <a:avLst/>
@@ -2371,17 +2419,17 @@
               <a:buNone/>
             </a:pPr>
             <a:r>
-              <a:rPr lang="en-US" sz="4400" b="1" dirty="0">
-                <a:solidFill>
-                  <a:srgbClr val="FFFFFF"/>
-                </a:solidFill>
-                <a:latin typeface="Cambria" pitchFamily="34" charset="0"/>
-                <a:ea typeface="Cambria" pitchFamily="34" charset="-122"/>
-                <a:cs typeface="Cambria" pitchFamily="34" charset="-120"/>
+              <a:rPr lang="en-US" sz="4000" b="1" dirty="0">
+                <a:solidFill>
+                  <a:srgbClr val="7A003F"/>
+                </a:solidFill>
+                <a:latin typeface="Lucida Sans" pitchFamily="34" charset="0"/>
+                <a:ea typeface="Lucida Sans" pitchFamily="34" charset="-122"/>
+                <a:cs typeface="Lucida Sans" pitchFamily="34" charset="-120"/>
               </a:rPr>
               <a:t>Programmieren mit Open Roberta</a:t>
             </a:r>
-            <a:endParaRPr lang="en-US" sz="4400" dirty="0"/>
+            <a:endParaRPr lang="en-US" sz="4000" dirty="0"/>
           </a:p>
         </p:txBody>
       </p:sp>
@@ -2393,8 +2441,8 @@
         </p:nvSpPr>
         <p:spPr>
           <a:xfrm>
-            <a:off x="548640" y="3200400"/>
-            <a:ext cx="10515600" cy="731520"/>
+            <a:off x="548640" y="3840480"/>
+            <a:ext cx="9509760" cy="640080"/>
           </a:xfrm>
           <a:prstGeom prst="rect">
             <a:avLst/>
@@ -2410,17 +2458,17 @@
               <a:buNone/>
             </a:pPr>
             <a:r>
-              <a:rPr lang="en-US" sz="2200" dirty="0">
-                <a:solidFill>
-                  <a:srgbClr val="CFE5E3"/>
-                </a:solidFill>
-                <a:latin typeface="Calibri" pitchFamily="34" charset="0"/>
-                <a:ea typeface="Calibri" pitchFamily="34" charset="-122"/>
-                <a:cs typeface="Calibri" pitchFamily="34" charset="-120"/>
+              <a:rPr lang="en-US" sz="2000" dirty="0">
+                <a:solidFill>
+                  <a:srgbClr val="1D1D1B"/>
+                </a:solidFill>
+                <a:latin typeface="Lucida Sans" pitchFamily="34" charset="0"/>
+                <a:ea typeface="Lucida Sans" pitchFamily="34" charset="-122"/>
+                <a:cs typeface="Lucida Sans" pitchFamily="34" charset="-120"/>
               </a:rPr>
               <a:t>Sequenz, Schleife, Bedingung und Sensoren</a:t>
             </a:r>
-            <a:endParaRPr lang="en-US" sz="2200" dirty="0"/>
+            <a:endParaRPr lang="en-US" sz="2000" dirty="0"/>
           </a:p>
         </p:txBody>
       </p:sp>
@@ -2432,8 +2480,8 @@
         </p:nvSpPr>
         <p:spPr>
           <a:xfrm>
-            <a:off x="548640" y="4389120"/>
-            <a:ext cx="2514600" cy="548640"/>
+            <a:off x="548640" y="4800600"/>
+            <a:ext cx="2697480" cy="548640"/>
           </a:xfrm>
           <a:prstGeom prst="roundRect">
             <a:avLst>
@@ -2441,11 +2489,11 @@
             </a:avLst>
           </a:prstGeom>
           <a:solidFill>
-            <a:srgbClr val="174F5E"/>
+            <a:srgbClr val="FDF0E3"/>
           </a:solidFill>
           <a:ln w="12700">
             <a:solidFill>
-              <a:srgbClr val="2C6E7C"/>
+              <a:srgbClr val="EF7D00"/>
             </a:solidFill>
             <a:prstDash val="solid"/>
           </a:ln>
@@ -2459,8 +2507,8 @@
         </p:nvSpPr>
         <p:spPr>
           <a:xfrm>
-            <a:off x="548640" y="4389120"/>
-            <a:ext cx="2514600" cy="548640"/>
+            <a:off x="548640" y="4800600"/>
+            <a:ext cx="2697480" cy="548640"/>
           </a:xfrm>
           <a:prstGeom prst="rect">
             <a:avLst/>
@@ -2478,11 +2526,11 @@
             <a:r>
               <a:rPr lang="en-US" sz="1400" dirty="0">
                 <a:solidFill>
-                  <a:srgbClr val="FFFFFF"/>
-                </a:solidFill>
-                <a:latin typeface="Calibri" pitchFamily="34" charset="0"/>
-                <a:ea typeface="Calibri" pitchFamily="34" charset="-122"/>
-                <a:cs typeface="Calibri" pitchFamily="34" charset="-120"/>
+                  <a:srgbClr val="1D1D1B"/>
+                </a:solidFill>
+                <a:latin typeface="Lucida Sans" pitchFamily="34" charset="0"/>
+                <a:ea typeface="Lucida Sans" pitchFamily="34" charset="-122"/>
+                <a:cs typeface="Lucida Sans" pitchFamily="34" charset="-120"/>
               </a:rPr>
               <a:t>Sitzung 2 von 3</a:t>
             </a:r>
@@ -2498,8 +2546,8 @@
         </p:nvSpPr>
         <p:spPr>
           <a:xfrm>
-            <a:off x="3246120" y="4389120"/>
-            <a:ext cx="2514600" cy="548640"/>
+            <a:off x="3429000" y="4800600"/>
+            <a:ext cx="2697480" cy="548640"/>
           </a:xfrm>
           <a:prstGeom prst="roundRect">
             <a:avLst>
@@ -2507,11 +2555,11 @@
             </a:avLst>
           </a:prstGeom>
           <a:solidFill>
-            <a:srgbClr val="174F5E"/>
+            <a:srgbClr val="FDF0E3"/>
           </a:solidFill>
           <a:ln w="12700">
             <a:solidFill>
-              <a:srgbClr val="2C6E7C"/>
+              <a:srgbClr val="EF7D00"/>
             </a:solidFill>
             <a:prstDash val="solid"/>
           </a:ln>
@@ -2525,8 +2573,8 @@
         </p:nvSpPr>
         <p:spPr>
           <a:xfrm>
-            <a:off x="3246120" y="4389120"/>
-            <a:ext cx="2514600" cy="548640"/>
+            <a:off x="3429000" y="4800600"/>
+            <a:ext cx="2697480" cy="548640"/>
           </a:xfrm>
           <a:prstGeom prst="rect">
             <a:avLst/>
@@ -2544,11 +2592,11 @@
             <a:r>
               <a:rPr lang="en-US" sz="1400" dirty="0">
                 <a:solidFill>
-                  <a:srgbClr val="FFFFFF"/>
-                </a:solidFill>
-                <a:latin typeface="Calibri" pitchFamily="34" charset="0"/>
-                <a:ea typeface="Calibri" pitchFamily="34" charset="-122"/>
-                <a:cs typeface="Calibri" pitchFamily="34" charset="-120"/>
+                  <a:srgbClr val="1D1D1B"/>
+                </a:solidFill>
+                <a:latin typeface="Lucida Sans" pitchFamily="34" charset="0"/>
+                <a:ea typeface="Lucida Sans" pitchFamily="34" charset="-122"/>
+                <a:cs typeface="Lucida Sans" pitchFamily="34" charset="-120"/>
               </a:rPr>
               <a:t>90 Minuten</a:t>
             </a:r>
@@ -2564,8 +2612,8 @@
         </p:nvSpPr>
         <p:spPr>
           <a:xfrm>
-            <a:off x="5943600" y="4389120"/>
-            <a:ext cx="2514600" cy="548640"/>
+            <a:off x="6309360" y="4800600"/>
+            <a:ext cx="2697480" cy="548640"/>
           </a:xfrm>
           <a:prstGeom prst="roundRect">
             <a:avLst>
@@ -2573,11 +2621,11 @@
             </a:avLst>
           </a:prstGeom>
           <a:solidFill>
-            <a:srgbClr val="174F5E"/>
+            <a:srgbClr val="FDF0E3"/>
           </a:solidFill>
           <a:ln w="12700">
             <a:solidFill>
-              <a:srgbClr val="2C6E7C"/>
+              <a:srgbClr val="EF7D00"/>
             </a:solidFill>
             <a:prstDash val="solid"/>
           </a:ln>
@@ -2591,8 +2639,8 @@
         </p:nvSpPr>
         <p:spPr>
           <a:xfrm>
-            <a:off x="5943600" y="4389120"/>
-            <a:ext cx="2514600" cy="548640"/>
+            <a:off x="6309360" y="4800600"/>
+            <a:ext cx="2697480" cy="548640"/>
           </a:xfrm>
           <a:prstGeom prst="rect">
             <a:avLst/>
@@ -2610,11 +2658,11 @@
             <a:r>
               <a:rPr lang="en-US" sz="1400" dirty="0">
                 <a:solidFill>
-                  <a:srgbClr val="FFFFFF"/>
-                </a:solidFill>
-                <a:latin typeface="Calibri" pitchFamily="34" charset="0"/>
-                <a:ea typeface="Calibri" pitchFamily="34" charset="-122"/>
-                <a:cs typeface="Calibri" pitchFamily="34" charset="-120"/>
+                  <a:srgbClr val="1D1D1B"/>
+                </a:solidFill>
+                <a:latin typeface="Lucida Sans" pitchFamily="34" charset="0"/>
+                <a:ea typeface="Lucida Sans" pitchFamily="34" charset="-122"/>
+                <a:cs typeface="Lucida Sans" pitchFamily="34" charset="-120"/>
               </a:rPr>
               <a:t>Lernpfade A · B · C</a:t>
             </a:r>
@@ -2630,18 +2678,18 @@
         </p:nvSpPr>
         <p:spPr>
           <a:xfrm>
-            <a:off x="10180015" y="1188720"/>
-            <a:ext cx="1463040" cy="1463040"/>
+            <a:off x="10088575" y="2286000"/>
+            <a:ext cx="1554480" cy="1554480"/>
           </a:xfrm>
           <a:prstGeom prst="ellipse">
             <a:avLst/>
           </a:prstGeom>
           <a:solidFill>
-            <a:srgbClr val="E8772E"/>
+            <a:srgbClr val="EF7D00"/>
           </a:solidFill>
           <a:ln w="12700">
             <a:solidFill>
-              <a:srgbClr val="E8772E"/>
+              <a:srgbClr val="EF7D00"/>
             </a:solidFill>
             <a:prstDash val="solid"/>
           </a:ln>
@@ -2655,8 +2703,8 @@
         </p:nvSpPr>
         <p:spPr>
           <a:xfrm>
-            <a:off x="10180015" y="1188720"/>
-            <a:ext cx="1463040" cy="1463040"/>
+            <a:off x="10088575" y="2286000"/>
+            <a:ext cx="1554480" cy="1554480"/>
           </a:xfrm>
           <a:prstGeom prst="rect">
             <a:avLst/>
@@ -2674,11 +2722,11 @@
             <a:r>
               <a:rPr lang="en-US" sz="5400" b="1" dirty="0">
                 <a:solidFill>
-                  <a:srgbClr val="FFFFFF"/>
-                </a:solidFill>
-                <a:latin typeface="Calibri" pitchFamily="34" charset="0"/>
-                <a:ea typeface="Calibri" pitchFamily="34" charset="-122"/>
-                <a:cs typeface="Calibri" pitchFamily="34" charset="-120"/>
+                  <a:srgbClr val="1D1D1B"/>
+                </a:solidFill>
+                <a:latin typeface="Lucida Sans" pitchFamily="34" charset="0"/>
+                <a:ea typeface="Lucida Sans" pitchFamily="34" charset="-122"/>
+                <a:cs typeface="Lucida Sans" pitchFamily="34" charset="-120"/>
               </a:rPr>
               <a:t>2</a:t>
             </a:r>
@@ -2716,13 +2764,13 @@
           <p:cNvPr id="2" name="Text 1"/>
           <p:cNvSpPr/>
           <p:nvPr>
-            <p:ph idx="101" type="title" hasCustomPrompt="1"/>
+            <p:ph idx="102" type="title" hasCustomPrompt="1"/>
           </p:nvPr>
         </p:nvSpPr>
         <p:spPr>
           <a:xfrm>
-            <a:off x="548640" y="320040"/>
-            <a:ext cx="11094415" cy="777240"/>
+            <a:off x="548640" y="274320"/>
+            <a:ext cx="8351215" cy="896112"/>
           </a:xfrm>
           <a:prstGeom prst="rect">
             <a:avLst/>
@@ -2734,21 +2782,21 @@
           <a:bodyPr wrap="square" lIns="0" tIns="0" rIns="0" bIns="0" rtlCol="0" anchor="ctr"/>
           <a:lstStyle/>
           <a:p>
-            <a:pPr indent="0" marL="0">
-              <a:buNone/>
-            </a:pPr>
-            <a:r>
-              <a:rPr lang="en-US" sz="3200" b="1" dirty="0">
-                <a:solidFill>
-                  <a:srgbClr val="0B3C49"/>
-                </a:solidFill>
-                <a:latin typeface="Cambria" pitchFamily="34" charset="0"/>
-                <a:ea typeface="Cambria" pitchFamily="34" charset="-122"/>
-                <a:cs typeface="Cambria" pitchFamily="34" charset="-120"/>
+            <a:pPr algn="l" indent="0" marL="0">
+              <a:buNone/>
+            </a:pPr>
+            <a:r>
+              <a:rPr lang="en-US" sz="2600" b="1" dirty="0">
+                <a:solidFill>
+                  <a:srgbClr val="7A003F"/>
+                </a:solidFill>
+                <a:latin typeface="Lucida Sans" pitchFamily="34" charset="0"/>
+                <a:ea typeface="Lucida Sans" pitchFamily="34" charset="-122"/>
+                <a:cs typeface="Lucida Sans" pitchFamily="34" charset="-120"/>
               </a:rPr>
               <a:t>Lernpfade: Ihre Aufgaben (30 Minuten)</a:t>
             </a:r>
-            <a:endParaRPr lang="en-US" sz="3200" dirty="0"/>
+            <a:endParaRPr lang="en-US" sz="2600" dirty="0"/>
           </a:p>
         </p:txBody>
       </p:sp>
@@ -2793,23 +2841,23 @@
                           <a:solidFill>
                             <a:srgbClr val="FFFFFF"/>
                           </a:solidFill>
-                          <a:latin typeface="Calibri" pitchFamily="34" charset="0"/>
-                          <a:ea typeface="Calibri" pitchFamily="34" charset="-122"/>
-                          <a:cs typeface="Calibri" pitchFamily="34" charset="-120"/>
+                          <a:latin typeface="Lucida Sans" pitchFamily="34" charset="0"/>
+                          <a:ea typeface="Lucida Sans" pitchFamily="34" charset="-122"/>
+                          <a:cs typeface="Lucida Sans" pitchFamily="34" charset="-120"/>
                         </a:rPr>
                         <a:t>Pfad</a:t>
                       </a:r>
                       <a:endParaRPr lang="en-US" sz="1600" dirty="0">
-                        <a:latin typeface="Calibri" charset="0"/>
-                        <a:ea typeface="Calibri" charset="0"/>
-                        <a:cs typeface="Calibri" charset="0"/>
+                        <a:latin typeface="Lucida Sans" charset="0"/>
+                        <a:ea typeface="Lucida Sans" charset="0"/>
+                        <a:cs typeface="Lucida Sans" charset="0"/>
                       </a:endParaRPr>
                     </a:p>
                   </a:txBody>
                   <a:tcPr marL="101600" marR="101600" marT="63500" marB="63500" anchor="ctr">
                     <a:lnL w="9525" cap="flat" cmpd="sng" algn="ctr">
                       <a:solidFill>
-                        <a:srgbClr val="C9DAD8"/>
+                        <a:srgbClr val="D9D9D9"/>
                       </a:solidFill>
                       <a:prstDash val="solid"/>
                       <a:round/>
@@ -2818,7 +2866,7 @@
                     </a:lnL>
                     <a:lnR w="9525" cap="flat" cmpd="sng" algn="ctr">
                       <a:solidFill>
-                        <a:srgbClr val="C9DAD8"/>
+                        <a:srgbClr val="D9D9D9"/>
                       </a:solidFill>
                       <a:prstDash val="solid"/>
                       <a:round/>
@@ -2827,7 +2875,7 @@
                     </a:lnR>
                     <a:lnT w="9525" cap="flat" cmpd="sng" algn="ctr">
                       <a:solidFill>
-                        <a:srgbClr val="C9DAD8"/>
+                        <a:srgbClr val="D9D9D9"/>
                       </a:solidFill>
                       <a:prstDash val="solid"/>
                       <a:round/>
@@ -2836,7 +2884,7 @@
                     </a:lnT>
                     <a:lnB w="9525" cap="flat" cmpd="sng" algn="ctr">
                       <a:solidFill>
-                        <a:srgbClr val="C9DAD8"/>
+                        <a:srgbClr val="D9D9D9"/>
                       </a:solidFill>
                       <a:prstDash val="solid"/>
                       <a:round/>
@@ -2844,7 +2892,7 @@
                       <a:tailEnd type="none" w="med" len="med"/>
                     </a:lnB>
                     <a:solidFill>
-                      <a:srgbClr val="0B6E69"/>
+                      <a:srgbClr val="7A003F"/>
                     </a:solidFill>
                   </a:tcPr>
                 </a:tc>
@@ -2861,23 +2909,23 @@
                           <a:solidFill>
                             <a:srgbClr val="FFFFFF"/>
                           </a:solidFill>
-                          <a:latin typeface="Calibri" pitchFamily="34" charset="0"/>
-                          <a:ea typeface="Calibri" pitchFamily="34" charset="-122"/>
-                          <a:cs typeface="Calibri" pitchFamily="34" charset="-120"/>
+                          <a:latin typeface="Lucida Sans" pitchFamily="34" charset="0"/>
+                          <a:ea typeface="Lucida Sans" pitchFamily="34" charset="-122"/>
+                          <a:cs typeface="Lucida Sans" pitchFamily="34" charset="-120"/>
                         </a:rPr>
                         <a:t>Pflicht</a:t>
                       </a:r>
                       <a:endParaRPr lang="en-US" sz="1600" dirty="0">
-                        <a:latin typeface="Calibri" charset="0"/>
-                        <a:ea typeface="Calibri" charset="0"/>
-                        <a:cs typeface="Calibri" charset="0"/>
+                        <a:latin typeface="Lucida Sans" charset="0"/>
+                        <a:ea typeface="Lucida Sans" charset="0"/>
+                        <a:cs typeface="Lucida Sans" charset="0"/>
                       </a:endParaRPr>
                     </a:p>
                   </a:txBody>
                   <a:tcPr marL="101600" marR="101600" marT="63500" marB="63500" anchor="ctr">
                     <a:lnL w="9525" cap="flat" cmpd="sng" algn="ctr">
                       <a:solidFill>
-                        <a:srgbClr val="C9DAD8"/>
+                        <a:srgbClr val="D9D9D9"/>
                       </a:solidFill>
                       <a:prstDash val="solid"/>
                       <a:round/>
@@ -2886,7 +2934,7 @@
                     </a:lnL>
                     <a:lnR w="9525" cap="flat" cmpd="sng" algn="ctr">
                       <a:solidFill>
-                        <a:srgbClr val="C9DAD8"/>
+                        <a:srgbClr val="D9D9D9"/>
                       </a:solidFill>
                       <a:prstDash val="solid"/>
                       <a:round/>
@@ -2895,7 +2943,7 @@
                     </a:lnR>
                     <a:lnT w="9525" cap="flat" cmpd="sng" algn="ctr">
                       <a:solidFill>
-                        <a:srgbClr val="C9DAD8"/>
+                        <a:srgbClr val="D9D9D9"/>
                       </a:solidFill>
                       <a:prstDash val="solid"/>
                       <a:round/>
@@ -2904,7 +2952,7 @@
                     </a:lnT>
                     <a:lnB w="9525" cap="flat" cmpd="sng" algn="ctr">
                       <a:solidFill>
-                        <a:srgbClr val="C9DAD8"/>
+                        <a:srgbClr val="D9D9D9"/>
                       </a:solidFill>
                       <a:prstDash val="solid"/>
                       <a:round/>
@@ -2912,7 +2960,7 @@
                       <a:tailEnd type="none" w="med" len="med"/>
                     </a:lnB>
                     <a:solidFill>
-                      <a:srgbClr val="0B6E69"/>
+                      <a:srgbClr val="7A003F"/>
                     </a:solidFill>
                   </a:tcPr>
                 </a:tc>
@@ -2929,23 +2977,23 @@
                           <a:solidFill>
                             <a:srgbClr val="FFFFFF"/>
                           </a:solidFill>
-                          <a:latin typeface="Calibri" pitchFamily="34" charset="0"/>
-                          <a:ea typeface="Calibri" pitchFamily="34" charset="-122"/>
-                          <a:cs typeface="Calibri" pitchFamily="34" charset="-120"/>
+                          <a:latin typeface="Lucida Sans" pitchFamily="34" charset="0"/>
+                          <a:ea typeface="Lucida Sans" pitchFamily="34" charset="-122"/>
+                          <a:cs typeface="Lucida Sans" pitchFamily="34" charset="-120"/>
                         </a:rPr>
                         <a:t>Wahl</a:t>
                       </a:r>
                       <a:endParaRPr lang="en-US" sz="1600" dirty="0">
-                        <a:latin typeface="Calibri" charset="0"/>
-                        <a:ea typeface="Calibri" charset="0"/>
-                        <a:cs typeface="Calibri" charset="0"/>
+                        <a:latin typeface="Lucida Sans" charset="0"/>
+                        <a:ea typeface="Lucida Sans" charset="0"/>
+                        <a:cs typeface="Lucida Sans" charset="0"/>
                       </a:endParaRPr>
                     </a:p>
                   </a:txBody>
                   <a:tcPr marL="101600" marR="101600" marT="63500" marB="63500" anchor="ctr">
                     <a:lnL w="9525" cap="flat" cmpd="sng" algn="ctr">
                       <a:solidFill>
-                        <a:srgbClr val="C9DAD8"/>
+                        <a:srgbClr val="D9D9D9"/>
                       </a:solidFill>
                       <a:prstDash val="solid"/>
                       <a:round/>
@@ -2954,7 +3002,7 @@
                     </a:lnL>
                     <a:lnR w="9525" cap="flat" cmpd="sng" algn="ctr">
                       <a:solidFill>
-                        <a:srgbClr val="C9DAD8"/>
+                        <a:srgbClr val="D9D9D9"/>
                       </a:solidFill>
                       <a:prstDash val="solid"/>
                       <a:round/>
@@ -2963,7 +3011,7 @@
                     </a:lnR>
                     <a:lnT w="9525" cap="flat" cmpd="sng" algn="ctr">
                       <a:solidFill>
-                        <a:srgbClr val="C9DAD8"/>
+                        <a:srgbClr val="D9D9D9"/>
                       </a:solidFill>
                       <a:prstDash val="solid"/>
                       <a:round/>
@@ -2972,7 +3020,7 @@
                     </a:lnT>
                     <a:lnB w="9525" cap="flat" cmpd="sng" algn="ctr">
                       <a:solidFill>
-                        <a:srgbClr val="C9DAD8"/>
+                        <a:srgbClr val="D9D9D9"/>
                       </a:solidFill>
                       <a:prstDash val="solid"/>
                       <a:round/>
@@ -2980,7 +3028,7 @@
                       <a:tailEnd type="none" w="med" len="med"/>
                     </a:lnB>
                     <a:solidFill>
-                      <a:srgbClr val="0B6E69"/>
+                      <a:srgbClr val="7A003F"/>
                     </a:solidFill>
                   </a:tcPr>
                 </a:tc>
@@ -2997,25 +3045,25 @@
                       <a:r>
                         <a:rPr lang="en-US" sz="1600" dirty="0">
                           <a:solidFill>
-                            <a:srgbClr val="1F2A30"/>
+                            <a:srgbClr val="1D1D1B"/>
                           </a:solidFill>
-                          <a:latin typeface="Calibri" pitchFamily="34" charset="0"/>
-                          <a:ea typeface="Calibri" pitchFamily="34" charset="-122"/>
-                          <a:cs typeface="Calibri" pitchFamily="34" charset="-120"/>
+                          <a:latin typeface="Lucida Sans" pitchFamily="34" charset="0"/>
+                          <a:ea typeface="Lucida Sans" pitchFamily="34" charset="-122"/>
+                          <a:cs typeface="Lucida Sans" pitchFamily="34" charset="-120"/>
                         </a:rPr>
                         <a:t>A</a:t>
                       </a:r>
                       <a:endParaRPr lang="en-US" sz="1600" dirty="0">
-                        <a:latin typeface="Calibri" charset="0"/>
-                        <a:ea typeface="Calibri" charset="0"/>
-                        <a:cs typeface="Calibri" charset="0"/>
+                        <a:latin typeface="Lucida Sans" charset="0"/>
+                        <a:ea typeface="Lucida Sans" charset="0"/>
+                        <a:cs typeface="Lucida Sans" charset="0"/>
                       </a:endParaRPr>
                     </a:p>
                   </a:txBody>
                   <a:tcPr marL="101600" marR="101600" marT="63500" marB="63500" anchor="ctr">
                     <a:lnL w="9525" cap="flat" cmpd="sng" algn="ctr">
                       <a:solidFill>
-                        <a:srgbClr val="C9DAD8"/>
+                        <a:srgbClr val="D9D9D9"/>
                       </a:solidFill>
                       <a:prstDash val="solid"/>
                       <a:round/>
@@ -3024,7 +3072,7 @@
                     </a:lnL>
                     <a:lnR w="9525" cap="flat" cmpd="sng" algn="ctr">
                       <a:solidFill>
-                        <a:srgbClr val="C9DAD8"/>
+                        <a:srgbClr val="D9D9D9"/>
                       </a:solidFill>
                       <a:prstDash val="solid"/>
                       <a:round/>
@@ -3033,7 +3081,7 @@
                     </a:lnR>
                     <a:lnT w="9525" cap="flat" cmpd="sng" algn="ctr">
                       <a:solidFill>
-                        <a:srgbClr val="C9DAD8"/>
+                        <a:srgbClr val="D9D9D9"/>
                       </a:solidFill>
                       <a:prstDash val="solid"/>
                       <a:round/>
@@ -3042,7 +3090,7 @@
                     </a:lnT>
                     <a:lnB w="9525" cap="flat" cmpd="sng" algn="ctr">
                       <a:solidFill>
-                        <a:srgbClr val="C9DAD8"/>
+                        <a:srgbClr val="D9D9D9"/>
                       </a:solidFill>
                       <a:prstDash val="solid"/>
                       <a:round/>
@@ -3065,25 +3113,25 @@
                       <a:r>
                         <a:rPr lang="en-US" sz="1600" dirty="0">
                           <a:solidFill>
-                            <a:srgbClr val="1F2A30"/>
+                            <a:srgbClr val="1D1D1B"/>
                           </a:solidFill>
-                          <a:latin typeface="Calibri" pitchFamily="34" charset="0"/>
-                          <a:ea typeface="Calibri" pitchFamily="34" charset="-122"/>
-                          <a:cs typeface="Calibri" pitchFamily="34" charset="-120"/>
+                          <a:latin typeface="Lucida Sans" pitchFamily="34" charset="0"/>
+                          <a:ea typeface="Lucida Sans" pitchFamily="34" charset="-122"/>
+                          <a:cs typeface="Lucida Sans" pitchFamily="34" charset="-120"/>
                         </a:rPr>
                         <a:t>A1 Strecke messen: genau 50 cm, Strecken- vs. Zeitversion</a:t>
                       </a:r>
                       <a:endParaRPr lang="en-US" sz="1600" dirty="0">
-                        <a:latin typeface="Calibri" charset="0"/>
-                        <a:ea typeface="Calibri" charset="0"/>
-                        <a:cs typeface="Calibri" charset="0"/>
+                        <a:latin typeface="Lucida Sans" charset="0"/>
+                        <a:ea typeface="Lucida Sans" charset="0"/>
+                        <a:cs typeface="Lucida Sans" charset="0"/>
                       </a:endParaRPr>
                     </a:p>
                   </a:txBody>
                   <a:tcPr marL="101600" marR="101600" marT="63500" marB="63500" anchor="ctr">
                     <a:lnL w="9525" cap="flat" cmpd="sng" algn="ctr">
                       <a:solidFill>
-                        <a:srgbClr val="C9DAD8"/>
+                        <a:srgbClr val="D9D9D9"/>
                       </a:solidFill>
                       <a:prstDash val="solid"/>
                       <a:round/>
@@ -3092,7 +3140,7 @@
                     </a:lnL>
                     <a:lnR w="9525" cap="flat" cmpd="sng" algn="ctr">
                       <a:solidFill>
-                        <a:srgbClr val="C9DAD8"/>
+                        <a:srgbClr val="D9D9D9"/>
                       </a:solidFill>
                       <a:prstDash val="solid"/>
                       <a:round/>
@@ -3101,7 +3149,7 @@
                     </a:lnR>
                     <a:lnT w="9525" cap="flat" cmpd="sng" algn="ctr">
                       <a:solidFill>
-                        <a:srgbClr val="C9DAD8"/>
+                        <a:srgbClr val="D9D9D9"/>
                       </a:solidFill>
                       <a:prstDash val="solid"/>
                       <a:round/>
@@ -3110,7 +3158,7 @@
                     </a:lnT>
                     <a:lnB w="9525" cap="flat" cmpd="sng" algn="ctr">
                       <a:solidFill>
-                        <a:srgbClr val="C9DAD8"/>
+                        <a:srgbClr val="D9D9D9"/>
                       </a:solidFill>
                       <a:prstDash val="solid"/>
                       <a:round/>
@@ -3133,25 +3181,25 @@
                       <a:r>
                         <a:rPr lang="en-US" sz="1600" dirty="0">
                           <a:solidFill>
-                            <a:srgbClr val="1F2A30"/>
+                            <a:srgbClr val="1D1D1B"/>
                           </a:solidFill>
-                          <a:latin typeface="Calibri" pitchFamily="34" charset="0"/>
-                          <a:ea typeface="Calibri" pitchFamily="34" charset="-122"/>
-                          <a:cs typeface="Calibri" pitchFamily="34" charset="-120"/>
+                          <a:latin typeface="Lucida Sans" pitchFamily="34" charset="0"/>
+                          <a:ea typeface="Lucida Sans" pitchFamily="34" charset="-122"/>
+                          <a:cs typeface="Lucida Sans" pitchFamily="34" charset="-120"/>
                         </a:rPr>
                         <a:t>A2 Vielecke (Drehwinkel berechnen) oder A3 Hell-Dunkel-Licht</a:t>
                       </a:r>
                       <a:endParaRPr lang="en-US" sz="1600" dirty="0">
-                        <a:latin typeface="Calibri" charset="0"/>
-                        <a:ea typeface="Calibri" charset="0"/>
-                        <a:cs typeface="Calibri" charset="0"/>
+                        <a:latin typeface="Lucida Sans" charset="0"/>
+                        <a:ea typeface="Lucida Sans" charset="0"/>
+                        <a:cs typeface="Lucida Sans" charset="0"/>
                       </a:endParaRPr>
                     </a:p>
                   </a:txBody>
                   <a:tcPr marL="101600" marR="101600" marT="63500" marB="63500" anchor="ctr">
                     <a:lnL w="9525" cap="flat" cmpd="sng" algn="ctr">
                       <a:solidFill>
-                        <a:srgbClr val="C9DAD8"/>
+                        <a:srgbClr val="D9D9D9"/>
                       </a:solidFill>
                       <a:prstDash val="solid"/>
                       <a:round/>
@@ -3160,7 +3208,7 @@
                     </a:lnL>
                     <a:lnR w="9525" cap="flat" cmpd="sng" algn="ctr">
                       <a:solidFill>
-                        <a:srgbClr val="C9DAD8"/>
+                        <a:srgbClr val="D9D9D9"/>
                       </a:solidFill>
                       <a:prstDash val="solid"/>
                       <a:round/>
@@ -3169,7 +3217,7 @@
                     </a:lnR>
                     <a:lnT w="9525" cap="flat" cmpd="sng" algn="ctr">
                       <a:solidFill>
-                        <a:srgbClr val="C9DAD8"/>
+                        <a:srgbClr val="D9D9D9"/>
                       </a:solidFill>
                       <a:prstDash val="solid"/>
                       <a:round/>
@@ -3178,7 +3226,7 @@
                     </a:lnT>
                     <a:lnB w="9525" cap="flat" cmpd="sng" algn="ctr">
                       <a:solidFill>
-                        <a:srgbClr val="C9DAD8"/>
+                        <a:srgbClr val="D9D9D9"/>
                       </a:solidFill>
                       <a:prstDash val="solid"/>
                       <a:round/>
@@ -3203,25 +3251,25 @@
                       <a:r>
                         <a:rPr lang="en-US" sz="1600" dirty="0">
                           <a:solidFill>
-                            <a:srgbClr val="1F2A30"/>
+                            <a:srgbClr val="1D1D1B"/>
                           </a:solidFill>
-                          <a:latin typeface="Calibri" pitchFamily="34" charset="0"/>
-                          <a:ea typeface="Calibri" pitchFamily="34" charset="-122"/>
-                          <a:cs typeface="Calibri" pitchFamily="34" charset="-120"/>
+                          <a:latin typeface="Lucida Sans" pitchFamily="34" charset="0"/>
+                          <a:ea typeface="Lucida Sans" pitchFamily="34" charset="-122"/>
+                          <a:cs typeface="Lucida Sans" pitchFamily="34" charset="-120"/>
                         </a:rPr>
                         <a:t>B</a:t>
                       </a:r>
                       <a:endParaRPr lang="en-US" sz="1600" dirty="0">
-                        <a:latin typeface="Calibri" charset="0"/>
-                        <a:ea typeface="Calibri" charset="0"/>
-                        <a:cs typeface="Calibri" charset="0"/>
+                        <a:latin typeface="Lucida Sans" charset="0"/>
+                        <a:ea typeface="Lucida Sans" charset="0"/>
+                        <a:cs typeface="Lucida Sans" charset="0"/>
                       </a:endParaRPr>
                     </a:p>
                   </a:txBody>
                   <a:tcPr marL="101600" marR="101600" marT="63500" marB="63500" anchor="ctr">
                     <a:lnL w="9525" cap="flat" cmpd="sng" algn="ctr">
                       <a:solidFill>
-                        <a:srgbClr val="C9DAD8"/>
+                        <a:srgbClr val="D9D9D9"/>
                       </a:solidFill>
                       <a:prstDash val="solid"/>
                       <a:round/>
@@ -3230,7 +3278,7 @@
                     </a:lnL>
                     <a:lnR w="9525" cap="flat" cmpd="sng" algn="ctr">
                       <a:solidFill>
-                        <a:srgbClr val="C9DAD8"/>
+                        <a:srgbClr val="D9D9D9"/>
                       </a:solidFill>
                       <a:prstDash val="solid"/>
                       <a:round/>
@@ -3239,7 +3287,7 @@
                     </a:lnR>
                     <a:lnT w="9525" cap="flat" cmpd="sng" algn="ctr">
                       <a:solidFill>
-                        <a:srgbClr val="C9DAD8"/>
+                        <a:srgbClr val="D9D9D9"/>
                       </a:solidFill>
                       <a:prstDash val="solid"/>
                       <a:round/>
@@ -3248,7 +3296,7 @@
                     </a:lnT>
                     <a:lnB w="9525" cap="flat" cmpd="sng" algn="ctr">
                       <a:solidFill>
-                        <a:srgbClr val="C9DAD8"/>
+                        <a:srgbClr val="D9D9D9"/>
                       </a:solidFill>
                       <a:prstDash val="solid"/>
                       <a:round/>
@@ -3256,7 +3304,7 @@
                       <a:tailEnd type="none" w="med" len="med"/>
                     </a:lnB>
                     <a:solidFill>
-                      <a:srgbClr val="F4F9F8"/>
+                      <a:srgbClr val="F7F7F7"/>
                     </a:solidFill>
                   </a:tcPr>
                 </a:tc>
@@ -3271,25 +3319,25 @@
                       <a:r>
                         <a:rPr lang="en-US" sz="1600" dirty="0">
                           <a:solidFill>
-                            <a:srgbClr val="1F2A30"/>
+                            <a:srgbClr val="1D1D1B"/>
                           </a:solidFill>
-                          <a:latin typeface="Calibri" pitchFamily="34" charset="0"/>
-                          <a:ea typeface="Calibri" pitchFamily="34" charset="-122"/>
-                          <a:cs typeface="Calibri" pitchFamily="34" charset="-120"/>
+                          <a:latin typeface="Lucida Sans" pitchFamily="34" charset="0"/>
+                          <a:ea typeface="Lucida Sans" pitchFamily="34" charset="-122"/>
+                          <a:cs typeface="Lucida Sans" pitchFamily="34" charset="-120"/>
                         </a:rPr>
                         <a:t>B1 Hindernis: stoppen, zurück, drehen; tatsächlichen Abstand messen</a:t>
                       </a:r>
                       <a:endParaRPr lang="en-US" sz="1600" dirty="0">
-                        <a:latin typeface="Calibri" charset="0"/>
-                        <a:ea typeface="Calibri" charset="0"/>
-                        <a:cs typeface="Calibri" charset="0"/>
+                        <a:latin typeface="Lucida Sans" charset="0"/>
+                        <a:ea typeface="Lucida Sans" charset="0"/>
+                        <a:cs typeface="Lucida Sans" charset="0"/>
                       </a:endParaRPr>
                     </a:p>
                   </a:txBody>
                   <a:tcPr marL="101600" marR="101600" marT="63500" marB="63500" anchor="ctr">
                     <a:lnL w="9525" cap="flat" cmpd="sng" algn="ctr">
                       <a:solidFill>
-                        <a:srgbClr val="C9DAD8"/>
+                        <a:srgbClr val="D9D9D9"/>
                       </a:solidFill>
                       <a:prstDash val="solid"/>
                       <a:round/>
@@ -3298,7 +3346,7 @@
                     </a:lnL>
                     <a:lnR w="9525" cap="flat" cmpd="sng" algn="ctr">
                       <a:solidFill>
-                        <a:srgbClr val="C9DAD8"/>
+                        <a:srgbClr val="D9D9D9"/>
                       </a:solidFill>
                       <a:prstDash val="solid"/>
                       <a:round/>
@@ -3307,7 +3355,7 @@
                     </a:lnR>
                     <a:lnT w="9525" cap="flat" cmpd="sng" algn="ctr">
                       <a:solidFill>
-                        <a:srgbClr val="C9DAD8"/>
+                        <a:srgbClr val="D9D9D9"/>
                       </a:solidFill>
                       <a:prstDash val="solid"/>
                       <a:round/>
@@ -3316,7 +3364,7 @@
                     </a:lnT>
                     <a:lnB w="9525" cap="flat" cmpd="sng" algn="ctr">
                       <a:solidFill>
-                        <a:srgbClr val="C9DAD8"/>
+                        <a:srgbClr val="D9D9D9"/>
                       </a:solidFill>
                       <a:prstDash val="solid"/>
                       <a:round/>
@@ -3324,7 +3372,7 @@
                       <a:tailEnd type="none" w="med" len="med"/>
                     </a:lnB>
                     <a:solidFill>
-                      <a:srgbClr val="F4F9F8"/>
+                      <a:srgbClr val="F7F7F7"/>
                     </a:solidFill>
                   </a:tcPr>
                 </a:tc>
@@ -3339,25 +3387,25 @@
                       <a:r>
                         <a:rPr lang="en-US" sz="1600" dirty="0">
                           <a:solidFill>
-                            <a:srgbClr val="1F2A30"/>
+                            <a:srgbClr val="1D1D1B"/>
                           </a:solidFill>
-                          <a:latin typeface="Calibri" pitchFamily="34" charset="0"/>
-                          <a:ea typeface="Calibri" pitchFamily="34" charset="-122"/>
-                          <a:cs typeface="Calibri" pitchFamily="34" charset="-120"/>
+                          <a:latin typeface="Lucida Sans" pitchFamily="34" charset="0"/>
+                          <a:ea typeface="Lucida Sans" pitchFamily="34" charset="-122"/>
+                          <a:cs typeface="Lucida Sans" pitchFamily="34" charset="-120"/>
                         </a:rPr>
                         <a:t>B2 Linienfolger (Zweipunktregler) oder B3 Zufall (20 Versuche)</a:t>
                       </a:r>
                       <a:endParaRPr lang="en-US" sz="1600" dirty="0">
-                        <a:latin typeface="Calibri" charset="0"/>
-                        <a:ea typeface="Calibri" charset="0"/>
-                        <a:cs typeface="Calibri" charset="0"/>
+                        <a:latin typeface="Lucida Sans" charset="0"/>
+                        <a:ea typeface="Lucida Sans" charset="0"/>
+                        <a:cs typeface="Lucida Sans" charset="0"/>
                       </a:endParaRPr>
                     </a:p>
                   </a:txBody>
                   <a:tcPr marL="101600" marR="101600" marT="63500" marB="63500" anchor="ctr">
                     <a:lnL w="9525" cap="flat" cmpd="sng" algn="ctr">
                       <a:solidFill>
-                        <a:srgbClr val="C9DAD8"/>
+                        <a:srgbClr val="D9D9D9"/>
                       </a:solidFill>
                       <a:prstDash val="solid"/>
                       <a:round/>
@@ -3366,7 +3414,7 @@
                     </a:lnL>
                     <a:lnR w="9525" cap="flat" cmpd="sng" algn="ctr">
                       <a:solidFill>
-                        <a:srgbClr val="C9DAD8"/>
+                        <a:srgbClr val="D9D9D9"/>
                       </a:solidFill>
                       <a:prstDash val="solid"/>
                       <a:round/>
@@ -3375,7 +3423,7 @@
                     </a:lnR>
                     <a:lnT w="9525" cap="flat" cmpd="sng" algn="ctr">
                       <a:solidFill>
-                        <a:srgbClr val="C9DAD8"/>
+                        <a:srgbClr val="D9D9D9"/>
                       </a:solidFill>
                       <a:prstDash val="solid"/>
                       <a:round/>
@@ -3384,7 +3432,7 @@
                     </a:lnT>
                     <a:lnB w="9525" cap="flat" cmpd="sng" algn="ctr">
                       <a:solidFill>
-                        <a:srgbClr val="C9DAD8"/>
+                        <a:srgbClr val="D9D9D9"/>
                       </a:solidFill>
                       <a:prstDash val="solid"/>
                       <a:round/>
@@ -3392,7 +3440,7 @@
                       <a:tailEnd type="none" w="med" len="med"/>
                     </a:lnB>
                     <a:solidFill>
-                      <a:srgbClr val="F4F9F8"/>
+                      <a:srgbClr val="F7F7F7"/>
                     </a:solidFill>
                   </a:tcPr>
                 </a:tc>
@@ -3409,25 +3457,25 @@
                       <a:r>
                         <a:rPr lang="en-US" sz="1600" dirty="0">
                           <a:solidFill>
-                            <a:srgbClr val="1F2A30"/>
+                            <a:srgbClr val="1D1D1B"/>
                           </a:solidFill>
-                          <a:latin typeface="Calibri" pitchFamily="34" charset="0"/>
-                          <a:ea typeface="Calibri" pitchFamily="34" charset="-122"/>
-                          <a:cs typeface="Calibri" pitchFamily="34" charset="-120"/>
+                          <a:latin typeface="Lucida Sans" pitchFamily="34" charset="0"/>
+                          <a:ea typeface="Lucida Sans" pitchFamily="34" charset="-122"/>
+                          <a:cs typeface="Lucida Sans" pitchFamily="34" charset="-120"/>
                         </a:rPr>
                         <a:t>C</a:t>
                       </a:r>
                       <a:endParaRPr lang="en-US" sz="1600" dirty="0">
-                        <a:latin typeface="Calibri" charset="0"/>
-                        <a:ea typeface="Calibri" charset="0"/>
-                        <a:cs typeface="Calibri" charset="0"/>
+                        <a:latin typeface="Lucida Sans" charset="0"/>
+                        <a:ea typeface="Lucida Sans" charset="0"/>
+                        <a:cs typeface="Lucida Sans" charset="0"/>
                       </a:endParaRPr>
                     </a:p>
                   </a:txBody>
                   <a:tcPr marL="101600" marR="101600" marT="63500" marB="63500" anchor="ctr">
                     <a:lnL w="9525" cap="flat" cmpd="sng" algn="ctr">
                       <a:solidFill>
-                        <a:srgbClr val="C9DAD8"/>
+                        <a:srgbClr val="D9D9D9"/>
                       </a:solidFill>
                       <a:prstDash val="solid"/>
                       <a:round/>
@@ -3436,7 +3484,7 @@
                     </a:lnL>
                     <a:lnR w="9525" cap="flat" cmpd="sng" algn="ctr">
                       <a:solidFill>
-                        <a:srgbClr val="C9DAD8"/>
+                        <a:srgbClr val="D9D9D9"/>
                       </a:solidFill>
                       <a:prstDash val="solid"/>
                       <a:round/>
@@ -3445,7 +3493,7 @@
                     </a:lnR>
                     <a:lnT w="9525" cap="flat" cmpd="sng" algn="ctr">
                       <a:solidFill>
-                        <a:srgbClr val="C9DAD8"/>
+                        <a:srgbClr val="D9D9D9"/>
                       </a:solidFill>
                       <a:prstDash val="solid"/>
                       <a:round/>
@@ -3454,7 +3502,7 @@
                     </a:lnT>
                     <a:lnB w="9525" cap="flat" cmpd="sng" algn="ctr">
                       <a:solidFill>
-                        <a:srgbClr val="C9DAD8"/>
+                        <a:srgbClr val="D9D9D9"/>
                       </a:solidFill>
                       <a:prstDash val="solid"/>
                       <a:round/>
@@ -3477,25 +3525,25 @@
                       <a:r>
                         <a:rPr lang="en-US" sz="1600" dirty="0">
                           <a:solidFill>
-                            <a:srgbClr val="1F2A30"/>
+                            <a:srgbClr val="1D1D1B"/>
                           </a:solidFill>
-                          <a:latin typeface="Calibri" pitchFamily="34" charset="0"/>
-                          <a:ea typeface="Calibri" pitchFamily="34" charset="-122"/>
-                          <a:cs typeface="Calibri" pitchFamily="34" charset="-120"/>
+                          <a:latin typeface="Lucida Sans" pitchFamily="34" charset="0"/>
+                          <a:ea typeface="Lucida Sans" pitchFamily="34" charset="-122"/>
+                          <a:cs typeface="Lucida Sans" pitchFamily="34" charset="-120"/>
                         </a:rPr>
                         <a:t>C1 Linienfolger als Proportionalregler, Parameter dokumentieren</a:t>
                       </a:r>
                       <a:endParaRPr lang="en-US" sz="1600" dirty="0">
-                        <a:latin typeface="Calibri" charset="0"/>
-                        <a:ea typeface="Calibri" charset="0"/>
-                        <a:cs typeface="Calibri" charset="0"/>
+                        <a:latin typeface="Lucida Sans" charset="0"/>
+                        <a:ea typeface="Lucida Sans" charset="0"/>
+                        <a:cs typeface="Lucida Sans" charset="0"/>
                       </a:endParaRPr>
                     </a:p>
                   </a:txBody>
                   <a:tcPr marL="101600" marR="101600" marT="63500" marB="63500" anchor="ctr">
                     <a:lnL w="9525" cap="flat" cmpd="sng" algn="ctr">
                       <a:solidFill>
-                        <a:srgbClr val="C9DAD8"/>
+                        <a:srgbClr val="D9D9D9"/>
                       </a:solidFill>
                       <a:prstDash val="solid"/>
                       <a:round/>
@@ -3504,7 +3552,7 @@
                     </a:lnL>
                     <a:lnR w="9525" cap="flat" cmpd="sng" algn="ctr">
                       <a:solidFill>
-                        <a:srgbClr val="C9DAD8"/>
+                        <a:srgbClr val="D9D9D9"/>
                       </a:solidFill>
                       <a:prstDash val="solid"/>
                       <a:round/>
@@ -3513,7 +3561,7 @@
                     </a:lnR>
                     <a:lnT w="9525" cap="flat" cmpd="sng" algn="ctr">
                       <a:solidFill>
-                        <a:srgbClr val="C9DAD8"/>
+                        <a:srgbClr val="D9D9D9"/>
                       </a:solidFill>
                       <a:prstDash val="solid"/>
                       <a:round/>
@@ -3522,7 +3570,7 @@
                     </a:lnT>
                     <a:lnB w="9525" cap="flat" cmpd="sng" algn="ctr">
                       <a:solidFill>
-                        <a:srgbClr val="C9DAD8"/>
+                        <a:srgbClr val="D9D9D9"/>
                       </a:solidFill>
                       <a:prstDash val="solid"/>
                       <a:round/>
@@ -3545,25 +3593,25 @@
                       <a:r>
                         <a:rPr lang="en-US" sz="1600" dirty="0">
                           <a:solidFill>
-                            <a:srgbClr val="1F2A30"/>
+                            <a:srgbClr val="1D1D1B"/>
                           </a:solidFill>
-                          <a:latin typeface="Calibri" pitchFamily="34" charset="0"/>
-                          <a:ea typeface="Calibri" pitchFamily="34" charset="-122"/>
-                          <a:cs typeface="Calibri" pitchFamily="34" charset="-120"/>
+                          <a:latin typeface="Lucida Sans" pitchFamily="34" charset="0"/>
+                          <a:ea typeface="Lucida Sans" pitchFamily="34" charset="-122"/>
+                          <a:cs typeface="Lucida Sans" pitchFamily="34" charset="-120"/>
                         </a:rPr>
                         <a:t>C2 Verhaltensmodell (Photokinese) oder C3 eigene Unterrichtsaufgabe</a:t>
                       </a:r>
                       <a:endParaRPr lang="en-US" sz="1600" dirty="0">
-                        <a:latin typeface="Calibri" charset="0"/>
-                        <a:ea typeface="Calibri" charset="0"/>
-                        <a:cs typeface="Calibri" charset="0"/>
+                        <a:latin typeface="Lucida Sans" charset="0"/>
+                        <a:ea typeface="Lucida Sans" charset="0"/>
+                        <a:cs typeface="Lucida Sans" charset="0"/>
                       </a:endParaRPr>
                     </a:p>
                   </a:txBody>
                   <a:tcPr marL="101600" marR="101600" marT="63500" marB="63500" anchor="ctr">
                     <a:lnL w="9525" cap="flat" cmpd="sng" algn="ctr">
                       <a:solidFill>
-                        <a:srgbClr val="C9DAD8"/>
+                        <a:srgbClr val="D9D9D9"/>
                       </a:solidFill>
                       <a:prstDash val="solid"/>
                       <a:round/>
@@ -3572,7 +3620,7 @@
                     </a:lnL>
                     <a:lnR w="9525" cap="flat" cmpd="sng" algn="ctr">
                       <a:solidFill>
-                        <a:srgbClr val="C9DAD8"/>
+                        <a:srgbClr val="D9D9D9"/>
                       </a:solidFill>
                       <a:prstDash val="solid"/>
                       <a:round/>
@@ -3581,7 +3629,7 @@
                     </a:lnR>
                     <a:lnT w="9525" cap="flat" cmpd="sng" algn="ctr">
                       <a:solidFill>
-                        <a:srgbClr val="C9DAD8"/>
+                        <a:srgbClr val="D9D9D9"/>
                       </a:solidFill>
                       <a:prstDash val="solid"/>
                       <a:round/>
@@ -3590,7 +3638,7 @@
                     </a:lnT>
                     <a:lnB w="9525" cap="flat" cmpd="sng" algn="ctr">
                       <a:solidFill>
-                        <a:srgbClr val="C9DAD8"/>
+                        <a:srgbClr val="D9D9D9"/>
                       </a:solidFill>
                       <a:prstDash val="solid"/>
                       <a:round/>
@@ -3624,11 +3672,11 @@
             </a:avLst>
           </a:prstGeom>
           <a:solidFill>
-            <a:srgbClr val="FCEBDD"/>
+            <a:srgbClr val="FDF0E3"/>
           </a:solidFill>
           <a:ln w="12700">
             <a:solidFill>
-              <a:srgbClr val="FCEBDD"/>
+              <a:srgbClr val="FDF0E3"/>
             </a:solidFill>
             <a:prstDash val="solid"/>
           </a:ln>
@@ -3649,11 +3697,11 @@
             <a:avLst/>
           </a:prstGeom>
           <a:solidFill>
-            <a:srgbClr val="E8772E"/>
+            <a:srgbClr val="EF7D00"/>
           </a:solidFill>
           <a:ln w="12700">
             <a:solidFill>
-              <a:srgbClr val="E8772E"/>
+              <a:srgbClr val="EF7D00"/>
             </a:solidFill>
             <a:prstDash val="solid"/>
           </a:ln>
@@ -3686,11 +3734,11 @@
             <a:r>
               <a:rPr lang="en-US" sz="2000" b="1" dirty="0">
                 <a:solidFill>
-                  <a:srgbClr val="FFFFFF"/>
-                </a:solidFill>
-                <a:latin typeface="Calibri" pitchFamily="34" charset="0"/>
-                <a:ea typeface="Calibri" pitchFamily="34" charset="-122"/>
-                <a:cs typeface="Calibri" pitchFamily="34" charset="-120"/>
+                  <a:srgbClr val="1D1D1B"/>
+                </a:solidFill>
+                <a:latin typeface="Lucida Sans" pitchFamily="34" charset="0"/>
+                <a:ea typeface="Lucida Sans" pitchFamily="34" charset="-122"/>
+                <a:cs typeface="Lucida Sans" pitchFamily="34" charset="-120"/>
               </a:rPr>
               <a:t>!</a:t>
             </a:r>
@@ -3725,11 +3773,11 @@
             <a:r>
               <a:rPr lang="en-US" sz="1500" dirty="0">
                 <a:solidFill>
-                  <a:srgbClr val="0B3C49"/>
-                </a:solidFill>
-                <a:latin typeface="Calibri" pitchFamily="34" charset="0"/>
-                <a:ea typeface="Calibri" pitchFamily="34" charset="-122"/>
-                <a:cs typeface="Calibri" pitchFamily="34" charset="-120"/>
+                  <a:srgbClr val="7A003F"/>
+                </a:solidFill>
+                <a:latin typeface="Lucida Sans" pitchFamily="34" charset="0"/>
+                <a:ea typeface="Lucida Sans" pitchFamily="34" charset="-122"/>
+                <a:cs typeface="Lucida Sans" pitchFamily="34" charset="-120"/>
               </a:rPr>
               <a:t>Für jede Aufgabe: vorhersagen → testen → messen → eine Sache ändern → wieder testen. Hilfekarten erst nach 3 Minuten eigenem Probieren.</a:t>
             </a:r>
@@ -3767,11 +3815,11 @@
             <a:lvl1pPr>
               <a:defRPr sz="1000">
                 <a:solidFill>
-                  <a:srgbClr val="5B6B73"/>
-                </a:solidFill>
-                <a:latin typeface="Calibri"/>
-                <a:ea typeface="Calibri"/>
-                <a:cs typeface="Calibri"/>
+                  <a:srgbClr val="706F6F"/>
+                </a:solidFill>
+                <a:latin typeface="Lucida Sans"/>
+                <a:ea typeface="Lucida Sans"/>
+                <a:cs typeface="Lucida Sans"/>
               </a:defRPr>
             </a:lvl1pPr>
           </a:lstStyle>
@@ -3815,13 +3863,13 @@
           <p:cNvPr id="2" name="Text 1"/>
           <p:cNvSpPr/>
           <p:nvPr>
-            <p:ph idx="101" type="title" hasCustomPrompt="1"/>
+            <p:ph idx="102" type="title" hasCustomPrompt="1"/>
           </p:nvPr>
         </p:nvSpPr>
         <p:spPr>
           <a:xfrm>
-            <a:off x="548640" y="320040"/>
-            <a:ext cx="11094415" cy="777240"/>
+            <a:off x="548640" y="274320"/>
+            <a:ext cx="8351215" cy="896112"/>
           </a:xfrm>
           <a:prstGeom prst="rect">
             <a:avLst/>
@@ -3833,21 +3881,21 @@
           <a:bodyPr wrap="square" lIns="0" tIns="0" rIns="0" bIns="0" rtlCol="0" anchor="ctr"/>
           <a:lstStyle/>
           <a:p>
-            <a:pPr indent="0" marL="0">
-              <a:buNone/>
-            </a:pPr>
-            <a:r>
-              <a:rPr lang="en-US" sz="3200" b="1" dirty="0">
-                <a:solidFill>
-                  <a:srgbClr val="0B3C49"/>
-                </a:solidFill>
-                <a:latin typeface="Cambria" pitchFamily="34" charset="0"/>
-                <a:ea typeface="Cambria" pitchFamily="34" charset="-122"/>
-                <a:cs typeface="Cambria" pitchFamily="34" charset="-120"/>
+            <a:pPr algn="l" indent="0" marL="0">
+              <a:buNone/>
+            </a:pPr>
+            <a:r>
+              <a:rPr lang="en-US" sz="2600" b="1" dirty="0">
+                <a:solidFill>
+                  <a:srgbClr val="7A003F"/>
+                </a:solidFill>
+                <a:latin typeface="Lucida Sans" pitchFamily="34" charset="0"/>
+                <a:ea typeface="Lucida Sans" pitchFamily="34" charset="-122"/>
+                <a:cs typeface="Lucida Sans" pitchFamily="34" charset="-120"/>
               </a:rPr>
               <a:t>Gestufte Hilfen und die Debugging-Regel</a:t>
             </a:r>
-            <a:endParaRPr lang="en-US" sz="3200" dirty="0"/>
+            <a:endParaRPr lang="en-US" sz="2600" dirty="0"/>
           </a:p>
         </p:txBody>
       </p:sp>
@@ -3868,11 +3916,11 @@
             </a:avLst>
           </a:prstGeom>
           <a:solidFill>
-            <a:srgbClr val="E6F2F1"/>
+            <a:srgbClr val="F2F2F2"/>
           </a:solidFill>
           <a:ln w="12700">
             <a:solidFill>
-              <a:srgbClr val="E6F2F1"/>
+              <a:srgbClr val="F2F2F2"/>
             </a:solidFill>
             <a:prstDash val="solid"/>
           </a:ln>
@@ -3893,11 +3941,11 @@
             <a:avLst/>
           </a:prstGeom>
           <a:solidFill>
-            <a:srgbClr val="0B6E69"/>
+            <a:srgbClr val="7A003F"/>
           </a:solidFill>
           <a:ln w="12700">
             <a:solidFill>
-              <a:srgbClr val="0B6E69"/>
+              <a:srgbClr val="7A003F"/>
             </a:solidFill>
             <a:prstDash val="solid"/>
           </a:ln>
@@ -3932,9 +3980,9 @@
                 <a:solidFill>
                   <a:srgbClr val="FFFFFF"/>
                 </a:solidFill>
-                <a:latin typeface="Calibri" pitchFamily="34" charset="0"/>
-                <a:ea typeface="Calibri" pitchFamily="34" charset="-122"/>
-                <a:cs typeface="Calibri" pitchFamily="34" charset="-120"/>
+                <a:latin typeface="Lucida Sans" pitchFamily="34" charset="0"/>
+                <a:ea typeface="Lucida Sans" pitchFamily="34" charset="-122"/>
+                <a:cs typeface="Lucida Sans" pitchFamily="34" charset="-120"/>
               </a:rPr>
               <a:t>H1</a:t>
             </a:r>
@@ -3969,11 +4017,11 @@
             <a:r>
               <a:rPr lang="en-US" sz="1800" b="1" dirty="0">
                 <a:solidFill>
-                  <a:srgbClr val="0B3C49"/>
-                </a:solidFill>
-                <a:latin typeface="Calibri" pitchFamily="34" charset="0"/>
-                <a:ea typeface="Calibri" pitchFamily="34" charset="-122"/>
-                <a:cs typeface="Calibri" pitchFamily="34" charset="-120"/>
+                  <a:srgbClr val="7A003F"/>
+                </a:solidFill>
+                <a:latin typeface="Lucida Sans" pitchFamily="34" charset="0"/>
+                <a:ea typeface="Lucida Sans" pitchFamily="34" charset="-122"/>
+                <a:cs typeface="Lucida Sans" pitchFamily="34" charset="-120"/>
               </a:rPr>
               <a:t>Denkanstoß</a:t>
             </a:r>
@@ -4008,11 +4056,11 @@
             <a:r>
               <a:rPr lang="en-US" sz="1500" dirty="0">
                 <a:solidFill>
-                  <a:srgbClr val="1F2A30"/>
-                </a:solidFill>
-                <a:latin typeface="Calibri" pitchFamily="34" charset="0"/>
-                <a:ea typeface="Calibri" pitchFamily="34" charset="-122"/>
-                <a:cs typeface="Calibri" pitchFamily="34" charset="-120"/>
+                  <a:srgbClr val="1D1D1B"/>
+                </a:solidFill>
+                <a:latin typeface="Lucida Sans" pitchFamily="34" charset="0"/>
+                <a:ea typeface="Lucida Sans" pitchFamily="34" charset="-122"/>
+                <a:cs typeface="Lucida Sans" pitchFamily="34" charset="-120"/>
               </a:rPr>
               <a:t>Eine Frage, die auf den entscheidenden Gedanken lenkt.</a:t>
             </a:r>
@@ -4037,11 +4085,11 @@
             </a:avLst>
           </a:prstGeom>
           <a:solidFill>
-            <a:srgbClr val="E6F2F1"/>
+            <a:srgbClr val="F2F2F2"/>
           </a:solidFill>
           <a:ln w="12700">
             <a:solidFill>
-              <a:srgbClr val="E6F2F1"/>
+              <a:srgbClr val="F2F2F2"/>
             </a:solidFill>
             <a:prstDash val="solid"/>
           </a:ln>
@@ -4062,11 +4110,11 @@
             <a:avLst/>
           </a:prstGeom>
           <a:solidFill>
-            <a:srgbClr val="0B6E69"/>
+            <a:srgbClr val="7A003F"/>
           </a:solidFill>
           <a:ln w="12700">
             <a:solidFill>
-              <a:srgbClr val="0B6E69"/>
+              <a:srgbClr val="7A003F"/>
             </a:solidFill>
             <a:prstDash val="solid"/>
           </a:ln>
@@ -4101,9 +4149,9 @@
                 <a:solidFill>
                   <a:srgbClr val="FFFFFF"/>
                 </a:solidFill>
-                <a:latin typeface="Calibri" pitchFamily="34" charset="0"/>
-                <a:ea typeface="Calibri" pitchFamily="34" charset="-122"/>
-                <a:cs typeface="Calibri" pitchFamily="34" charset="-120"/>
+                <a:latin typeface="Lucida Sans" pitchFamily="34" charset="0"/>
+                <a:ea typeface="Lucida Sans" pitchFamily="34" charset="-122"/>
+                <a:cs typeface="Lucida Sans" pitchFamily="34" charset="-120"/>
               </a:rPr>
               <a:t>H2</a:t>
             </a:r>
@@ -4138,11 +4186,11 @@
             <a:r>
               <a:rPr lang="en-US" sz="1800" b="1" dirty="0">
                 <a:solidFill>
-                  <a:srgbClr val="0B3C49"/>
-                </a:solidFill>
-                <a:latin typeface="Calibri" pitchFamily="34" charset="0"/>
-                <a:ea typeface="Calibri" pitchFamily="34" charset="-122"/>
-                <a:cs typeface="Calibri" pitchFamily="34" charset="-120"/>
+                  <a:srgbClr val="7A003F"/>
+                </a:solidFill>
+                <a:latin typeface="Lucida Sans" pitchFamily="34" charset="0"/>
+                <a:ea typeface="Lucida Sans" pitchFamily="34" charset="-122"/>
+                <a:cs typeface="Lucida Sans" pitchFamily="34" charset="-120"/>
               </a:rPr>
               <a:t>Werkzeug</a:t>
             </a:r>
@@ -4177,11 +4225,11 @@
             <a:r>
               <a:rPr lang="en-US" sz="1500" dirty="0">
                 <a:solidFill>
-                  <a:srgbClr val="1F2A30"/>
-                </a:solidFill>
-                <a:latin typeface="Calibri" pitchFamily="34" charset="0"/>
-                <a:ea typeface="Calibri" pitchFamily="34" charset="-122"/>
-                <a:cs typeface="Calibri" pitchFamily="34" charset="-120"/>
+                  <a:srgbClr val="1D1D1B"/>
+                </a:solidFill>
+                <a:latin typeface="Lucida Sans" pitchFamily="34" charset="0"/>
+                <a:ea typeface="Lucida Sans" pitchFamily="34" charset="-122"/>
+                <a:cs typeface="Lucida Sans" pitchFamily="34" charset="-120"/>
               </a:rPr>
               <a:t>Die benötigten Blöcke mit ihrer Kategorie.</a:t>
             </a:r>
@@ -4206,11 +4254,11 @@
             </a:avLst>
           </a:prstGeom>
           <a:solidFill>
-            <a:srgbClr val="E6F2F1"/>
+            <a:srgbClr val="F2F2F2"/>
           </a:solidFill>
           <a:ln w="12700">
             <a:solidFill>
-              <a:srgbClr val="E6F2F1"/>
+              <a:srgbClr val="F2F2F2"/>
             </a:solidFill>
             <a:prstDash val="solid"/>
           </a:ln>
@@ -4231,11 +4279,11 @@
             <a:avLst/>
           </a:prstGeom>
           <a:solidFill>
-            <a:srgbClr val="0B6E69"/>
+            <a:srgbClr val="7A003F"/>
           </a:solidFill>
           <a:ln w="12700">
             <a:solidFill>
-              <a:srgbClr val="0B6E69"/>
+              <a:srgbClr val="7A003F"/>
             </a:solidFill>
             <a:prstDash val="solid"/>
           </a:ln>
@@ -4270,9 +4318,9 @@
                 <a:solidFill>
                   <a:srgbClr val="FFFFFF"/>
                 </a:solidFill>
-                <a:latin typeface="Calibri" pitchFamily="34" charset="0"/>
-                <a:ea typeface="Calibri" pitchFamily="34" charset="-122"/>
-                <a:cs typeface="Calibri" pitchFamily="34" charset="-120"/>
+                <a:latin typeface="Lucida Sans" pitchFamily="34" charset="0"/>
+                <a:ea typeface="Lucida Sans" pitchFamily="34" charset="-122"/>
+                <a:cs typeface="Lucida Sans" pitchFamily="34" charset="-120"/>
               </a:rPr>
               <a:t>H3</a:t>
             </a:r>
@@ -4307,11 +4355,11 @@
             <a:r>
               <a:rPr lang="en-US" sz="1800" b="1" dirty="0">
                 <a:solidFill>
-                  <a:srgbClr val="0B3C49"/>
-                </a:solidFill>
-                <a:latin typeface="Calibri" pitchFamily="34" charset="0"/>
-                <a:ea typeface="Calibri" pitchFamily="34" charset="-122"/>
-                <a:cs typeface="Calibri" pitchFamily="34" charset="-120"/>
+                  <a:srgbClr val="7A003F"/>
+                </a:solidFill>
+                <a:latin typeface="Lucida Sans" pitchFamily="34" charset="0"/>
+                <a:ea typeface="Lucida Sans" pitchFamily="34" charset="-122"/>
+                <a:cs typeface="Lucida Sans" pitchFamily="34" charset="-120"/>
               </a:rPr>
               <a:t>Teillösung</a:t>
             </a:r>
@@ -4346,11 +4394,11 @@
             <a:r>
               <a:rPr lang="en-US" sz="1500" dirty="0">
                 <a:solidFill>
-                  <a:srgbClr val="1F2A30"/>
-                </a:solidFill>
-                <a:latin typeface="Calibri" pitchFamily="34" charset="0"/>
-                <a:ea typeface="Calibri" pitchFamily="34" charset="-122"/>
-                <a:cs typeface="Calibri" pitchFamily="34" charset="-120"/>
+                  <a:srgbClr val="1D1D1B"/>
+                </a:solidFill>
+                <a:latin typeface="Lucida Sans" pitchFamily="34" charset="0"/>
+                <a:ea typeface="Lucida Sans" pitchFamily="34" charset="-122"/>
+                <a:cs typeface="Lucida Sans" pitchFamily="34" charset="-120"/>
               </a:rPr>
               <a:t>Ein Programmgerüst mit Lücken.</a:t>
             </a:r>
@@ -4375,11 +4423,11 @@
             </a:avLst>
           </a:prstGeom>
           <a:solidFill>
-            <a:srgbClr val="FCEBDD"/>
+            <a:srgbClr val="FDF0E3"/>
           </a:solidFill>
           <a:ln w="12700">
             <a:solidFill>
-              <a:srgbClr val="FCEBDD"/>
+              <a:srgbClr val="FDF0E3"/>
             </a:solidFill>
             <a:prstDash val="solid"/>
           </a:ln>
@@ -4400,11 +4448,11 @@
             <a:avLst/>
           </a:prstGeom>
           <a:solidFill>
-            <a:srgbClr val="E8772E"/>
+            <a:srgbClr val="EF7D00"/>
           </a:solidFill>
           <a:ln w="12700">
             <a:solidFill>
-              <a:srgbClr val="E8772E"/>
+              <a:srgbClr val="EF7D00"/>
             </a:solidFill>
             <a:prstDash val="solid"/>
           </a:ln>
@@ -4437,11 +4485,11 @@
             <a:r>
               <a:rPr lang="en-US" sz="2000" b="1" dirty="0">
                 <a:solidFill>
-                  <a:srgbClr val="FFFFFF"/>
-                </a:solidFill>
-                <a:latin typeface="Calibri" pitchFamily="34" charset="0"/>
-                <a:ea typeface="Calibri" pitchFamily="34" charset="-122"/>
-                <a:cs typeface="Calibri" pitchFamily="34" charset="-120"/>
+                  <a:srgbClr val="1D1D1B"/>
+                </a:solidFill>
+                <a:latin typeface="Lucida Sans" pitchFamily="34" charset="0"/>
+                <a:ea typeface="Lucida Sans" pitchFamily="34" charset="-122"/>
+                <a:cs typeface="Lucida Sans" pitchFamily="34" charset="-120"/>
               </a:rPr>
               <a:t>!</a:t>
             </a:r>
@@ -4476,11 +4524,11 @@
             <a:r>
               <a:rPr lang="en-US" sz="1500" dirty="0">
                 <a:solidFill>
-                  <a:srgbClr val="0B3C49"/>
-                </a:solidFill>
-                <a:latin typeface="Calibri" pitchFamily="34" charset="0"/>
-                <a:ea typeface="Calibri" pitchFamily="34" charset="-122"/>
-                <a:cs typeface="Calibri" pitchFamily="34" charset="-120"/>
+                  <a:srgbClr val="7A003F"/>
+                </a:solidFill>
+                <a:latin typeface="Lucida Sans" pitchFamily="34" charset="0"/>
+                <a:ea typeface="Lucida Sans" pitchFamily="34" charset="-122"/>
+                <a:cs typeface="Lucida Sans" pitchFamily="34" charset="-120"/>
               </a:rPr>
               <a:t>Debugging-Regel: eine Änderung → testen → notieren. Wer drei Dinge gleichzeitig ändert, weiß nicht, was gewirkt hat.</a:t>
             </a:r>
@@ -4518,11 +4566,11 @@
             <a:lvl1pPr>
               <a:defRPr sz="1000">
                 <a:solidFill>
-                  <a:srgbClr val="5B6B73"/>
-                </a:solidFill>
-                <a:latin typeface="Calibri"/>
-                <a:ea typeface="Calibri"/>
-                <a:cs typeface="Calibri"/>
+                  <a:srgbClr val="706F6F"/>
+                </a:solidFill>
+                <a:latin typeface="Lucida Sans"/>
+                <a:ea typeface="Lucida Sans"/>
+                <a:cs typeface="Lucida Sans"/>
               </a:defRPr>
             </a:lvl1pPr>
           </a:lstStyle>
@@ -4566,13 +4614,13 @@
           <p:cNvPr id="2" name="Text 1"/>
           <p:cNvSpPr/>
           <p:nvPr>
-            <p:ph idx="101" type="title" hasCustomPrompt="1"/>
+            <p:ph idx="102" type="title" hasCustomPrompt="1"/>
           </p:nvPr>
         </p:nvSpPr>
         <p:spPr>
           <a:xfrm>
-            <a:off x="548640" y="320040"/>
-            <a:ext cx="11094415" cy="777240"/>
+            <a:off x="548640" y="274320"/>
+            <a:ext cx="8351215" cy="896112"/>
           </a:xfrm>
           <a:prstGeom prst="rect">
             <a:avLst/>
@@ -4584,21 +4632,21 @@
           <a:bodyPr wrap="square" lIns="0" tIns="0" rIns="0" bIns="0" rtlCol="0" anchor="ctr"/>
           <a:lstStyle/>
           <a:p>
-            <a:pPr indent="0" marL="0">
-              <a:buNone/>
-            </a:pPr>
-            <a:r>
-              <a:rPr lang="en-US" sz="3200" b="1" dirty="0">
-                <a:solidFill>
-                  <a:srgbClr val="0B3C49"/>
-                </a:solidFill>
-                <a:latin typeface="Cambria" pitchFamily="34" charset="0"/>
-                <a:ea typeface="Cambria" pitchFamily="34" charset="-122"/>
-                <a:cs typeface="Cambria" pitchFamily="34" charset="-120"/>
+            <a:pPr algn="l" indent="0" marL="0">
+              <a:buNone/>
+            </a:pPr>
+            <a:r>
+              <a:rPr lang="en-US" sz="2600" b="1" dirty="0">
+                <a:solidFill>
+                  <a:srgbClr val="7A003F"/>
+                </a:solidFill>
+                <a:latin typeface="Lucida Sans" pitchFamily="34" charset="0"/>
+                <a:ea typeface="Lucida Sans" pitchFamily="34" charset="-122"/>
+                <a:cs typeface="Lucida Sans" pitchFamily="34" charset="-120"/>
               </a:rPr>
               <a:t>Mini-Teach: Leitkarte für Erklärende (max. 4 Min.)</a:t>
             </a:r>
-            <a:endParaRPr lang="en-US" sz="3200" dirty="0"/>
+            <a:endParaRPr lang="en-US" sz="2600" dirty="0"/>
           </a:p>
         </p:txBody>
       </p:sp>
@@ -4619,11 +4667,11 @@
             </a:avLst>
           </a:prstGeom>
           <a:solidFill>
-            <a:srgbClr val="E6F2F1"/>
+            <a:srgbClr val="F2F2F2"/>
           </a:solidFill>
           <a:ln w="12700">
             <a:solidFill>
-              <a:srgbClr val="E6F2F1"/>
+              <a:srgbClr val="F2F2F2"/>
             </a:solidFill>
             <a:prstDash val="solid"/>
           </a:ln>
@@ -4644,11 +4692,11 @@
             <a:avLst/>
           </a:prstGeom>
           <a:solidFill>
-            <a:srgbClr val="0B6E69"/>
+            <a:srgbClr val="7A003F"/>
           </a:solidFill>
           <a:ln w="12700">
             <a:solidFill>
-              <a:srgbClr val="0B6E69"/>
+              <a:srgbClr val="7A003F"/>
             </a:solidFill>
             <a:prstDash val="solid"/>
           </a:ln>
@@ -4683,9 +4731,9 @@
                 <a:solidFill>
                   <a:srgbClr val="FFFFFF"/>
                 </a:solidFill>
-                <a:latin typeface="Calibri" pitchFamily="34" charset="0"/>
-                <a:ea typeface="Calibri" pitchFamily="34" charset="-122"/>
-                <a:cs typeface="Calibri" pitchFamily="34" charset="-120"/>
+                <a:latin typeface="Lucida Sans" pitchFamily="34" charset="0"/>
+                <a:ea typeface="Lucida Sans" pitchFamily="34" charset="-122"/>
+                <a:cs typeface="Lucida Sans" pitchFamily="34" charset="-120"/>
               </a:rPr>
               <a:t>1</a:t>
             </a:r>
@@ -4720,11 +4768,11 @@
             <a:r>
               <a:rPr lang="en-US" sz="1800" b="1" dirty="0">
                 <a:solidFill>
-                  <a:srgbClr val="0B3C49"/>
-                </a:solidFill>
-                <a:latin typeface="Calibri" pitchFamily="34" charset="0"/>
-                <a:ea typeface="Calibri" pitchFamily="34" charset="-122"/>
-                <a:cs typeface="Calibri" pitchFamily="34" charset="-120"/>
+                  <a:srgbClr val="7A003F"/>
+                </a:solidFill>
+                <a:latin typeface="Lucida Sans" pitchFamily="34" charset="0"/>
+                <a:ea typeface="Lucida Sans" pitchFamily="34" charset="-122"/>
+                <a:cs typeface="Lucida Sans" pitchFamily="34" charset="-120"/>
               </a:rPr>
               <a:t>Ziel</a:t>
             </a:r>
@@ -4759,11 +4807,11 @@
             <a:r>
               <a:rPr lang="en-US" sz="1700" dirty="0">
                 <a:solidFill>
-                  <a:srgbClr val="1F2A30"/>
-                </a:solidFill>
-                <a:latin typeface="Calibri" pitchFamily="34" charset="0"/>
-                <a:ea typeface="Calibri" pitchFamily="34" charset="-122"/>
-                <a:cs typeface="Calibri" pitchFamily="34" charset="-120"/>
+                  <a:srgbClr val="1D1D1B"/>
+                </a:solidFill>
+                <a:latin typeface="Lucida Sans" pitchFamily="34" charset="0"/>
+                <a:ea typeface="Lucida Sans" pitchFamily="34" charset="-122"/>
+                <a:cs typeface="Lucida Sans" pitchFamily="34" charset="-120"/>
               </a:rPr>
               <a:t>Was soll der Roboter tun? Ein Satz – und der Roboter zeigt es.</a:t>
             </a:r>
@@ -4788,11 +4836,11 @@
             </a:avLst>
           </a:prstGeom>
           <a:solidFill>
-            <a:srgbClr val="E6F2F1"/>
+            <a:srgbClr val="F2F2F2"/>
           </a:solidFill>
           <a:ln w="12700">
             <a:solidFill>
-              <a:srgbClr val="E6F2F1"/>
+              <a:srgbClr val="F2F2F2"/>
             </a:solidFill>
             <a:prstDash val="solid"/>
           </a:ln>
@@ -4813,11 +4861,11 @@
             <a:avLst/>
           </a:prstGeom>
           <a:solidFill>
-            <a:srgbClr val="0B6E69"/>
+            <a:srgbClr val="7A003F"/>
           </a:solidFill>
           <a:ln w="12700">
             <a:solidFill>
-              <a:srgbClr val="0B6E69"/>
+              <a:srgbClr val="7A003F"/>
             </a:solidFill>
             <a:prstDash val="solid"/>
           </a:ln>
@@ -4852,9 +4900,9 @@
                 <a:solidFill>
                   <a:srgbClr val="FFFFFF"/>
                 </a:solidFill>
-                <a:latin typeface="Calibri" pitchFamily="34" charset="0"/>
-                <a:ea typeface="Calibri" pitchFamily="34" charset="-122"/>
-                <a:cs typeface="Calibri" pitchFamily="34" charset="-120"/>
+                <a:latin typeface="Lucida Sans" pitchFamily="34" charset="0"/>
+                <a:ea typeface="Lucida Sans" pitchFamily="34" charset="-122"/>
+                <a:cs typeface="Lucida Sans" pitchFamily="34" charset="-120"/>
               </a:rPr>
               <a:t>2</a:t>
             </a:r>
@@ -4889,11 +4937,11 @@
             <a:r>
               <a:rPr lang="en-US" sz="1800" b="1" dirty="0">
                 <a:solidFill>
-                  <a:srgbClr val="0B3C49"/>
-                </a:solidFill>
-                <a:latin typeface="Calibri" pitchFamily="34" charset="0"/>
-                <a:ea typeface="Calibri" pitchFamily="34" charset="-122"/>
-                <a:cs typeface="Calibri" pitchFamily="34" charset="-120"/>
+                  <a:srgbClr val="7A003F"/>
+                </a:solidFill>
+                <a:latin typeface="Lucida Sans" pitchFamily="34" charset="0"/>
+                <a:ea typeface="Lucida Sans" pitchFamily="34" charset="-122"/>
+                <a:cs typeface="Lucida Sans" pitchFamily="34" charset="-120"/>
               </a:rPr>
               <a:t>Code</a:t>
             </a:r>
@@ -4928,11 +4976,11 @@
             <a:r>
               <a:rPr lang="en-US" sz="1700" dirty="0">
                 <a:solidFill>
-                  <a:srgbClr val="1F2A30"/>
-                </a:solidFill>
-                <a:latin typeface="Calibri" pitchFamily="34" charset="0"/>
-                <a:ea typeface="Calibri" pitchFamily="34" charset="-122"/>
-                <a:cs typeface="Calibri" pitchFamily="34" charset="-120"/>
+                  <a:srgbClr val="1D1D1B"/>
+                </a:solidFill>
+                <a:latin typeface="Lucida Sans" pitchFamily="34" charset="0"/>
+                <a:ea typeface="Lucida Sans" pitchFamily="34" charset="-122"/>
+                <a:cs typeface="Lucida Sans" pitchFamily="34" charset="-120"/>
               </a:rPr>
               <a:t>Wo ist die Schleife? Wo die Bedingung? Welcher Schwellenwert – und woher stammt er?</a:t>
             </a:r>
@@ -4957,11 +5005,11 @@
             </a:avLst>
           </a:prstGeom>
           <a:solidFill>
-            <a:srgbClr val="E6F2F1"/>
+            <a:srgbClr val="F2F2F2"/>
           </a:solidFill>
           <a:ln w="12700">
             <a:solidFill>
-              <a:srgbClr val="E6F2F1"/>
+              <a:srgbClr val="F2F2F2"/>
             </a:solidFill>
             <a:prstDash val="solid"/>
           </a:ln>
@@ -4982,11 +5030,11 @@
             <a:avLst/>
           </a:prstGeom>
           <a:solidFill>
-            <a:srgbClr val="E8772E"/>
+            <a:srgbClr val="EF7D00"/>
           </a:solidFill>
           <a:ln w="12700">
             <a:solidFill>
-              <a:srgbClr val="E8772E"/>
+              <a:srgbClr val="EF7D00"/>
             </a:solidFill>
             <a:prstDash val="solid"/>
           </a:ln>
@@ -5019,11 +5067,11 @@
             <a:r>
               <a:rPr lang="en-US" sz="1600" b="1" dirty="0">
                 <a:solidFill>
-                  <a:srgbClr val="FFFFFF"/>
-                </a:solidFill>
-                <a:latin typeface="Calibri" pitchFamily="34" charset="0"/>
-                <a:ea typeface="Calibri" pitchFamily="34" charset="-122"/>
-                <a:cs typeface="Calibri" pitchFamily="34" charset="-120"/>
+                  <a:srgbClr val="1D1D1B"/>
+                </a:solidFill>
+                <a:latin typeface="Lucida Sans" pitchFamily="34" charset="0"/>
+                <a:ea typeface="Lucida Sans" pitchFamily="34" charset="-122"/>
+                <a:cs typeface="Lucida Sans" pitchFamily="34" charset="-120"/>
               </a:rPr>
               <a:t>3</a:t>
             </a:r>
@@ -5058,11 +5106,11 @@
             <a:r>
               <a:rPr lang="en-US" sz="1800" b="1" dirty="0">
                 <a:solidFill>
-                  <a:srgbClr val="0B3C49"/>
-                </a:solidFill>
-                <a:latin typeface="Calibri" pitchFamily="34" charset="0"/>
-                <a:ea typeface="Calibri" pitchFamily="34" charset="-122"/>
-                <a:cs typeface="Calibri" pitchFamily="34" charset="-120"/>
+                  <a:srgbClr val="7A003F"/>
+                </a:solidFill>
+                <a:latin typeface="Lucida Sans" pitchFamily="34" charset="0"/>
+                <a:ea typeface="Lucida Sans" pitchFamily="34" charset="-122"/>
+                <a:cs typeface="Lucida Sans" pitchFamily="34" charset="-120"/>
               </a:rPr>
               <a:t>Mitmachen</a:t>
             </a:r>
@@ -5097,11 +5145,11 @@
             <a:r>
               <a:rPr lang="en-US" sz="1700" dirty="0">
                 <a:solidFill>
-                  <a:srgbClr val="1F2A30"/>
-                </a:solidFill>
-                <a:latin typeface="Calibri" pitchFamily="34" charset="0"/>
-                <a:ea typeface="Calibri" pitchFamily="34" charset="-122"/>
-                <a:cs typeface="Calibri" pitchFamily="34" charset="-120"/>
+                  <a:srgbClr val="1D1D1B"/>
+                </a:solidFill>
+                <a:latin typeface="Lucida Sans" pitchFamily="34" charset="0"/>
+                <a:ea typeface="Lucida Sans" pitchFamily="34" charset="-122"/>
+                <a:cs typeface="Lucida Sans" pitchFamily="34" charset="-120"/>
               </a:rPr>
               <a:t>Das Gegenüber ändert eine Zahl, sagt voraus, was passiert – dann testen.</a:t>
             </a:r>
@@ -5126,11 +5174,11 @@
             </a:avLst>
           </a:prstGeom>
           <a:solidFill>
-            <a:srgbClr val="FCEBDD"/>
+            <a:srgbClr val="FDF0E3"/>
           </a:solidFill>
           <a:ln w="12700">
             <a:solidFill>
-              <a:srgbClr val="FCEBDD"/>
+              <a:srgbClr val="FDF0E3"/>
             </a:solidFill>
             <a:prstDash val="solid"/>
           </a:ln>
@@ -5151,11 +5199,11 @@
             <a:avLst/>
           </a:prstGeom>
           <a:solidFill>
-            <a:srgbClr val="E8772E"/>
+            <a:srgbClr val="EF7D00"/>
           </a:solidFill>
           <a:ln w="12700">
             <a:solidFill>
-              <a:srgbClr val="E8772E"/>
+              <a:srgbClr val="EF7D00"/>
             </a:solidFill>
             <a:prstDash val="solid"/>
           </a:ln>
@@ -5188,11 +5236,11 @@
             <a:r>
               <a:rPr lang="en-US" sz="2000" b="1" dirty="0">
                 <a:solidFill>
-                  <a:srgbClr val="FFFFFF"/>
-                </a:solidFill>
-                <a:latin typeface="Calibri" pitchFamily="34" charset="0"/>
-                <a:ea typeface="Calibri" pitchFamily="34" charset="-122"/>
-                <a:cs typeface="Calibri" pitchFamily="34" charset="-120"/>
+                  <a:srgbClr val="1D1D1B"/>
+                </a:solidFill>
+                <a:latin typeface="Lucida Sans" pitchFamily="34" charset="0"/>
+                <a:ea typeface="Lucida Sans" pitchFamily="34" charset="-122"/>
+                <a:cs typeface="Lucida Sans" pitchFamily="34" charset="-120"/>
               </a:rPr>
               <a:t>!</a:t>
             </a:r>
@@ -5227,11 +5275,11 @@
             <a:r>
               <a:rPr lang="en-US" sz="1500" dirty="0">
                 <a:solidFill>
-                  <a:srgbClr val="0B3C49"/>
-                </a:solidFill>
-                <a:latin typeface="Calibri" pitchFamily="34" charset="0"/>
-                <a:ea typeface="Calibri" pitchFamily="34" charset="-122"/>
-                <a:cs typeface="Calibri" pitchFamily="34" charset="-120"/>
+                  <a:srgbClr val="7A003F"/>
+                </a:solidFill>
+                <a:latin typeface="Lucida Sans" pitchFamily="34" charset="0"/>
+                <a:ea typeface="Lucida Sans" pitchFamily="34" charset="-122"/>
+                <a:cs typeface="Lucida Sans" pitchFamily="34" charset="-120"/>
               </a:rPr>
               <a:t>Feste Stationen, an denen die Erklärenden bleiben. Alle anderen rotieren zweimal (je 5 Min.) und notieren: eine Übernahme, eine Frage.</a:t>
             </a:r>
@@ -5269,11 +5317,11 @@
             <a:lvl1pPr>
               <a:defRPr sz="1000">
                 <a:solidFill>
-                  <a:srgbClr val="5B6B73"/>
-                </a:solidFill>
-                <a:latin typeface="Calibri"/>
-                <a:ea typeface="Calibri"/>
-                <a:cs typeface="Calibri"/>
+                  <a:srgbClr val="706F6F"/>
+                </a:solidFill>
+                <a:latin typeface="Lucida Sans"/>
+                <a:ea typeface="Lucida Sans"/>
+                <a:cs typeface="Lucida Sans"/>
               </a:defRPr>
             </a:lvl1pPr>
           </a:lstStyle>
@@ -5317,13 +5365,13 @@
           <p:cNvPr id="2" name="Text 1"/>
           <p:cNvSpPr/>
           <p:nvPr>
-            <p:ph idx="101" type="title" hasCustomPrompt="1"/>
+            <p:ph idx="102" type="title" hasCustomPrompt="1"/>
           </p:nvPr>
         </p:nvSpPr>
         <p:spPr>
           <a:xfrm>
-            <a:off x="548640" y="320040"/>
-            <a:ext cx="11094415" cy="777240"/>
+            <a:off x="548640" y="274320"/>
+            <a:ext cx="8351215" cy="896112"/>
           </a:xfrm>
           <a:prstGeom prst="rect">
             <a:avLst/>
@@ -5335,21 +5383,21 @@
           <a:bodyPr wrap="square" lIns="0" tIns="0" rIns="0" bIns="0" rtlCol="0" anchor="ctr"/>
           <a:lstStyle/>
           <a:p>
-            <a:pPr indent="0" marL="0">
-              <a:buNone/>
-            </a:pPr>
-            <a:r>
-              <a:rPr lang="en-US" sz="3200" b="1" dirty="0">
-                <a:solidFill>
-                  <a:srgbClr val="0B3C49"/>
-                </a:solidFill>
-                <a:latin typeface="Cambria" pitchFamily="34" charset="0"/>
-                <a:ea typeface="Cambria" pitchFamily="34" charset="-122"/>
-                <a:cs typeface="Cambria" pitchFamily="34" charset="-120"/>
+            <a:pPr algn="l" indent="0" marL="0">
+              <a:buNone/>
+            </a:pPr>
+            <a:r>
+              <a:rPr lang="en-US" sz="2600" b="1" dirty="0">
+                <a:solidFill>
+                  <a:srgbClr val="7A003F"/>
+                </a:solidFill>
+                <a:latin typeface="Lucida Sans" pitchFamily="34" charset="0"/>
+                <a:ea typeface="Lucida Sans" pitchFamily="34" charset="-122"/>
+                <a:cs typeface="Lucida Sans" pitchFamily="34" charset="-120"/>
               </a:rPr>
               <a:t>Modell und Wirklichkeit</a:t>
             </a:r>
-            <a:endParaRPr lang="en-US" sz="3200" dirty="0"/>
+            <a:endParaRPr lang="en-US" sz="2600" dirty="0"/>
           </a:p>
         </p:txBody>
       </p:sp>
@@ -5380,11 +5428,11 @@
             <a:r>
               <a:rPr lang="en-US" sz="1600" dirty="0">
                 <a:solidFill>
-                  <a:srgbClr val="5B6B73"/>
-                </a:solidFill>
-                <a:latin typeface="Calibri" pitchFamily="34" charset="0"/>
-                <a:ea typeface="Calibri" pitchFamily="34" charset="-122"/>
-                <a:cs typeface="Calibri" pitchFamily="34" charset="-120"/>
+                  <a:srgbClr val="706F6F"/>
+                </a:solidFill>
+                <a:latin typeface="Lucida Sans" pitchFamily="34" charset="0"/>
+                <a:ea typeface="Lucida Sans" pitchFamily="34" charset="-122"/>
+                <a:cs typeface="Lucida Sans" pitchFamily="34" charset="-120"/>
               </a:rPr>
               <a:t>Wo wich Ihre Vorhersage von der Fahrt ab – und warum?</a:t>
             </a:r>
@@ -5409,11 +5457,11 @@
             </a:avLst>
           </a:prstGeom>
           <a:solidFill>
-            <a:srgbClr val="EEF1F2"/>
+            <a:srgbClr val="F2F2F2"/>
           </a:solidFill>
           <a:ln w="12700">
             <a:solidFill>
-              <a:srgbClr val="EEF1F2"/>
+              <a:srgbClr val="F2F2F2"/>
             </a:solidFill>
             <a:prstDash val="solid"/>
           </a:ln>
@@ -5434,11 +5482,11 @@
             <a:avLst/>
           </a:prstGeom>
           <a:solidFill>
-            <a:srgbClr val="7A8B91"/>
+            <a:srgbClr val="9D9D9C"/>
           </a:solidFill>
           <a:ln w="12700">
             <a:solidFill>
-              <a:srgbClr val="7A8B91"/>
+              <a:srgbClr val="9D9D9C"/>
             </a:solidFill>
             <a:prstDash val="solid"/>
           </a:ln>
@@ -5473,9 +5521,9 @@
                 <a:solidFill>
                   <a:srgbClr val="FFFFFF"/>
                 </a:solidFill>
-                <a:latin typeface="Calibri" pitchFamily="34" charset="0"/>
-                <a:ea typeface="Calibri" pitchFamily="34" charset="-122"/>
-                <a:cs typeface="Calibri" pitchFamily="34" charset="-120"/>
+                <a:latin typeface="Lucida Sans" pitchFamily="34" charset="0"/>
+                <a:ea typeface="Lucida Sans" pitchFamily="34" charset="-122"/>
+                <a:cs typeface="Lucida Sans" pitchFamily="34" charset="-120"/>
               </a:rPr>
               <a:t>–</a:t>
             </a:r>
@@ -5510,11 +5558,11 @@
             <a:r>
               <a:rPr lang="en-US" sz="1800" b="1" dirty="0">
                 <a:solidFill>
-                  <a:srgbClr val="0B3C49"/>
-                </a:solidFill>
-                <a:latin typeface="Calibri" pitchFamily="34" charset="0"/>
-                <a:ea typeface="Calibri" pitchFamily="34" charset="-122"/>
-                <a:cs typeface="Calibri" pitchFamily="34" charset="-120"/>
+                  <a:srgbClr val="7A003F"/>
+                </a:solidFill>
+                <a:latin typeface="Lucida Sans" pitchFamily="34" charset="0"/>
+                <a:ea typeface="Lucida Sans" pitchFamily="34" charset="-122"/>
+                <a:cs typeface="Lucida Sans" pitchFamily="34" charset="-120"/>
               </a:rPr>
               <a:t>Das Modell sagt …</a:t>
             </a:r>
@@ -5553,11 +5601,11 @@
             <a:r>
               <a:rPr lang="en-US" sz="1600" dirty="0">
                 <a:solidFill>
-                  <a:srgbClr val="1F2A30"/>
-                </a:solidFill>
-                <a:latin typeface="Calibri" pitchFamily="34" charset="0"/>
-                <a:ea typeface="Calibri" pitchFamily="34" charset="-122"/>
-                <a:cs typeface="Calibri" pitchFamily="34" charset="-120"/>
+                  <a:srgbClr val="1D1D1B"/>
+                </a:solidFill>
+                <a:latin typeface="Lucida Sans" pitchFamily="34" charset="0"/>
+                <a:ea typeface="Lucida Sans" pitchFamily="34" charset="-122"/>
+                <a:cs typeface="Lucida Sans" pitchFamily="34" charset="-120"/>
               </a:rPr>
               <a:t>50 cm sind 2,45 Radumdrehungen</a:t>
             </a:r>
@@ -5574,11 +5622,11 @@
             <a:r>
               <a:rPr lang="en-US" sz="1600" dirty="0">
                 <a:solidFill>
-                  <a:srgbClr val="1F2A30"/>
-                </a:solidFill>
-                <a:latin typeface="Calibri" pitchFamily="34" charset="0"/>
-                <a:ea typeface="Calibri" pitchFamily="34" charset="-122"/>
-                <a:cs typeface="Calibri" pitchFamily="34" charset="-120"/>
+                  <a:srgbClr val="1D1D1B"/>
+                </a:solidFill>
+                <a:latin typeface="Lucida Sans" pitchFamily="34" charset="0"/>
+                <a:ea typeface="Lucida Sans" pitchFamily="34" charset="-122"/>
+                <a:cs typeface="Lucida Sans" pitchFamily="34" charset="-120"/>
               </a:rPr>
               <a:t>Stopp genau bei 15 cm Abstand</a:t>
             </a:r>
@@ -5595,11 +5643,11 @@
             <a:r>
               <a:rPr lang="en-US" sz="1600" dirty="0">
                 <a:solidFill>
-                  <a:srgbClr val="1F2A30"/>
-                </a:solidFill>
-                <a:latin typeface="Calibri" pitchFamily="34" charset="0"/>
-                <a:ea typeface="Calibri" pitchFamily="34" charset="-122"/>
-                <a:cs typeface="Calibri" pitchFamily="34" charset="-120"/>
+                  <a:srgbClr val="1D1D1B"/>
+                </a:solidFill>
+                <a:latin typeface="Lucida Sans" pitchFamily="34" charset="0"/>
+                <a:ea typeface="Lucida Sans" pitchFamily="34" charset="-122"/>
+                <a:cs typeface="Lucida Sans" pitchFamily="34" charset="-120"/>
               </a:rPr>
               <a:t>ein Dreieck schließt sich exakt</a:t>
             </a:r>
@@ -5624,11 +5672,11 @@
             </a:avLst>
           </a:prstGeom>
           <a:solidFill>
-            <a:srgbClr val="E6F2F1"/>
+            <a:srgbClr val="F2F2F2"/>
           </a:solidFill>
           <a:ln w="12700">
             <a:solidFill>
-              <a:srgbClr val="E6F2F1"/>
+              <a:srgbClr val="F2F2F2"/>
             </a:solidFill>
             <a:prstDash val="solid"/>
           </a:ln>
@@ -5649,11 +5697,11 @@
             <a:avLst/>
           </a:prstGeom>
           <a:solidFill>
-            <a:srgbClr val="0B6E69"/>
+            <a:srgbClr val="7A003F"/>
           </a:solidFill>
           <a:ln w="12700">
             <a:solidFill>
-              <a:srgbClr val="0B6E69"/>
+              <a:srgbClr val="7A003F"/>
             </a:solidFill>
             <a:prstDash val="solid"/>
           </a:ln>
@@ -5688,9 +5736,9 @@
                 <a:solidFill>
                   <a:srgbClr val="FFFFFF"/>
                 </a:solidFill>
-                <a:latin typeface="Calibri" pitchFamily="34" charset="0"/>
-                <a:ea typeface="Calibri" pitchFamily="34" charset="-122"/>
-                <a:cs typeface="Calibri" pitchFamily="34" charset="-120"/>
+                <a:latin typeface="Lucida Sans" pitchFamily="34" charset="0"/>
+                <a:ea typeface="Lucida Sans" pitchFamily="34" charset="-122"/>
+                <a:cs typeface="Lucida Sans" pitchFamily="34" charset="-120"/>
               </a:rPr>
               <a:t>+</a:t>
             </a:r>
@@ -5725,11 +5773,11 @@
             <a:r>
               <a:rPr lang="en-US" sz="1800" b="1" dirty="0">
                 <a:solidFill>
-                  <a:srgbClr val="0B3C49"/>
-                </a:solidFill>
-                <a:latin typeface="Calibri" pitchFamily="34" charset="0"/>
-                <a:ea typeface="Calibri" pitchFamily="34" charset="-122"/>
-                <a:cs typeface="Calibri" pitchFamily="34" charset="-120"/>
+                  <a:srgbClr val="7A003F"/>
+                </a:solidFill>
+                <a:latin typeface="Lucida Sans" pitchFamily="34" charset="0"/>
+                <a:ea typeface="Lucida Sans" pitchFamily="34" charset="-122"/>
+                <a:cs typeface="Lucida Sans" pitchFamily="34" charset="-120"/>
               </a:rPr>
               <a:t>Die Wirklichkeit zeigt …</a:t>
             </a:r>
@@ -5768,11 +5816,11 @@
             <a:r>
               <a:rPr lang="en-US" sz="1600" dirty="0">
                 <a:solidFill>
-                  <a:srgbClr val="1F2A30"/>
-                </a:solidFill>
-                <a:latin typeface="Calibri" pitchFamily="34" charset="0"/>
-                <a:ea typeface="Calibri" pitchFamily="34" charset="-122"/>
-                <a:cs typeface="Calibri" pitchFamily="34" charset="-120"/>
+                  <a:srgbClr val="1D1D1B"/>
+                </a:solidFill>
+                <a:latin typeface="Lucida Sans" pitchFamily="34" charset="0"/>
+                <a:ea typeface="Lucida Sans" pitchFamily="34" charset="-122"/>
+                <a:cs typeface="Lucida Sans" pitchFamily="34" charset="-120"/>
               </a:rPr>
               <a:t>Schlupf, Untergrund, Akkustand</a:t>
             </a:r>
@@ -5789,11 +5837,11 @@
             <a:r>
               <a:rPr lang="en-US" sz="1600" dirty="0">
                 <a:solidFill>
-                  <a:srgbClr val="1F2A30"/>
-                </a:solidFill>
-                <a:latin typeface="Calibri" pitchFamily="34" charset="0"/>
-                <a:ea typeface="Calibri" pitchFamily="34" charset="-122"/>
-                <a:cs typeface="Calibri" pitchFamily="34" charset="-120"/>
+                  <a:srgbClr val="1D1D1B"/>
+                </a:solidFill>
+                <a:latin typeface="Lucida Sans" pitchFamily="34" charset="0"/>
+                <a:ea typeface="Lucida Sans" pitchFamily="34" charset="-122"/>
+                <a:cs typeface="Lucida Sans" pitchFamily="34" charset="-120"/>
               </a:rPr>
               <a:t>Reaktions- und Bremsweg</a:t>
             </a:r>
@@ -5810,11 +5858,11 @@
             <a:r>
               <a:rPr lang="en-US" sz="1600" dirty="0">
                 <a:solidFill>
-                  <a:srgbClr val="1F2A30"/>
-                </a:solidFill>
-                <a:latin typeface="Calibri" pitchFamily="34" charset="0"/>
-                <a:ea typeface="Calibri" pitchFamily="34" charset="-122"/>
-                <a:cs typeface="Calibri" pitchFamily="34" charset="-120"/>
+                  <a:srgbClr val="1D1D1B"/>
+                </a:solidFill>
+                <a:latin typeface="Lucida Sans" pitchFamily="34" charset="0"/>
+                <a:ea typeface="Lucida Sans" pitchFamily="34" charset="-122"/>
+                <a:cs typeface="Lucida Sans" pitchFamily="34" charset="-120"/>
               </a:rPr>
               <a:t>Sensorrauschen und Licht im Raum</a:t>
             </a:r>
@@ -5839,11 +5887,11 @@
             </a:avLst>
           </a:prstGeom>
           <a:solidFill>
-            <a:srgbClr val="FCEBDD"/>
+            <a:srgbClr val="FDF0E3"/>
           </a:solidFill>
           <a:ln w="12700">
             <a:solidFill>
-              <a:srgbClr val="FCEBDD"/>
+              <a:srgbClr val="FDF0E3"/>
             </a:solidFill>
             <a:prstDash val="solid"/>
           </a:ln>
@@ -5864,11 +5912,11 @@
             <a:avLst/>
           </a:prstGeom>
           <a:solidFill>
-            <a:srgbClr val="E8772E"/>
+            <a:srgbClr val="EF7D00"/>
           </a:solidFill>
           <a:ln w="12700">
             <a:solidFill>
-              <a:srgbClr val="E8772E"/>
+              <a:srgbClr val="EF7D00"/>
             </a:solidFill>
             <a:prstDash val="solid"/>
           </a:ln>
@@ -5901,11 +5949,11 @@
             <a:r>
               <a:rPr lang="en-US" sz="2000" b="1" dirty="0">
                 <a:solidFill>
-                  <a:srgbClr val="FFFFFF"/>
-                </a:solidFill>
-                <a:latin typeface="Calibri" pitchFamily="34" charset="0"/>
-                <a:ea typeface="Calibri" pitchFamily="34" charset="-122"/>
-                <a:cs typeface="Calibri" pitchFamily="34" charset="-120"/>
+                  <a:srgbClr val="1D1D1B"/>
+                </a:solidFill>
+                <a:latin typeface="Lucida Sans" pitchFamily="34" charset="0"/>
+                <a:ea typeface="Lucida Sans" pitchFamily="34" charset="-122"/>
+                <a:cs typeface="Lucida Sans" pitchFamily="34" charset="-120"/>
               </a:rPr>
               <a:t>!</a:t>
             </a:r>
@@ -5940,11 +5988,11 @@
             <a:r>
               <a:rPr lang="en-US" sz="1500" dirty="0">
                 <a:solidFill>
-                  <a:srgbClr val="0B3C49"/>
-                </a:solidFill>
-                <a:latin typeface="Calibri" pitchFamily="34" charset="0"/>
-                <a:ea typeface="Calibri" pitchFamily="34" charset="-122"/>
-                <a:cs typeface="Calibri" pitchFamily="34" charset="-120"/>
+                  <a:srgbClr val="7A003F"/>
+                </a:solidFill>
+                <a:latin typeface="Lucida Sans" pitchFamily="34" charset="0"/>
+                <a:ea typeface="Lucida Sans" pitchFamily="34" charset="-122"/>
+                <a:cs typeface="Lucida Sans" pitchFamily="34" charset="-120"/>
               </a:rPr>
               <a:t>Auf Karten: „Sequenz, Schleife oder Bedingung stecken in meinem Fach in …“ → an die Pinnwand nach Fächern.</a:t>
             </a:r>
@@ -5982,11 +6030,11 @@
             <a:lvl1pPr>
               <a:defRPr sz="1000">
                 <a:solidFill>
-                  <a:srgbClr val="5B6B73"/>
-                </a:solidFill>
-                <a:latin typeface="Calibri"/>
-                <a:ea typeface="Calibri"/>
-                <a:cs typeface="Calibri"/>
+                  <a:srgbClr val="706F6F"/>
+                </a:solidFill>
+                <a:latin typeface="Lucida Sans"/>
+                <a:ea typeface="Lucida Sans"/>
+                <a:cs typeface="Lucida Sans"/>
               </a:defRPr>
             </a:lvl1pPr>
           </a:lstStyle>
@@ -6027,14 +6075,16 @@
       </p:grpSpPr>
       <p:sp>
         <p:nvSpPr>
-          <p:cNvPr id="2" name="Text 0"/>
-          <p:cNvSpPr txBox="1"/>
-          <p:nvPr/>
-        </p:nvSpPr>
-        <p:spPr>
-          <a:xfrm>
-            <a:off x="548640" y="548640"/>
-            <a:ext cx="11094415" cy="822960"/>
+          <p:cNvPr id="2" name="Text 1"/>
+          <p:cNvSpPr/>
+          <p:nvPr>
+            <p:ph idx="102" type="title" hasCustomPrompt="1"/>
+          </p:nvPr>
+        </p:nvSpPr>
+        <p:spPr>
+          <a:xfrm>
+            <a:off x="548640" y="274320"/>
+            <a:ext cx="8351215" cy="896112"/>
           </a:xfrm>
           <a:prstGeom prst="rect">
             <a:avLst/>
@@ -6046,21 +6096,21 @@
           <a:bodyPr wrap="square" lIns="0" tIns="0" rIns="0" bIns="0" rtlCol="0" anchor="ctr"/>
           <a:lstStyle/>
           <a:p>
-            <a:pPr indent="0" marL="0">
-              <a:buNone/>
-            </a:pPr>
-            <a:r>
-              <a:rPr lang="en-US" sz="3600" b="1" dirty="0">
-                <a:solidFill>
-                  <a:srgbClr val="FFFFFF"/>
-                </a:solidFill>
-                <a:latin typeface="Cambria" pitchFamily="34" charset="0"/>
-                <a:ea typeface="Cambria" pitchFamily="34" charset="-122"/>
-                <a:cs typeface="Cambria" pitchFamily="34" charset="-120"/>
+            <a:pPr algn="l" indent="0" marL="0">
+              <a:buNone/>
+            </a:pPr>
+            <a:r>
+              <a:rPr lang="en-US" sz="2600" b="1" dirty="0">
+                <a:solidFill>
+                  <a:srgbClr val="7A003F"/>
+                </a:solidFill>
+                <a:latin typeface="Lucida Sans" pitchFamily="34" charset="0"/>
+                <a:ea typeface="Lucida Sans" pitchFamily="34" charset="-122"/>
+                <a:cs typeface="Lucida Sans" pitchFamily="34" charset="-120"/>
               </a:rPr>
               <a:t>Bis zur nächsten Sitzung</a:t>
             </a:r>
-            <a:endParaRPr lang="en-US" sz="3600" dirty="0"/>
+            <a:endParaRPr lang="en-US" sz="2600" dirty="0"/>
           </a:p>
         </p:txBody>
       </p:sp>
@@ -6072,20 +6122,20 @@
         </p:nvSpPr>
         <p:spPr>
           <a:xfrm>
-            <a:off x="548640" y="1737360"/>
-            <a:ext cx="3454298" cy="3291840"/>
+            <a:off x="548640" y="1463040"/>
+            <a:ext cx="3454298" cy="3566160"/>
           </a:xfrm>
           <a:prstGeom prst="roundRect">
             <a:avLst>
-              <a:gd name="adj" fmla="val 3333"/>
+              <a:gd name="adj" fmla="val 3177"/>
             </a:avLst>
           </a:prstGeom>
           <a:solidFill>
-            <a:srgbClr val="174F5E"/>
+            <a:srgbClr val="FDF0E3"/>
           </a:solidFill>
           <a:ln w="12700">
             <a:solidFill>
-              <a:srgbClr val="2C6E7C"/>
+              <a:srgbClr val="FDF0E3"/>
             </a:solidFill>
             <a:prstDash val="solid"/>
           </a:ln>
@@ -6099,18 +6149,18 @@
         </p:nvSpPr>
         <p:spPr>
           <a:xfrm>
-            <a:off x="822960" y="1965960"/>
+            <a:off x="822960" y="1691640"/>
             <a:ext cx="548640" cy="548640"/>
           </a:xfrm>
           <a:prstGeom prst="ellipse">
             <a:avLst/>
           </a:prstGeom>
           <a:solidFill>
-            <a:srgbClr val="E8772E"/>
+            <a:srgbClr val="EF7D00"/>
           </a:solidFill>
           <a:ln w="12700">
             <a:solidFill>
-              <a:srgbClr val="E8772E"/>
+              <a:srgbClr val="EF7D00"/>
             </a:solidFill>
             <a:prstDash val="solid"/>
           </a:ln>
@@ -6124,7 +6174,7 @@
         </p:nvSpPr>
         <p:spPr>
           <a:xfrm>
-            <a:off x="822960" y="1965960"/>
+            <a:off x="822960" y="1691640"/>
             <a:ext cx="548640" cy="548640"/>
           </a:xfrm>
           <a:prstGeom prst="rect">
@@ -6143,11 +6193,11 @@
             <a:r>
               <a:rPr lang="en-US" sz="1600" b="1" dirty="0">
                 <a:solidFill>
-                  <a:srgbClr val="FFFFFF"/>
-                </a:solidFill>
-                <a:latin typeface="Calibri" pitchFamily="34" charset="0"/>
-                <a:ea typeface="Calibri" pitchFamily="34" charset="-122"/>
-                <a:cs typeface="Calibri" pitchFamily="34" charset="-120"/>
+                  <a:srgbClr val="1D1D1B"/>
+                </a:solidFill>
+                <a:latin typeface="Lucida Sans" pitchFamily="34" charset="0"/>
+                <a:ea typeface="Lucida Sans" pitchFamily="34" charset="-122"/>
+                <a:cs typeface="Lucida Sans" pitchFamily="34" charset="-120"/>
               </a:rPr>
               <a:t>1</a:t>
             </a:r>
@@ -6163,7 +6213,7 @@
         </p:nvSpPr>
         <p:spPr>
           <a:xfrm>
-            <a:off x="1508760" y="1965960"/>
+            <a:off x="1508760" y="1691640"/>
             <a:ext cx="2265578" cy="548640"/>
           </a:xfrm>
           <a:prstGeom prst="rect">
@@ -6180,17 +6230,17 @@
               <a:buNone/>
             </a:pPr>
             <a:r>
-              <a:rPr lang="en-US" sz="1900" b="1" dirty="0">
-                <a:solidFill>
-                  <a:srgbClr val="FFFFFF"/>
-                </a:solidFill>
-                <a:latin typeface="Calibri" pitchFamily="34" charset="0"/>
-                <a:ea typeface="Calibri" pitchFamily="34" charset="-122"/>
-                <a:cs typeface="Calibri" pitchFamily="34" charset="-120"/>
+              <a:rPr lang="en-US" sz="1800" b="1" dirty="0">
+                <a:solidFill>
+                  <a:srgbClr val="7A003F"/>
+                </a:solidFill>
+                <a:latin typeface="Lucida Sans" pitchFamily="34" charset="0"/>
+                <a:ea typeface="Lucida Sans" pitchFamily="34" charset="-122"/>
+                <a:cs typeface="Lucida Sans" pitchFamily="34" charset="-120"/>
               </a:rPr>
               <a:t>Selbstlernmodul 2</a:t>
             </a:r>
-            <a:endParaRPr lang="en-US" sz="1900" dirty="0"/>
+            <a:endParaRPr lang="en-US" sz="1800" dirty="0"/>
           </a:p>
         </p:txBody>
       </p:sp>
@@ -6202,8 +6252,8 @@
         </p:nvSpPr>
         <p:spPr>
           <a:xfrm>
-            <a:off x="822960" y="2743200"/>
-            <a:ext cx="2905658" cy="2148840"/>
+            <a:off x="822960" y="2468880"/>
+            <a:ext cx="2905658" cy="2377440"/>
           </a:xfrm>
           <a:prstGeom prst="rect">
             <a:avLst/>
@@ -6223,17 +6273,17 @@
               <a:buChar char="•"/>
             </a:pPr>
             <a:r>
-              <a:rPr lang="en-US" sz="1700" dirty="0">
-                <a:solidFill>
-                  <a:srgbClr val="E6F2F1"/>
-                </a:solidFill>
-                <a:latin typeface="Calibri" pitchFamily="34" charset="0"/>
-                <a:ea typeface="Calibri" pitchFamily="34" charset="-122"/>
-                <a:cs typeface="Calibri" pitchFamily="34" charset="-120"/>
+              <a:rPr lang="en-US" sz="1600" dirty="0">
+                <a:solidFill>
+                  <a:srgbClr val="1D1D1B"/>
+                </a:solidFill>
+                <a:latin typeface="Lucida Sans" pitchFamily="34" charset="0"/>
+                <a:ea typeface="Lucida Sans" pitchFamily="34" charset="-122"/>
+                <a:cs typeface="Lucida Sans" pitchFamily="34" charset="-120"/>
               </a:rPr>
               <a:t>Wissenscheck (11 Fragen)</a:t>
             </a:r>
-            <a:endParaRPr lang="en-US" sz="1700" dirty="0"/>
+            <a:endParaRPr lang="en-US" sz="1600" dirty="0"/>
           </a:p>
           <a:p>
             <a:pPr marL="177800" indent="-177800">
@@ -6244,17 +6294,17 @@
               <a:buChar char="•"/>
             </a:pPr>
             <a:r>
-              <a:rPr lang="en-US" sz="1700" dirty="0">
-                <a:solidFill>
-                  <a:srgbClr val="E6F2F1"/>
-                </a:solidFill>
-                <a:latin typeface="Calibri" pitchFamily="34" charset="0"/>
-                <a:ea typeface="Calibri" pitchFamily="34" charset="-122"/>
-                <a:cs typeface="Calibri" pitchFamily="34" charset="-120"/>
+              <a:rPr lang="en-US" sz="1600" dirty="0">
+                <a:solidFill>
+                  <a:srgbClr val="1D1D1B"/>
+                </a:solidFill>
+                <a:latin typeface="Lucida Sans" pitchFamily="34" charset="0"/>
+                <a:ea typeface="Lucida Sans" pitchFamily="34" charset="-122"/>
+                <a:cs typeface="Lucida Sans" pitchFamily="34" charset="-120"/>
               </a:rPr>
               <a:t>ca. 15 Minuten</a:t>
             </a:r>
-            <a:endParaRPr lang="en-US" sz="1700" dirty="0"/>
+            <a:endParaRPr lang="en-US" sz="1600" dirty="0"/>
           </a:p>
           <a:p>
             <a:pPr marL="177800" indent="-177800">
@@ -6265,17 +6315,17 @@
               <a:buChar char="•"/>
             </a:pPr>
             <a:r>
-              <a:rPr lang="en-US" sz="1700" dirty="0">
-                <a:solidFill>
-                  <a:srgbClr val="E6F2F1"/>
-                </a:solidFill>
-                <a:latin typeface="Calibri" pitchFamily="34" charset="0"/>
-                <a:ea typeface="Calibri" pitchFamily="34" charset="-122"/>
-                <a:cs typeface="Calibri" pitchFamily="34" charset="-120"/>
+              <a:rPr lang="en-US" sz="1600" dirty="0">
+                <a:solidFill>
+                  <a:srgbClr val="1D1D1B"/>
+                </a:solidFill>
+                <a:latin typeface="Lucida Sans" pitchFamily="34" charset="0"/>
+                <a:ea typeface="Lucida Sans" pitchFamily="34" charset="-122"/>
+                <a:cs typeface="Lucida Sans" pitchFamily="34" charset="-120"/>
               </a:rPr>
               <a:t>Programme exportieren und sichern</a:t>
             </a:r>
-            <a:endParaRPr lang="en-US" sz="1700" dirty="0"/>
+            <a:endParaRPr lang="en-US" sz="1600" dirty="0"/>
           </a:p>
         </p:txBody>
       </p:sp>
@@ -6287,20 +6337,20 @@
         </p:nvSpPr>
         <p:spPr>
           <a:xfrm>
-            <a:off x="4368698" y="1737360"/>
-            <a:ext cx="3454298" cy="3291840"/>
+            <a:off x="4368698" y="1463040"/>
+            <a:ext cx="3454298" cy="3566160"/>
           </a:xfrm>
           <a:prstGeom prst="roundRect">
             <a:avLst>
-              <a:gd name="adj" fmla="val 3333"/>
+              <a:gd name="adj" fmla="val 3177"/>
             </a:avLst>
           </a:prstGeom>
           <a:solidFill>
-            <a:srgbClr val="174F5E"/>
+            <a:srgbClr val="FDF0E3"/>
           </a:solidFill>
           <a:ln w="12700">
             <a:solidFill>
-              <a:srgbClr val="2C6E7C"/>
+              <a:srgbClr val="FDF0E3"/>
             </a:solidFill>
             <a:prstDash val="solid"/>
           </a:ln>
@@ -6314,18 +6364,18 @@
         </p:nvSpPr>
         <p:spPr>
           <a:xfrm>
-            <a:off x="4643018" y="1965960"/>
+            <a:off x="4643018" y="1691640"/>
             <a:ext cx="548640" cy="548640"/>
           </a:xfrm>
           <a:prstGeom prst="ellipse">
             <a:avLst/>
           </a:prstGeom>
           <a:solidFill>
-            <a:srgbClr val="E8772E"/>
+            <a:srgbClr val="EF7D00"/>
           </a:solidFill>
           <a:ln w="12700">
             <a:solidFill>
-              <a:srgbClr val="E8772E"/>
+              <a:srgbClr val="EF7D00"/>
             </a:solidFill>
             <a:prstDash val="solid"/>
           </a:ln>
@@ -6339,7 +6389,7 @@
         </p:nvSpPr>
         <p:spPr>
           <a:xfrm>
-            <a:off x="4643018" y="1965960"/>
+            <a:off x="4643018" y="1691640"/>
             <a:ext cx="548640" cy="548640"/>
           </a:xfrm>
           <a:prstGeom prst="rect">
@@ -6358,11 +6408,11 @@
             <a:r>
               <a:rPr lang="en-US" sz="1600" b="1" dirty="0">
                 <a:solidFill>
-                  <a:srgbClr val="FFFFFF"/>
-                </a:solidFill>
-                <a:latin typeface="Calibri" pitchFamily="34" charset="0"/>
-                <a:ea typeface="Calibri" pitchFamily="34" charset="-122"/>
-                <a:cs typeface="Calibri" pitchFamily="34" charset="-120"/>
+                  <a:srgbClr val="1D1D1B"/>
+                </a:solidFill>
+                <a:latin typeface="Lucida Sans" pitchFamily="34" charset="0"/>
+                <a:ea typeface="Lucida Sans" pitchFamily="34" charset="-122"/>
+                <a:cs typeface="Lucida Sans" pitchFamily="34" charset="-120"/>
               </a:rPr>
               <a:t>2</a:t>
             </a:r>
@@ -6378,7 +6428,7 @@
         </p:nvSpPr>
         <p:spPr>
           <a:xfrm>
-            <a:off x="5328818" y="1965960"/>
+            <a:off x="5328818" y="1691640"/>
             <a:ext cx="2265578" cy="548640"/>
           </a:xfrm>
           <a:prstGeom prst="rect">
@@ -6395,17 +6445,17 @@
               <a:buNone/>
             </a:pPr>
             <a:r>
-              <a:rPr lang="en-US" sz="1900" b="1" dirty="0">
-                <a:solidFill>
-                  <a:srgbClr val="FFFFFF"/>
-                </a:solidFill>
-                <a:latin typeface="Calibri" pitchFamily="34" charset="0"/>
-                <a:ea typeface="Calibri" pitchFamily="34" charset="-122"/>
-                <a:cs typeface="Calibri" pitchFamily="34" charset="-120"/>
+              <a:rPr lang="en-US" sz="1800" b="1" dirty="0">
+                <a:solidFill>
+                  <a:srgbClr val="7A003F"/>
+                </a:solidFill>
+                <a:latin typeface="Lucida Sans" pitchFamily="34" charset="0"/>
+                <a:ea typeface="Lucida Sans" pitchFamily="34" charset="-122"/>
+                <a:cs typeface="Lucida Sans" pitchFamily="34" charset="-120"/>
               </a:rPr>
               <a:t>Fachgruppe wählen</a:t>
             </a:r>
-            <a:endParaRPr lang="en-US" sz="1900" dirty="0"/>
+            <a:endParaRPr lang="en-US" sz="1800" dirty="0"/>
           </a:p>
         </p:txBody>
       </p:sp>
@@ -6417,8 +6467,8 @@
         </p:nvSpPr>
         <p:spPr>
           <a:xfrm>
-            <a:off x="4643018" y="2743200"/>
-            <a:ext cx="2905658" cy="2148840"/>
+            <a:off x="4643018" y="2468880"/>
+            <a:ext cx="2905658" cy="2377440"/>
           </a:xfrm>
           <a:prstGeom prst="rect">
             <a:avLst/>
@@ -6438,17 +6488,17 @@
               <a:buChar char="•"/>
             </a:pPr>
             <a:r>
-              <a:rPr lang="en-US" sz="1700" dirty="0">
-                <a:solidFill>
-                  <a:srgbClr val="E6F2F1"/>
-                </a:solidFill>
-                <a:latin typeface="Calibri" pitchFamily="34" charset="0"/>
-                <a:ea typeface="Calibri" pitchFamily="34" charset="-122"/>
-                <a:cs typeface="Calibri" pitchFamily="34" charset="-120"/>
+              <a:rPr lang="en-US" sz="1600" dirty="0">
+                <a:solidFill>
+                  <a:srgbClr val="1D1D1B"/>
+                </a:solidFill>
+                <a:latin typeface="Lucida Sans" pitchFamily="34" charset="0"/>
+                <a:ea typeface="Lucida Sans" pitchFamily="34" charset="-122"/>
+                <a:cs typeface="Lucida Sans" pitchFamily="34" charset="-120"/>
               </a:rPr>
               <a:t>Technik · Mathematik · Physik</a:t>
             </a:r>
-            <a:endParaRPr lang="en-US" sz="1700" dirty="0"/>
+            <a:endParaRPr lang="en-US" sz="1600" dirty="0"/>
           </a:p>
           <a:p>
             <a:pPr marL="177800" indent="-177800">
@@ -6459,17 +6509,17 @@
               <a:buChar char="•"/>
             </a:pPr>
             <a:r>
-              <a:rPr lang="en-US" sz="1700" dirty="0">
-                <a:solidFill>
-                  <a:srgbClr val="E6F2F1"/>
-                </a:solidFill>
-                <a:latin typeface="Calibri" pitchFamily="34" charset="0"/>
-                <a:ea typeface="Calibri" pitchFamily="34" charset="-122"/>
-                <a:cs typeface="Calibri" pitchFamily="34" charset="-120"/>
+              <a:rPr lang="en-US" sz="1600" dirty="0">
+                <a:solidFill>
+                  <a:srgbClr val="1D1D1B"/>
+                </a:solidFill>
+                <a:latin typeface="Lucida Sans" pitchFamily="34" charset="0"/>
+                <a:ea typeface="Lucida Sans" pitchFamily="34" charset="-122"/>
+                <a:cs typeface="Lucida Sans" pitchFamily="34" charset="-120"/>
               </a:rPr>
               <a:t>Informatik · offene Gruppe</a:t>
             </a:r>
-            <a:endParaRPr lang="en-US" sz="1700" dirty="0"/>
+            <a:endParaRPr lang="en-US" sz="1600" dirty="0"/>
           </a:p>
           <a:p>
             <a:pPr marL="177800" indent="-177800">
@@ -6480,17 +6530,17 @@
               <a:buChar char="•"/>
             </a:pPr>
             <a:r>
-              <a:rPr lang="en-US" sz="1700" dirty="0">
-                <a:solidFill>
-                  <a:srgbClr val="E6F2F1"/>
-                </a:solidFill>
-                <a:latin typeface="Calibri" pitchFamily="34" charset="0"/>
-                <a:ea typeface="Calibri" pitchFamily="34" charset="-122"/>
-                <a:cs typeface="Calibri" pitchFamily="34" charset="-120"/>
+              <a:rPr lang="en-US" sz="1600" dirty="0">
+                <a:solidFill>
+                  <a:srgbClr val="1D1D1B"/>
+                </a:solidFill>
+                <a:latin typeface="Lucida Sans" pitchFamily="34" charset="0"/>
+                <a:ea typeface="Lucida Sans" pitchFamily="34" charset="-122"/>
+                <a:cs typeface="Lucida Sans" pitchFamily="34" charset="-120"/>
               </a:rPr>
               <a:t>im Moodle bis eine Woche vorher</a:t>
             </a:r>
-            <a:endParaRPr lang="en-US" sz="1700" dirty="0"/>
+            <a:endParaRPr lang="en-US" sz="1600" dirty="0"/>
           </a:p>
         </p:txBody>
       </p:sp>
@@ -6502,20 +6552,20 @@
         </p:nvSpPr>
         <p:spPr>
           <a:xfrm>
-            <a:off x="8188757" y="1737360"/>
-            <a:ext cx="3454298" cy="3291840"/>
+            <a:off x="8188757" y="1463040"/>
+            <a:ext cx="3454298" cy="3566160"/>
           </a:xfrm>
           <a:prstGeom prst="roundRect">
             <a:avLst>
-              <a:gd name="adj" fmla="val 3333"/>
+              <a:gd name="adj" fmla="val 3177"/>
             </a:avLst>
           </a:prstGeom>
           <a:solidFill>
-            <a:srgbClr val="174F5E"/>
+            <a:srgbClr val="FDF0E3"/>
           </a:solidFill>
           <a:ln w="12700">
             <a:solidFill>
-              <a:srgbClr val="2C6E7C"/>
+              <a:srgbClr val="FDF0E3"/>
             </a:solidFill>
             <a:prstDash val="solid"/>
           </a:ln>
@@ -6529,18 +6579,18 @@
         </p:nvSpPr>
         <p:spPr>
           <a:xfrm>
-            <a:off x="8463077" y="1965960"/>
+            <a:off x="8463077" y="1691640"/>
             <a:ext cx="548640" cy="548640"/>
           </a:xfrm>
           <a:prstGeom prst="ellipse">
             <a:avLst/>
           </a:prstGeom>
           <a:solidFill>
-            <a:srgbClr val="E8772E"/>
+            <a:srgbClr val="EF7D00"/>
           </a:solidFill>
           <a:ln w="12700">
             <a:solidFill>
-              <a:srgbClr val="E8772E"/>
+              <a:srgbClr val="EF7D00"/>
             </a:solidFill>
             <a:prstDash val="solid"/>
           </a:ln>
@@ -6554,7 +6604,7 @@
         </p:nvSpPr>
         <p:spPr>
           <a:xfrm>
-            <a:off x="8463077" y="1965960"/>
+            <a:off x="8463077" y="1691640"/>
             <a:ext cx="548640" cy="548640"/>
           </a:xfrm>
           <a:prstGeom prst="rect">
@@ -6573,11 +6623,11 @@
             <a:r>
               <a:rPr lang="en-US" sz="1600" b="1" dirty="0">
                 <a:solidFill>
-                  <a:srgbClr val="FFFFFF"/>
-                </a:solidFill>
-                <a:latin typeface="Calibri" pitchFamily="34" charset="0"/>
-                <a:ea typeface="Calibri" pitchFamily="34" charset="-122"/>
-                <a:cs typeface="Calibri" pitchFamily="34" charset="-120"/>
+                  <a:srgbClr val="1D1D1B"/>
+                </a:solidFill>
+                <a:latin typeface="Lucida Sans" pitchFamily="34" charset="0"/>
+                <a:ea typeface="Lucida Sans" pitchFamily="34" charset="-122"/>
+                <a:cs typeface="Lucida Sans" pitchFamily="34" charset="-120"/>
               </a:rPr>
               <a:t>3</a:t>
             </a:r>
@@ -6593,7 +6643,7 @@
         </p:nvSpPr>
         <p:spPr>
           <a:xfrm>
-            <a:off x="9148877" y="1965960"/>
+            <a:off x="9148877" y="1691640"/>
             <a:ext cx="2265578" cy="548640"/>
           </a:xfrm>
           <a:prstGeom prst="rect">
@@ -6610,17 +6660,17 @@
               <a:buNone/>
             </a:pPr>
             <a:r>
-              <a:rPr lang="en-US" sz="1900" b="1" dirty="0">
-                <a:solidFill>
-                  <a:srgbClr val="FFFFFF"/>
-                </a:solidFill>
-                <a:latin typeface="Calibri" pitchFamily="34" charset="0"/>
-                <a:ea typeface="Calibri" pitchFamily="34" charset="-122"/>
-                <a:cs typeface="Calibri" pitchFamily="34" charset="-120"/>
+              <a:rPr lang="en-US" sz="1800" b="1" dirty="0">
+                <a:solidFill>
+                  <a:srgbClr val="7A003F"/>
+                </a:solidFill>
+                <a:latin typeface="Lucida Sans" pitchFamily="34" charset="0"/>
+                <a:ea typeface="Lucida Sans" pitchFamily="34" charset="-122"/>
+                <a:cs typeface="Lucida Sans" pitchFamily="34" charset="-120"/>
               </a:rPr>
               <a:t>Lehrplanbezug</a:t>
             </a:r>
-            <a:endParaRPr lang="en-US" sz="1900" dirty="0"/>
+            <a:endParaRPr lang="en-US" sz="1800" dirty="0"/>
           </a:p>
         </p:txBody>
       </p:sp>
@@ -6632,8 +6682,8 @@
         </p:nvSpPr>
         <p:spPr>
           <a:xfrm>
-            <a:off x="8463077" y="2743200"/>
-            <a:ext cx="2905658" cy="2148840"/>
+            <a:off x="8463077" y="2468880"/>
+            <a:ext cx="2905658" cy="2377440"/>
           </a:xfrm>
           <a:prstGeom prst="rect">
             <a:avLst/>
@@ -6653,17 +6703,17 @@
               <a:buChar char="•"/>
             </a:pPr>
             <a:r>
-              <a:rPr lang="en-US" sz="1700" dirty="0">
-                <a:solidFill>
-                  <a:srgbClr val="E6F2F1"/>
-                </a:solidFill>
-                <a:latin typeface="Calibri" pitchFamily="34" charset="0"/>
-                <a:ea typeface="Calibri" pitchFamily="34" charset="-122"/>
-                <a:cs typeface="Calibri" pitchFamily="34" charset="-120"/>
+              <a:rPr lang="en-US" sz="1600" dirty="0">
+                <a:solidFill>
+                  <a:srgbClr val="1D1D1B"/>
+                </a:solidFill>
+                <a:latin typeface="Lucida Sans" pitchFamily="34" charset="0"/>
+                <a:ea typeface="Lucida Sans" pitchFamily="34" charset="-122"/>
+                <a:cs typeface="Lucida Sans" pitchFamily="34" charset="-120"/>
               </a:rPr>
               <a:t>Fachlehrplan Sachsen-Anhalt</a:t>
             </a:r>
-            <a:endParaRPr lang="en-US" sz="1700" dirty="0"/>
+            <a:endParaRPr lang="en-US" sz="1600" dirty="0"/>
           </a:p>
           <a:p>
             <a:pPr marL="177800" indent="-177800">
@@ -6674,17 +6724,17 @@
               <a:buChar char="•"/>
             </a:pPr>
             <a:r>
-              <a:rPr lang="en-US" sz="1700" dirty="0">
-                <a:solidFill>
-                  <a:srgbClr val="E6F2F1"/>
-                </a:solidFill>
-                <a:latin typeface="Calibri" pitchFamily="34" charset="0"/>
-                <a:ea typeface="Calibri" pitchFamily="34" charset="-122"/>
-                <a:cs typeface="Calibri" pitchFamily="34" charset="-120"/>
-              </a:rPr>
-              <a:t>Klasse 7: Wo knüpft der mBot2 an?</a:t>
-            </a:r>
-            <a:endParaRPr lang="en-US" sz="1700" dirty="0"/>
+              <a:rPr lang="en-US" sz="1600" dirty="0">
+                <a:solidFill>
+                  <a:srgbClr val="1D1D1B"/>
+                </a:solidFill>
+                <a:latin typeface="Lucida Sans" pitchFamily="34" charset="0"/>
+                <a:ea typeface="Lucida Sans" pitchFamily="34" charset="-122"/>
+                <a:cs typeface="Lucida Sans" pitchFamily="34" charset="-120"/>
+              </a:rPr>
+              <a:t>Wunsch-Jahrgangsstufe wählen</a:t>
+            </a:r>
+            <a:endParaRPr lang="en-US" sz="1600" dirty="0"/>
           </a:p>
           <a:p>
             <a:pPr marL="177800" indent="-177800">
@@ -6695,17 +6745,65 @@
               <a:buChar char="•"/>
             </a:pPr>
             <a:r>
-              <a:rPr lang="en-US" sz="1700" dirty="0">
-                <a:solidFill>
-                  <a:srgbClr val="E6F2F1"/>
-                </a:solidFill>
-                <a:latin typeface="Calibri" pitchFamily="34" charset="0"/>
-                <a:ea typeface="Calibri" pitchFamily="34" charset="-122"/>
-                <a:cs typeface="Calibri" pitchFamily="34" charset="-120"/>
+              <a:rPr lang="en-US" sz="1600" dirty="0">
+                <a:solidFill>
+                  <a:srgbClr val="1D1D1B"/>
+                </a:solidFill>
+                <a:latin typeface="Lucida Sans" pitchFamily="34" charset="0"/>
+                <a:ea typeface="Lucida Sans" pitchFamily="34" charset="-122"/>
+                <a:cs typeface="Lucida Sans" pitchFamily="34" charset="-120"/>
               </a:rPr>
               <a:t>Fundstelle notieren</a:t>
             </a:r>
-            <a:endParaRPr lang="en-US" sz="1700" dirty="0"/>
+            <a:endParaRPr lang="en-US" sz="1600" dirty="0"/>
+          </a:p>
+        </p:txBody>
+      </p:sp>
+      <p:sp>
+        <p:nvSpPr>
+          <p:cNvPr id="25" name="Slide Number Placeholder 0"/>
+          <p:cNvSpPr>
+            <a:spLocks noGrp="1"/>
+          </p:cNvSpPr>
+          <p:nvPr>
+            <p:ph type="sldNum" sz="quarter" idx="4294967295"/>
+          </p:nvPr>
+        </p:nvSpPr>
+        <p:spPr>
+          <a:xfrm>
+            <a:off x="11094415" y="6473952"/>
+            <a:ext cx="548640" cy="274320"/>
+          </a:xfrm>
+          <a:prstGeom prst="rect">
+            <a:avLst/>
+          </a:prstGeom>
+          <a:extLst>
+            <a:ext uri="{C572A759-6A51-4108-AA02-DFA0A04FC94B}">
+              <ma14:wrappingTextBoxFlag xmlns:ma14="http://schemas.microsoft.com/office/mac/drawingml/2011/main" val="0"/>
+            </a:ext>
+          </a:extLst>
+        </p:spPr>
+        <p:txBody>
+          <a:bodyPr/>
+          <a:lstStyle>
+            <a:lvl1pPr>
+              <a:defRPr sz="1000">
+                <a:solidFill>
+                  <a:srgbClr val="706F6F"/>
+                </a:solidFill>
+                <a:latin typeface="Lucida Sans"/>
+                <a:ea typeface="Lucida Sans"/>
+                <a:cs typeface="Lucida Sans"/>
+              </a:defRPr>
+            </a:lvl1pPr>
+          </a:lstStyle>
+          <a:p>
+            <a:pPr algn="r"/>
+            <a:fld id="{F7021451-1387-4CA6-816F-3879F97B5CBC}" type="slidenum">
+              <a:rPr b="0" lang="en-US"/>
+              <a:t>14</a:t>
+            </a:fld>
+            <a:endParaRPr lang="en-US"/>
           </a:p>
         </p:txBody>
       </p:sp>
@@ -6739,13 +6837,13 @@
           <p:cNvPr id="2" name="Text 1"/>
           <p:cNvSpPr/>
           <p:nvPr>
-            <p:ph idx="101" type="title" hasCustomPrompt="1"/>
+            <p:ph idx="102" type="title" hasCustomPrompt="1"/>
           </p:nvPr>
         </p:nvSpPr>
         <p:spPr>
           <a:xfrm>
-            <a:off x="548640" y="320040"/>
-            <a:ext cx="11094415" cy="777240"/>
+            <a:off x="548640" y="274320"/>
+            <a:ext cx="8351215" cy="896112"/>
           </a:xfrm>
           <a:prstGeom prst="rect">
             <a:avLst/>
@@ -6757,21 +6855,21 @@
           <a:bodyPr wrap="square" lIns="0" tIns="0" rIns="0" bIns="0" rtlCol="0" anchor="ctr"/>
           <a:lstStyle/>
           <a:p>
-            <a:pPr indent="0" marL="0">
-              <a:buNone/>
-            </a:pPr>
-            <a:r>
-              <a:rPr lang="en-US" sz="3200" b="1" dirty="0">
-                <a:solidFill>
-                  <a:srgbClr val="0B3C49"/>
-                </a:solidFill>
-                <a:latin typeface="Cambria" pitchFamily="34" charset="0"/>
-                <a:ea typeface="Cambria" pitchFamily="34" charset="-122"/>
-                <a:cs typeface="Cambria" pitchFamily="34" charset="-120"/>
+            <a:pPr algn="l" indent="0" marL="0">
+              <a:buNone/>
+            </a:pPr>
+            <a:r>
+              <a:rPr lang="en-US" sz="2600" b="1" dirty="0">
+                <a:solidFill>
+                  <a:srgbClr val="7A003F"/>
+                </a:solidFill>
+                <a:latin typeface="Lucida Sans" pitchFamily="34" charset="0"/>
+                <a:ea typeface="Lucida Sans" pitchFamily="34" charset="-122"/>
+                <a:cs typeface="Lucida Sans" pitchFamily="34" charset="-120"/>
               </a:rPr>
               <a:t>Ankommen = Verbinden</a:t>
             </a:r>
-            <a:endParaRPr lang="en-US" sz="3200" dirty="0"/>
+            <a:endParaRPr lang="en-US" sz="2600" dirty="0"/>
           </a:p>
         </p:txBody>
       </p:sp>
@@ -6802,11 +6900,11 @@
             <a:r>
               <a:rPr lang="en-US" sz="1600" dirty="0">
                 <a:solidFill>
-                  <a:srgbClr val="5B6B73"/>
-                </a:solidFill>
-                <a:latin typeface="Calibri" pitchFamily="34" charset="0"/>
-                <a:ea typeface="Calibri" pitchFamily="34" charset="-122"/>
-                <a:cs typeface="Calibri" pitchFamily="34" charset="-120"/>
+                  <a:srgbClr val="706F6F"/>
+                </a:solidFill>
+                <a:latin typeface="Lucida Sans" pitchFamily="34" charset="0"/>
+                <a:ea typeface="Lucida Sans" pitchFamily="34" charset="-122"/>
+                <a:cs typeface="Lucida Sans" pitchFamily="34" charset="-120"/>
               </a:rPr>
               <a:t>Bitte verbinden Sie Ihren mBot2 schon jetzt – dann starten wir alle gleichzeitig.</a:t>
             </a:r>
@@ -6831,11 +6929,11 @@
             </a:avLst>
           </a:prstGeom>
           <a:solidFill>
-            <a:srgbClr val="E6F2F1"/>
+            <a:srgbClr val="F2F2F2"/>
           </a:solidFill>
           <a:ln w="12700">
             <a:solidFill>
-              <a:srgbClr val="E6F2F1"/>
+              <a:srgbClr val="F2F2F2"/>
             </a:solidFill>
             <a:prstDash val="solid"/>
           </a:ln>
@@ -6856,11 +6954,11 @@
             <a:avLst/>
           </a:prstGeom>
           <a:solidFill>
-            <a:srgbClr val="0B6E69"/>
+            <a:srgbClr val="7A003F"/>
           </a:solidFill>
           <a:ln w="12700">
             <a:solidFill>
-              <a:srgbClr val="0B6E69"/>
+              <a:srgbClr val="7A003F"/>
             </a:solidFill>
             <a:prstDash val="solid"/>
           </a:ln>
@@ -6895,9 +6993,9 @@
                 <a:solidFill>
                   <a:srgbClr val="FFFFFF"/>
                 </a:solidFill>
-                <a:latin typeface="Calibri" pitchFamily="34" charset="0"/>
-                <a:ea typeface="Calibri" pitchFamily="34" charset="-122"/>
-                <a:cs typeface="Calibri" pitchFamily="34" charset="-120"/>
+                <a:latin typeface="Lucida Sans" pitchFamily="34" charset="0"/>
+                <a:ea typeface="Lucida Sans" pitchFamily="34" charset="-122"/>
+                <a:cs typeface="Lucida Sans" pitchFamily="34" charset="-120"/>
               </a:rPr>
               <a:t>1</a:t>
             </a:r>
@@ -6932,11 +7030,11 @@
             <a:r>
               <a:rPr lang="en-US" sz="1500" b="1" dirty="0">
                 <a:solidFill>
-                  <a:srgbClr val="0B3C49"/>
-                </a:solidFill>
-                <a:latin typeface="Calibri" pitchFamily="34" charset="0"/>
-                <a:ea typeface="Calibri" pitchFamily="34" charset="-122"/>
-                <a:cs typeface="Calibri" pitchFamily="34" charset="-120"/>
+                  <a:srgbClr val="7A003F"/>
+                </a:solidFill>
+                <a:latin typeface="Lucida Sans" pitchFamily="34" charset="0"/>
+                <a:ea typeface="Lucida Sans" pitchFamily="34" charset="-122"/>
+                <a:cs typeface="Lucida Sans" pitchFamily="34" charset="-120"/>
               </a:rPr>
               <a:t>Einschalten, anschließen</a:t>
             </a:r>
@@ -6971,11 +7069,11 @@
             <a:r>
               <a:rPr lang="en-US" sz="1500" dirty="0">
                 <a:solidFill>
-                  <a:srgbClr val="1F2A30"/>
-                </a:solidFill>
-                <a:latin typeface="Calibri" pitchFamily="34" charset="0"/>
-                <a:ea typeface="Calibri" pitchFamily="34" charset="-122"/>
-                <a:cs typeface="Calibri" pitchFamily="34" charset="-120"/>
+                  <a:srgbClr val="1D1D1B"/>
+                </a:solidFill>
+                <a:latin typeface="Lucida Sans" pitchFamily="34" charset="0"/>
+                <a:ea typeface="Lucida Sans" pitchFamily="34" charset="-122"/>
+                <a:cs typeface="Lucida Sans" pitchFamily="34" charset="-120"/>
               </a:rPr>
               <a:t>USB-C-Datenkabel an den Laptop</a:t>
             </a:r>
@@ -7000,11 +7098,11 @@
             </a:avLst>
           </a:prstGeom>
           <a:solidFill>
-            <a:srgbClr val="E6F2F1"/>
+            <a:srgbClr val="F2F2F2"/>
           </a:solidFill>
           <a:ln w="12700">
             <a:solidFill>
-              <a:srgbClr val="E6F2F1"/>
+              <a:srgbClr val="F2F2F2"/>
             </a:solidFill>
             <a:prstDash val="solid"/>
           </a:ln>
@@ -7025,11 +7123,11 @@
             <a:avLst/>
           </a:prstGeom>
           <a:solidFill>
-            <a:srgbClr val="0B6E69"/>
+            <a:srgbClr val="7A003F"/>
           </a:solidFill>
           <a:ln w="12700">
             <a:solidFill>
-              <a:srgbClr val="0B6E69"/>
+              <a:srgbClr val="7A003F"/>
             </a:solidFill>
             <a:prstDash val="solid"/>
           </a:ln>
@@ -7064,9 +7162,9 @@
                 <a:solidFill>
                   <a:srgbClr val="FFFFFF"/>
                 </a:solidFill>
-                <a:latin typeface="Calibri" pitchFamily="34" charset="0"/>
-                <a:ea typeface="Calibri" pitchFamily="34" charset="-122"/>
-                <a:cs typeface="Calibri" pitchFamily="34" charset="-120"/>
+                <a:latin typeface="Lucida Sans" pitchFamily="34" charset="0"/>
+                <a:ea typeface="Lucida Sans" pitchFamily="34" charset="-122"/>
+                <a:cs typeface="Lucida Sans" pitchFamily="34" charset="-120"/>
               </a:rPr>
               <a:t>2</a:t>
             </a:r>
@@ -7101,11 +7199,11 @@
             <a:r>
               <a:rPr lang="en-US" sz="1500" b="1" dirty="0">
                 <a:solidFill>
-                  <a:srgbClr val="0B3C49"/>
-                </a:solidFill>
-                <a:latin typeface="Calibri" pitchFamily="34" charset="0"/>
-                <a:ea typeface="Calibri" pitchFamily="34" charset="-122"/>
-                <a:cs typeface="Calibri" pitchFamily="34" charset="-120"/>
+                  <a:srgbClr val="7A003F"/>
+                </a:solidFill>
+                <a:latin typeface="Lucida Sans" pitchFamily="34" charset="0"/>
+                <a:ea typeface="Lucida Sans" pitchFamily="34" charset="-122"/>
+                <a:cs typeface="Lucida Sans" pitchFamily="34" charset="-120"/>
               </a:rPr>
               <a:t>Connector starten</a:t>
             </a:r>
@@ -7140,11 +7238,11 @@
             <a:r>
               <a:rPr lang="en-US" sz="1500" dirty="0">
                 <a:solidFill>
-                  <a:srgbClr val="1F2A30"/>
-                </a:solidFill>
-                <a:latin typeface="Calibri" pitchFamily="34" charset="0"/>
-                <a:ea typeface="Calibri" pitchFamily="34" charset="-122"/>
-                <a:cs typeface="Calibri" pitchFamily="34" charset="-120"/>
+                  <a:srgbClr val="1D1D1B"/>
+                </a:solidFill>
+                <a:latin typeface="Lucida Sans" pitchFamily="34" charset="0"/>
+                <a:ea typeface="Lucida Sans" pitchFamily="34" charset="-122"/>
+                <a:cs typeface="Lucida Sans" pitchFamily="34" charset="-120"/>
               </a:rPr>
               <a:t>„Verbinden“ klicken, Token notieren</a:t>
             </a:r>
@@ -7169,11 +7267,11 @@
             </a:avLst>
           </a:prstGeom>
           <a:solidFill>
-            <a:srgbClr val="E6F2F1"/>
+            <a:srgbClr val="F2F2F2"/>
           </a:solidFill>
           <a:ln w="12700">
             <a:solidFill>
-              <a:srgbClr val="E6F2F1"/>
+              <a:srgbClr val="F2F2F2"/>
             </a:solidFill>
             <a:prstDash val="solid"/>
           </a:ln>
@@ -7194,11 +7292,11 @@
             <a:avLst/>
           </a:prstGeom>
           <a:solidFill>
-            <a:srgbClr val="0B6E69"/>
+            <a:srgbClr val="7A003F"/>
           </a:solidFill>
           <a:ln w="12700">
             <a:solidFill>
-              <a:srgbClr val="0B6E69"/>
+              <a:srgbClr val="7A003F"/>
             </a:solidFill>
             <a:prstDash val="solid"/>
           </a:ln>
@@ -7233,9 +7331,9 @@
                 <a:solidFill>
                   <a:srgbClr val="FFFFFF"/>
                 </a:solidFill>
-                <a:latin typeface="Calibri" pitchFamily="34" charset="0"/>
-                <a:ea typeface="Calibri" pitchFamily="34" charset="-122"/>
-                <a:cs typeface="Calibri" pitchFamily="34" charset="-120"/>
+                <a:latin typeface="Lucida Sans" pitchFamily="34" charset="0"/>
+                <a:ea typeface="Lucida Sans" pitchFamily="34" charset="-122"/>
+                <a:cs typeface="Lucida Sans" pitchFamily="34" charset="-120"/>
               </a:rPr>
               <a:t>3</a:t>
             </a:r>
@@ -7270,11 +7368,11 @@
             <a:r>
               <a:rPr lang="en-US" sz="1500" b="1" dirty="0">
                 <a:solidFill>
-                  <a:srgbClr val="0B3C49"/>
-                </a:solidFill>
-                <a:latin typeface="Calibri" pitchFamily="34" charset="0"/>
-                <a:ea typeface="Calibri" pitchFamily="34" charset="-122"/>
-                <a:cs typeface="Calibri" pitchFamily="34" charset="-120"/>
+                  <a:srgbClr val="7A003F"/>
+                </a:solidFill>
+                <a:latin typeface="Lucida Sans" pitchFamily="34" charset="0"/>
+                <a:ea typeface="Lucida Sans" pitchFamily="34" charset="-122"/>
+                <a:cs typeface="Lucida Sans" pitchFamily="34" charset="-120"/>
               </a:rPr>
               <a:t>Lab: „mBot 2“</a:t>
             </a:r>
@@ -7309,11 +7407,11 @@
             <a:r>
               <a:rPr lang="en-US" sz="1500" dirty="0">
                 <a:solidFill>
-                  <a:srgbClr val="1F2A30"/>
-                </a:solidFill>
-                <a:latin typeface="Calibri" pitchFamily="34" charset="0"/>
-                <a:ea typeface="Calibri" pitchFamily="34" charset="-122"/>
-                <a:cs typeface="Calibri" pitchFamily="34" charset="-120"/>
+                  <a:srgbClr val="1D1D1B"/>
+                </a:solidFill>
+                <a:latin typeface="Lucida Sans" pitchFamily="34" charset="0"/>
+                <a:ea typeface="Lucida Sans" pitchFamily="34" charset="-122"/>
+                <a:cs typeface="Lucida Sans" pitchFamily="34" charset="-120"/>
               </a:rPr>
               <a:t>lab.open-roberta.org, System wählen</a:t>
             </a:r>
@@ -7338,11 +7436,11 @@
             </a:avLst>
           </a:prstGeom>
           <a:solidFill>
-            <a:srgbClr val="E6F2F1"/>
+            <a:srgbClr val="F2F2F2"/>
           </a:solidFill>
           <a:ln w="12700">
             <a:solidFill>
-              <a:srgbClr val="E6F2F1"/>
+              <a:srgbClr val="F2F2F2"/>
             </a:solidFill>
             <a:prstDash val="solid"/>
           </a:ln>
@@ -7363,11 +7461,11 @@
             <a:avLst/>
           </a:prstGeom>
           <a:solidFill>
-            <a:srgbClr val="0B6E69"/>
+            <a:srgbClr val="7A003F"/>
           </a:solidFill>
           <a:ln w="12700">
             <a:solidFill>
-              <a:srgbClr val="0B6E69"/>
+              <a:srgbClr val="7A003F"/>
             </a:solidFill>
             <a:prstDash val="solid"/>
           </a:ln>
@@ -7402,9 +7500,9 @@
                 <a:solidFill>
                   <a:srgbClr val="FFFFFF"/>
                 </a:solidFill>
-                <a:latin typeface="Calibri" pitchFamily="34" charset="0"/>
-                <a:ea typeface="Calibri" pitchFamily="34" charset="-122"/>
-                <a:cs typeface="Calibri" pitchFamily="34" charset="-120"/>
+                <a:latin typeface="Lucida Sans" pitchFamily="34" charset="0"/>
+                <a:ea typeface="Lucida Sans" pitchFamily="34" charset="-122"/>
+                <a:cs typeface="Lucida Sans" pitchFamily="34" charset="-120"/>
               </a:rPr>
               <a:t>4</a:t>
             </a:r>
@@ -7439,11 +7537,11 @@
             <a:r>
               <a:rPr lang="en-US" sz="1500" b="1" dirty="0">
                 <a:solidFill>
-                  <a:srgbClr val="0B3C49"/>
-                </a:solidFill>
-                <a:latin typeface="Calibri" pitchFamily="34" charset="0"/>
-                <a:ea typeface="Calibri" pitchFamily="34" charset="-122"/>
-                <a:cs typeface="Calibri" pitchFamily="34" charset="-120"/>
+                  <a:srgbClr val="7A003F"/>
+                </a:solidFill>
+                <a:latin typeface="Lucida Sans" pitchFamily="34" charset="0"/>
+                <a:ea typeface="Lucida Sans" pitchFamily="34" charset="-122"/>
+                <a:cs typeface="Lucida Sans" pitchFamily="34" charset="-120"/>
               </a:rPr>
               <a:t>Roboter → Verbinden</a:t>
             </a:r>
@@ -7478,11 +7576,11 @@
             <a:r>
               <a:rPr lang="en-US" sz="1500" dirty="0">
                 <a:solidFill>
-                  <a:srgbClr val="1F2A30"/>
-                </a:solidFill>
-                <a:latin typeface="Calibri" pitchFamily="34" charset="0"/>
-                <a:ea typeface="Calibri" pitchFamily="34" charset="-122"/>
-                <a:cs typeface="Calibri" pitchFamily="34" charset="-120"/>
+                  <a:srgbClr val="1D1D1B"/>
+                </a:solidFill>
+                <a:latin typeface="Lucida Sans" pitchFamily="34" charset="0"/>
+                <a:ea typeface="Lucida Sans" pitchFamily="34" charset="-122"/>
+                <a:cs typeface="Lucida Sans" pitchFamily="34" charset="-120"/>
               </a:rPr>
               <a:t>Token eingeben</a:t>
             </a:r>
@@ -7507,11 +7605,11 @@
             </a:avLst>
           </a:prstGeom>
           <a:solidFill>
-            <a:srgbClr val="E6F2F1"/>
+            <a:srgbClr val="F2F2F2"/>
           </a:solidFill>
           <a:ln w="12700">
             <a:solidFill>
-              <a:srgbClr val="E6F2F1"/>
+              <a:srgbClr val="F2F2F2"/>
             </a:solidFill>
             <a:prstDash val="solid"/>
           </a:ln>
@@ -7532,11 +7630,11 @@
             <a:avLst/>
           </a:prstGeom>
           <a:solidFill>
-            <a:srgbClr val="0B6E69"/>
+            <a:srgbClr val="7A003F"/>
           </a:solidFill>
           <a:ln w="12700">
             <a:solidFill>
-              <a:srgbClr val="0B6E69"/>
+              <a:srgbClr val="7A003F"/>
             </a:solidFill>
             <a:prstDash val="solid"/>
           </a:ln>
@@ -7571,9 +7669,9 @@
                 <a:solidFill>
                   <a:srgbClr val="FFFFFF"/>
                 </a:solidFill>
-                <a:latin typeface="Calibri" pitchFamily="34" charset="0"/>
-                <a:ea typeface="Calibri" pitchFamily="34" charset="-122"/>
-                <a:cs typeface="Calibri" pitchFamily="34" charset="-120"/>
+                <a:latin typeface="Lucida Sans" pitchFamily="34" charset="0"/>
+                <a:ea typeface="Lucida Sans" pitchFamily="34" charset="-122"/>
+                <a:cs typeface="Lucida Sans" pitchFamily="34" charset="-120"/>
               </a:rPr>
               <a:t>5</a:t>
             </a:r>
@@ -7608,11 +7706,11 @@
             <a:r>
               <a:rPr lang="en-US" sz="1500" b="1" dirty="0">
                 <a:solidFill>
-                  <a:srgbClr val="0B3C49"/>
-                </a:solidFill>
-                <a:latin typeface="Calibri" pitchFamily="34" charset="0"/>
-                <a:ea typeface="Calibri" pitchFamily="34" charset="-122"/>
-                <a:cs typeface="Calibri" pitchFamily="34" charset="-120"/>
+                  <a:srgbClr val="7A003F"/>
+                </a:solidFill>
+                <a:latin typeface="Lucida Sans" pitchFamily="34" charset="0"/>
+                <a:ea typeface="Lucida Sans" pitchFamily="34" charset="-122"/>
+                <a:cs typeface="Lucida Sans" pitchFamily="34" charset="-120"/>
               </a:rPr>
               <a:t>Testprogramm</a:t>
             </a:r>
@@ -7647,11 +7745,11 @@
             <a:r>
               <a:rPr lang="en-US" sz="1500" dirty="0">
                 <a:solidFill>
-                  <a:srgbClr val="1F2A30"/>
-                </a:solidFill>
-                <a:latin typeface="Calibri" pitchFamily="34" charset="0"/>
-                <a:ea typeface="Calibri" pitchFamily="34" charset="-122"/>
-                <a:cs typeface="Calibri" pitchFamily="34" charset="-120"/>
+                  <a:srgbClr val="1D1D1B"/>
+                </a:solidFill>
+                <a:latin typeface="Lucida Sans" pitchFamily="34" charset="0"/>
+                <a:ea typeface="Lucida Sans" pitchFamily="34" charset="-122"/>
+                <a:cs typeface="Lucida Sans" pitchFamily="34" charset="-120"/>
               </a:rPr>
               <a:t>LED grün + Ton auf Taste A</a:t>
             </a:r>
@@ -7676,11 +7774,11 @@
             </a:avLst>
           </a:prstGeom>
           <a:solidFill>
-            <a:srgbClr val="FCEBDD"/>
+            <a:srgbClr val="FDF0E3"/>
           </a:solidFill>
           <a:ln w="12700">
             <a:solidFill>
-              <a:srgbClr val="FCEBDD"/>
+              <a:srgbClr val="FDF0E3"/>
             </a:solidFill>
             <a:prstDash val="solid"/>
           </a:ln>
@@ -7701,11 +7799,11 @@
             <a:avLst/>
           </a:prstGeom>
           <a:solidFill>
-            <a:srgbClr val="E8772E"/>
+            <a:srgbClr val="EF7D00"/>
           </a:solidFill>
           <a:ln w="12700">
             <a:solidFill>
-              <a:srgbClr val="E8772E"/>
+              <a:srgbClr val="EF7D00"/>
             </a:solidFill>
             <a:prstDash val="solid"/>
           </a:ln>
@@ -7738,11 +7836,11 @@
             <a:r>
               <a:rPr lang="en-US" sz="1400" b="1" dirty="0">
                 <a:solidFill>
-                  <a:srgbClr val="FFFFFF"/>
-                </a:solidFill>
-                <a:latin typeface="Calibri" pitchFamily="34" charset="0"/>
-                <a:ea typeface="Calibri" pitchFamily="34" charset="-122"/>
-                <a:cs typeface="Calibri" pitchFamily="34" charset="-120"/>
+                  <a:srgbClr val="1D1D1B"/>
+                </a:solidFill>
+                <a:latin typeface="Lucida Sans" pitchFamily="34" charset="0"/>
+                <a:ea typeface="Lucida Sans" pitchFamily="34" charset="-122"/>
+                <a:cs typeface="Lucida Sans" pitchFamily="34" charset="-120"/>
               </a:rPr>
               <a:t>6</a:t>
             </a:r>
@@ -7777,11 +7875,11 @@
             <a:r>
               <a:rPr lang="en-US" sz="1500" b="1" dirty="0">
                 <a:solidFill>
-                  <a:srgbClr val="0B3C49"/>
-                </a:solidFill>
-                <a:latin typeface="Calibri" pitchFamily="34" charset="0"/>
-                <a:ea typeface="Calibri" pitchFamily="34" charset="-122"/>
-                <a:cs typeface="Calibri" pitchFamily="34" charset="-120"/>
+                  <a:srgbClr val="7A003F"/>
+                </a:solidFill>
+                <a:latin typeface="Lucida Sans" pitchFamily="34" charset="0"/>
+                <a:ea typeface="Lucida Sans" pitchFamily="34" charset="-122"/>
+                <a:cs typeface="Lucida Sans" pitchFamily="34" charset="-120"/>
               </a:rPr>
               <a:t>Klappt nicht?</a:t>
             </a:r>
@@ -7816,11 +7914,11 @@
             <a:r>
               <a:rPr lang="en-US" sz="1500" dirty="0">
                 <a:solidFill>
-                  <a:srgbClr val="1F2A30"/>
-                </a:solidFill>
-                <a:latin typeface="Calibri" pitchFamily="34" charset="0"/>
-                <a:ea typeface="Calibri" pitchFamily="34" charset="-122"/>
-                <a:cs typeface="Calibri" pitchFamily="34" charset="-120"/>
+                  <a:srgbClr val="1D1D1B"/>
+                </a:solidFill>
+                <a:latin typeface="Lucida Sans" pitchFamily="34" charset="0"/>
+                <a:ea typeface="Lucida Sans" pitchFamily="34" charset="-122"/>
+                <a:cs typeface="Lucida Sans" pitchFamily="34" charset="-120"/>
               </a:rPr>
               <a:t>anderes Kabel, neu einschalten, Token neu – oder Leitung fragen</a:t>
             </a:r>
@@ -7858,11 +7956,11 @@
             <a:lvl1pPr>
               <a:defRPr sz="1000">
                 <a:solidFill>
-                  <a:srgbClr val="5B6B73"/>
-                </a:solidFill>
-                <a:latin typeface="Calibri"/>
-                <a:ea typeface="Calibri"/>
-                <a:cs typeface="Calibri"/>
+                  <a:srgbClr val="706F6F"/>
+                </a:solidFill>
+                <a:latin typeface="Lucida Sans"/>
+                <a:ea typeface="Lucida Sans"/>
+                <a:cs typeface="Lucida Sans"/>
               </a:defRPr>
             </a:lvl1pPr>
           </a:lstStyle>
@@ -7906,13 +8004,13 @@
           <p:cNvPr id="2" name="Text 1"/>
           <p:cNvSpPr/>
           <p:nvPr>
-            <p:ph idx="101" type="title" hasCustomPrompt="1"/>
+            <p:ph idx="102" type="title" hasCustomPrompt="1"/>
           </p:nvPr>
         </p:nvSpPr>
         <p:spPr>
           <a:xfrm>
-            <a:off x="548640" y="320040"/>
-            <a:ext cx="11094415" cy="777240"/>
+            <a:off x="548640" y="274320"/>
+            <a:ext cx="8351215" cy="896112"/>
           </a:xfrm>
           <a:prstGeom prst="rect">
             <a:avLst/>
@@ -7924,21 +8022,21 @@
           <a:bodyPr wrap="square" lIns="0" tIns="0" rIns="0" bIns="0" rtlCol="0" anchor="ctr"/>
           <a:lstStyle/>
           <a:p>
-            <a:pPr indent="0" marL="0">
-              <a:buNone/>
-            </a:pPr>
-            <a:r>
-              <a:rPr lang="en-US" sz="3200" b="1" dirty="0">
-                <a:solidFill>
-                  <a:srgbClr val="0B3C49"/>
-                </a:solidFill>
-                <a:latin typeface="Cambria" pitchFamily="34" charset="0"/>
-                <a:ea typeface="Cambria" pitchFamily="34" charset="-122"/>
-                <a:cs typeface="Cambria" pitchFamily="34" charset="-120"/>
+            <a:pPr algn="l" indent="0" marL="0">
+              <a:buNone/>
+            </a:pPr>
+            <a:r>
+              <a:rPr lang="en-US" sz="2600" b="1" dirty="0">
+                <a:solidFill>
+                  <a:srgbClr val="7A003F"/>
+                </a:solidFill>
+                <a:latin typeface="Lucida Sans" pitchFamily="34" charset="0"/>
+                <a:ea typeface="Lucida Sans" pitchFamily="34" charset="-122"/>
+                <a:cs typeface="Lucida Sans" pitchFamily="34" charset="-120"/>
               </a:rPr>
               <a:t>Ziele und Ablauf heute</a:t>
             </a:r>
-            <a:endParaRPr lang="en-US" sz="3200" dirty="0"/>
+            <a:endParaRPr lang="en-US" sz="2600" dirty="0"/>
           </a:p>
         </p:txBody>
       </p:sp>
@@ -7969,11 +8067,11 @@
             <a:r>
               <a:rPr lang="en-US" sz="1700" dirty="0">
                 <a:solidFill>
-                  <a:srgbClr val="5B6B73"/>
-                </a:solidFill>
-                <a:latin typeface="Calibri" pitchFamily="34" charset="0"/>
-                <a:ea typeface="Calibri" pitchFamily="34" charset="-122"/>
-                <a:cs typeface="Calibri" pitchFamily="34" charset="-120"/>
+                  <a:srgbClr val="706F6F"/>
+                </a:solidFill>
+                <a:latin typeface="Lucida Sans" pitchFamily="34" charset="0"/>
+                <a:ea typeface="Lucida Sans" pitchFamily="34" charset="-122"/>
+                <a:cs typeface="Lucida Sans" pitchFamily="34" charset="-120"/>
               </a:rPr>
               <a:t>Ziel: Programme schreiben, die auf die Umwelt reagieren – vorhersagen, testen, verbessern.</a:t>
             </a:r>
@@ -7998,7 +8096,7 @@
           <a:noFill/>
           <a:ln w="25400">
             <a:solidFill>
-              <a:srgbClr val="C9DAD8"/>
+              <a:srgbClr val="D9D9D9"/>
             </a:solidFill>
             <a:prstDash val="solid"/>
           </a:ln>
@@ -8019,11 +8117,11 @@
             <a:avLst/>
           </a:prstGeom>
           <a:solidFill>
-            <a:srgbClr val="0B6E69"/>
+            <a:srgbClr val="7A003F"/>
           </a:solidFill>
           <a:ln w="12700">
             <a:solidFill>
-              <a:srgbClr val="0B6E69"/>
+              <a:srgbClr val="7A003F"/>
             </a:solidFill>
             <a:prstDash val="solid"/>
           </a:ln>
@@ -8058,9 +8156,9 @@
                 <a:solidFill>
                   <a:srgbClr val="FFFFFF"/>
                 </a:solidFill>
-                <a:latin typeface="Calibri" pitchFamily="34" charset="0"/>
-                <a:ea typeface="Calibri" pitchFamily="34" charset="-122"/>
-                <a:cs typeface="Calibri" pitchFamily="34" charset="-120"/>
+                <a:latin typeface="Lucida Sans" pitchFamily="34" charset="0"/>
+                <a:ea typeface="Lucida Sans" pitchFamily="34" charset="-122"/>
+                <a:cs typeface="Lucida Sans" pitchFamily="34" charset="-120"/>
               </a:rPr>
               <a:t>1</a:t>
             </a:r>
@@ -8095,11 +8193,11 @@
             <a:r>
               <a:rPr lang="en-US" sz="1400" b="1" dirty="0">
                 <a:solidFill>
-                  <a:srgbClr val="0B6E69"/>
-                </a:solidFill>
-                <a:latin typeface="Calibri" pitchFamily="34" charset="0"/>
-                <a:ea typeface="Calibri" pitchFamily="34" charset="-122"/>
-                <a:cs typeface="Calibri" pitchFamily="34" charset="-120"/>
+                  <a:srgbClr val="7A003F"/>
+                </a:solidFill>
+                <a:latin typeface="Lucida Sans" pitchFamily="34" charset="0"/>
+                <a:ea typeface="Lucida Sans" pitchFamily="34" charset="-122"/>
+                <a:cs typeface="Lucida Sans" pitchFamily="34" charset="-120"/>
               </a:rPr>
               <a:t>0–8</a:t>
             </a:r>
@@ -8124,11 +8222,11 @@
             </a:avLst>
           </a:prstGeom>
           <a:solidFill>
-            <a:srgbClr val="E6F2F1"/>
+            <a:srgbClr val="F2F2F2"/>
           </a:solidFill>
           <a:ln w="12700">
             <a:solidFill>
-              <a:srgbClr val="E6F2F1"/>
+              <a:srgbClr val="F2F2F2"/>
             </a:solidFill>
             <a:prstDash val="solid"/>
           </a:ln>
@@ -8161,11 +8259,11 @@
             <a:r>
               <a:rPr lang="en-US" sz="1600" b="1" dirty="0">
                 <a:solidFill>
-                  <a:srgbClr val="0B3C49"/>
-                </a:solidFill>
-                <a:latin typeface="Calibri" pitchFamily="34" charset="0"/>
-                <a:ea typeface="Calibri" pitchFamily="34" charset="-122"/>
-                <a:cs typeface="Calibri" pitchFamily="34" charset="-120"/>
+                  <a:srgbClr val="7A003F"/>
+                </a:solidFill>
+                <a:latin typeface="Lucida Sans" pitchFamily="34" charset="0"/>
+                <a:ea typeface="Lucida Sans" pitchFamily="34" charset="-122"/>
+                <a:cs typeface="Lucida Sans" pitchFamily="34" charset="-120"/>
               </a:rPr>
               <a:t>Rückblick, Lernpfad</a:t>
             </a:r>
@@ -8198,17 +8296,17 @@
               <a:buNone/>
             </a:pPr>
             <a:r>
-              <a:rPr lang="en-US" sz="1500" dirty="0">
-                <a:solidFill>
-                  <a:srgbClr val="1F2A30"/>
-                </a:solidFill>
-                <a:latin typeface="Calibri" pitchFamily="34" charset="0"/>
-                <a:ea typeface="Calibri" pitchFamily="34" charset="-122"/>
-                <a:cs typeface="Calibri" pitchFamily="34" charset="-120"/>
+              <a:rPr lang="en-US" sz="1250" dirty="0">
+                <a:solidFill>
+                  <a:srgbClr val="1D1D1B"/>
+                </a:solidFill>
+                <a:latin typeface="Lucida Sans" pitchFamily="34" charset="0"/>
+                <a:ea typeface="Lucida Sans" pitchFamily="34" charset="-122"/>
+                <a:cs typeface="Lucida Sans" pitchFamily="34" charset="-120"/>
               </a:rPr>
               <a:t>Wissenscheck 1, Lernpfad A, B oder C wählen</a:t>
             </a:r>
-            <a:endParaRPr lang="en-US" sz="1500" dirty="0"/>
+            <a:endParaRPr lang="en-US" sz="1250" dirty="0"/>
           </a:p>
         </p:txBody>
       </p:sp>
@@ -8227,11 +8325,11 @@
             <a:avLst/>
           </a:prstGeom>
           <a:solidFill>
-            <a:srgbClr val="0B6E69"/>
+            <a:srgbClr val="7A003F"/>
           </a:solidFill>
           <a:ln w="12700">
             <a:solidFill>
-              <a:srgbClr val="0B6E69"/>
+              <a:srgbClr val="7A003F"/>
             </a:solidFill>
             <a:prstDash val="solid"/>
           </a:ln>
@@ -8266,9 +8364,9 @@
                 <a:solidFill>
                   <a:srgbClr val="FFFFFF"/>
                 </a:solidFill>
-                <a:latin typeface="Calibri" pitchFamily="34" charset="0"/>
-                <a:ea typeface="Calibri" pitchFamily="34" charset="-122"/>
-                <a:cs typeface="Calibri" pitchFamily="34" charset="-120"/>
+                <a:latin typeface="Lucida Sans" pitchFamily="34" charset="0"/>
+                <a:ea typeface="Lucida Sans" pitchFamily="34" charset="-122"/>
+                <a:cs typeface="Lucida Sans" pitchFamily="34" charset="-120"/>
               </a:rPr>
               <a:t>2</a:t>
             </a:r>
@@ -8303,11 +8401,11 @@
             <a:r>
               <a:rPr lang="en-US" sz="1400" b="1" dirty="0">
                 <a:solidFill>
-                  <a:srgbClr val="0B6E69"/>
-                </a:solidFill>
-                <a:latin typeface="Calibri" pitchFamily="34" charset="0"/>
-                <a:ea typeface="Calibri" pitchFamily="34" charset="-122"/>
-                <a:cs typeface="Calibri" pitchFamily="34" charset="-120"/>
+                  <a:srgbClr val="7A003F"/>
+                </a:solidFill>
+                <a:latin typeface="Lucida Sans" pitchFamily="34" charset="0"/>
+                <a:ea typeface="Lucida Sans" pitchFamily="34" charset="-122"/>
+                <a:cs typeface="Lucida Sans" pitchFamily="34" charset="-120"/>
               </a:rPr>
               <a:t>8–18</a:t>
             </a:r>
@@ -8332,11 +8430,11 @@
             </a:avLst>
           </a:prstGeom>
           <a:solidFill>
-            <a:srgbClr val="E6F2F1"/>
+            <a:srgbClr val="F2F2F2"/>
           </a:solidFill>
           <a:ln w="12700">
             <a:solidFill>
-              <a:srgbClr val="E6F2F1"/>
+              <a:srgbClr val="F2F2F2"/>
             </a:solidFill>
             <a:prstDash val="solid"/>
           </a:ln>
@@ -8369,11 +8467,11 @@
             <a:r>
               <a:rPr lang="en-US" sz="1600" b="1" dirty="0">
                 <a:solidFill>
-                  <a:srgbClr val="0B3C49"/>
-                </a:solidFill>
-                <a:latin typeface="Calibri" pitchFamily="34" charset="0"/>
-                <a:ea typeface="Calibri" pitchFamily="34" charset="-122"/>
-                <a:cs typeface="Calibri" pitchFamily="34" charset="-120"/>
+                  <a:srgbClr val="7A003F"/>
+                </a:solidFill>
+                <a:latin typeface="Lucida Sans" pitchFamily="34" charset="0"/>
+                <a:ea typeface="Lucida Sans" pitchFamily="34" charset="-122"/>
+                <a:cs typeface="Lucida Sans" pitchFamily="34" charset="-120"/>
               </a:rPr>
               <a:t>Mensch-Roboter</a:t>
             </a:r>
@@ -8406,17 +8504,17 @@
               <a:buNone/>
             </a:pPr>
             <a:r>
-              <a:rPr lang="en-US" sz="1500" dirty="0">
-                <a:solidFill>
-                  <a:srgbClr val="1F2A30"/>
-                </a:solidFill>
-                <a:latin typeface="Calibri" pitchFamily="34" charset="0"/>
-                <a:ea typeface="Calibri" pitchFamily="34" charset="-122"/>
-                <a:cs typeface="Calibri" pitchFamily="34" charset="-120"/>
+              <a:rPr lang="en-US" sz="1250" dirty="0">
+                <a:solidFill>
+                  <a:srgbClr val="1D1D1B"/>
+                </a:solidFill>
+                <a:latin typeface="Lucida Sans" pitchFamily="34" charset="0"/>
+                <a:ea typeface="Lucida Sans" pitchFamily="34" charset="-122"/>
+                <a:cs typeface="Lucida Sans" pitchFamily="34" charset="-120"/>
               </a:rPr>
               <a:t>Sequenz, Schleife, Bedingung ohne Computer</a:t>
             </a:r>
-            <a:endParaRPr lang="en-US" sz="1500" dirty="0"/>
+            <a:endParaRPr lang="en-US" sz="1250" dirty="0"/>
           </a:p>
         </p:txBody>
       </p:sp>
@@ -8435,11 +8533,11 @@
             <a:avLst/>
           </a:prstGeom>
           <a:solidFill>
-            <a:srgbClr val="0B6E69"/>
+            <a:srgbClr val="7A003F"/>
           </a:solidFill>
           <a:ln w="12700">
             <a:solidFill>
-              <a:srgbClr val="0B6E69"/>
+              <a:srgbClr val="7A003F"/>
             </a:solidFill>
             <a:prstDash val="solid"/>
           </a:ln>
@@ -8474,9 +8572,9 @@
                 <a:solidFill>
                   <a:srgbClr val="FFFFFF"/>
                 </a:solidFill>
-                <a:latin typeface="Calibri" pitchFamily="34" charset="0"/>
-                <a:ea typeface="Calibri" pitchFamily="34" charset="-122"/>
-                <a:cs typeface="Calibri" pitchFamily="34" charset="-120"/>
+                <a:latin typeface="Lucida Sans" pitchFamily="34" charset="0"/>
+                <a:ea typeface="Lucida Sans" pitchFamily="34" charset="-122"/>
+                <a:cs typeface="Lucida Sans" pitchFamily="34" charset="-120"/>
               </a:rPr>
               <a:t>3</a:t>
             </a:r>
@@ -8511,11 +8609,11 @@
             <a:r>
               <a:rPr lang="en-US" sz="1400" b="1" dirty="0">
                 <a:solidFill>
-                  <a:srgbClr val="0B6E69"/>
-                </a:solidFill>
-                <a:latin typeface="Calibri" pitchFamily="34" charset="0"/>
-                <a:ea typeface="Calibri" pitchFamily="34" charset="-122"/>
-                <a:cs typeface="Calibri" pitchFamily="34" charset="-120"/>
+                  <a:srgbClr val="7A003F"/>
+                </a:solidFill>
+                <a:latin typeface="Lucida Sans" pitchFamily="34" charset="0"/>
+                <a:ea typeface="Lucida Sans" pitchFamily="34" charset="-122"/>
+                <a:cs typeface="Lucida Sans" pitchFamily="34" charset="-120"/>
               </a:rPr>
               <a:t>18–33</a:t>
             </a:r>
@@ -8540,11 +8638,11 @@
             </a:avLst>
           </a:prstGeom>
           <a:solidFill>
-            <a:srgbClr val="E6F2F1"/>
+            <a:srgbClr val="F2F2F2"/>
           </a:solidFill>
           <a:ln w="12700">
             <a:solidFill>
-              <a:srgbClr val="E6F2F1"/>
+              <a:srgbClr val="F2F2F2"/>
             </a:solidFill>
             <a:prstDash val="solid"/>
           </a:ln>
@@ -8577,11 +8675,11 @@
             <a:r>
               <a:rPr lang="en-US" sz="1600" b="1" dirty="0">
                 <a:solidFill>
-                  <a:srgbClr val="0B3C49"/>
-                </a:solidFill>
-                <a:latin typeface="Calibri" pitchFamily="34" charset="0"/>
-                <a:ea typeface="Calibri" pitchFamily="34" charset="-122"/>
-                <a:cs typeface="Calibri" pitchFamily="34" charset="-120"/>
+                  <a:srgbClr val="7A003F"/>
+                </a:solidFill>
+                <a:latin typeface="Lucida Sans" pitchFamily="34" charset="0"/>
+                <a:ea typeface="Lucida Sans" pitchFamily="34" charset="-122"/>
+                <a:cs typeface="Lucida Sans" pitchFamily="34" charset="-120"/>
               </a:rPr>
               <a:t>PRIMM am Beamer</a:t>
             </a:r>
@@ -8614,17 +8712,17 @@
               <a:buNone/>
             </a:pPr>
             <a:r>
-              <a:rPr lang="en-US" sz="1500" dirty="0">
-                <a:solidFill>
-                  <a:srgbClr val="1F2A30"/>
-                </a:solidFill>
-                <a:latin typeface="Calibri" pitchFamily="34" charset="0"/>
-                <a:ea typeface="Calibri" pitchFamily="34" charset="-122"/>
-                <a:cs typeface="Calibri" pitchFamily="34" charset="-120"/>
+              <a:rPr lang="en-US" sz="1250" dirty="0">
+                <a:solidFill>
+                  <a:srgbClr val="1D1D1B"/>
+                </a:solidFill>
+                <a:latin typeface="Lucida Sans" pitchFamily="34" charset="0"/>
+                <a:ea typeface="Lucida Sans" pitchFamily="34" charset="-122"/>
+                <a:cs typeface="Lucida Sans" pitchFamily="34" charset="-120"/>
               </a:rPr>
               <a:t>Programm „Wachhund“ vorhersagen, testen, ändern</a:t>
             </a:r>
-            <a:endParaRPr lang="en-US" sz="1500" dirty="0"/>
+            <a:endParaRPr lang="en-US" sz="1250" dirty="0"/>
           </a:p>
         </p:txBody>
       </p:sp>
@@ -8643,11 +8741,11 @@
             <a:avLst/>
           </a:prstGeom>
           <a:solidFill>
-            <a:srgbClr val="E8772E"/>
+            <a:srgbClr val="EF7D00"/>
           </a:solidFill>
           <a:ln w="12700">
             <a:solidFill>
-              <a:srgbClr val="E8772E"/>
+              <a:srgbClr val="EF7D00"/>
             </a:solidFill>
             <a:prstDash val="solid"/>
           </a:ln>
@@ -8680,11 +8778,11 @@
             <a:r>
               <a:rPr lang="en-US" sz="1600" b="1" dirty="0">
                 <a:solidFill>
-                  <a:srgbClr val="FFFFFF"/>
-                </a:solidFill>
-                <a:latin typeface="Calibri" pitchFamily="34" charset="0"/>
-                <a:ea typeface="Calibri" pitchFamily="34" charset="-122"/>
-                <a:cs typeface="Calibri" pitchFamily="34" charset="-120"/>
+                  <a:srgbClr val="1D1D1B"/>
+                </a:solidFill>
+                <a:latin typeface="Lucida Sans" pitchFamily="34" charset="0"/>
+                <a:ea typeface="Lucida Sans" pitchFamily="34" charset="-122"/>
+                <a:cs typeface="Lucida Sans" pitchFamily="34" charset="-120"/>
               </a:rPr>
               <a:t>4</a:t>
             </a:r>
@@ -8719,11 +8817,11 @@
             <a:r>
               <a:rPr lang="en-US" sz="1400" b="1" dirty="0">
                 <a:solidFill>
-                  <a:srgbClr val="0B6E69"/>
-                </a:solidFill>
-                <a:latin typeface="Calibri" pitchFamily="34" charset="0"/>
-                <a:ea typeface="Calibri" pitchFamily="34" charset="-122"/>
-                <a:cs typeface="Calibri" pitchFamily="34" charset="-120"/>
+                  <a:srgbClr val="7A003F"/>
+                </a:solidFill>
+                <a:latin typeface="Lucida Sans" pitchFamily="34" charset="0"/>
+                <a:ea typeface="Lucida Sans" pitchFamily="34" charset="-122"/>
+                <a:cs typeface="Lucida Sans" pitchFamily="34" charset="-120"/>
               </a:rPr>
               <a:t>33–63</a:t>
             </a:r>
@@ -8748,11 +8846,11 @@
             </a:avLst>
           </a:prstGeom>
           <a:solidFill>
-            <a:srgbClr val="FCEBDD"/>
+            <a:srgbClr val="FDF0E3"/>
           </a:solidFill>
           <a:ln w="12700">
             <a:solidFill>
-              <a:srgbClr val="FCEBDD"/>
+              <a:srgbClr val="FDF0E3"/>
             </a:solidFill>
             <a:prstDash val="solid"/>
           </a:ln>
@@ -8785,11 +8883,11 @@
             <a:r>
               <a:rPr lang="en-US" sz="1600" b="1" dirty="0">
                 <a:solidFill>
-                  <a:srgbClr val="0B3C49"/>
-                </a:solidFill>
-                <a:latin typeface="Calibri" pitchFamily="34" charset="0"/>
-                <a:ea typeface="Calibri" pitchFamily="34" charset="-122"/>
-                <a:cs typeface="Calibri" pitchFamily="34" charset="-120"/>
+                  <a:srgbClr val="7A003F"/>
+                </a:solidFill>
+                <a:latin typeface="Lucida Sans" pitchFamily="34" charset="0"/>
+                <a:ea typeface="Lucida Sans" pitchFamily="34" charset="-122"/>
+                <a:cs typeface="Lucida Sans" pitchFamily="34" charset="-120"/>
               </a:rPr>
               <a:t>Lernpfade</a:t>
             </a:r>
@@ -8822,17 +8920,17 @@
               <a:buNone/>
             </a:pPr>
             <a:r>
-              <a:rPr lang="en-US" sz="1500" dirty="0">
-                <a:solidFill>
-                  <a:srgbClr val="1F2A30"/>
-                </a:solidFill>
-                <a:latin typeface="Calibri" pitchFamily="34" charset="0"/>
-                <a:ea typeface="Calibri" pitchFamily="34" charset="-122"/>
-                <a:cs typeface="Calibri" pitchFamily="34" charset="-120"/>
+              <a:rPr lang="en-US" sz="1250" dirty="0">
+                <a:solidFill>
+                  <a:srgbClr val="1D1D1B"/>
+                </a:solidFill>
+                <a:latin typeface="Lucida Sans" pitchFamily="34" charset="0"/>
+                <a:ea typeface="Lucida Sans" pitchFamily="34" charset="-122"/>
+                <a:cs typeface="Lucida Sans" pitchFamily="34" charset="-120"/>
               </a:rPr>
               <a:t>Pflicht + Wahl, gestufte Hilfen</a:t>
             </a:r>
-            <a:endParaRPr lang="en-US" sz="1500" dirty="0"/>
+            <a:endParaRPr lang="en-US" sz="1250" dirty="0"/>
           </a:p>
         </p:txBody>
       </p:sp>
@@ -8851,11 +8949,11 @@
             <a:avLst/>
           </a:prstGeom>
           <a:solidFill>
-            <a:srgbClr val="0B6E69"/>
+            <a:srgbClr val="7A003F"/>
           </a:solidFill>
           <a:ln w="12700">
             <a:solidFill>
-              <a:srgbClr val="0B6E69"/>
+              <a:srgbClr val="7A003F"/>
             </a:solidFill>
             <a:prstDash val="solid"/>
           </a:ln>
@@ -8890,9 +8988,9 @@
                 <a:solidFill>
                   <a:srgbClr val="FFFFFF"/>
                 </a:solidFill>
-                <a:latin typeface="Calibri" pitchFamily="34" charset="0"/>
-                <a:ea typeface="Calibri" pitchFamily="34" charset="-122"/>
-                <a:cs typeface="Calibri" pitchFamily="34" charset="-120"/>
+                <a:latin typeface="Lucida Sans" pitchFamily="34" charset="0"/>
+                <a:ea typeface="Lucida Sans" pitchFamily="34" charset="-122"/>
+                <a:cs typeface="Lucida Sans" pitchFamily="34" charset="-120"/>
               </a:rPr>
               <a:t>5</a:t>
             </a:r>
@@ -8927,11 +9025,11 @@
             <a:r>
               <a:rPr lang="en-US" sz="1400" b="1" dirty="0">
                 <a:solidFill>
-                  <a:srgbClr val="0B6E69"/>
-                </a:solidFill>
-                <a:latin typeface="Calibri" pitchFamily="34" charset="0"/>
-                <a:ea typeface="Calibri" pitchFamily="34" charset="-122"/>
-                <a:cs typeface="Calibri" pitchFamily="34" charset="-120"/>
+                  <a:srgbClr val="7A003F"/>
+                </a:solidFill>
+                <a:latin typeface="Lucida Sans" pitchFamily="34" charset="0"/>
+                <a:ea typeface="Lucida Sans" pitchFamily="34" charset="-122"/>
+                <a:cs typeface="Lucida Sans" pitchFamily="34" charset="-120"/>
               </a:rPr>
               <a:t>63–75</a:t>
             </a:r>
@@ -8956,11 +9054,11 @@
             </a:avLst>
           </a:prstGeom>
           <a:solidFill>
-            <a:srgbClr val="E6F2F1"/>
+            <a:srgbClr val="F2F2F2"/>
           </a:solidFill>
           <a:ln w="12700">
             <a:solidFill>
-              <a:srgbClr val="E6F2F1"/>
+              <a:srgbClr val="F2F2F2"/>
             </a:solidFill>
             <a:prstDash val="solid"/>
           </a:ln>
@@ -8993,11 +9091,11 @@
             <a:r>
               <a:rPr lang="en-US" sz="1600" b="1" dirty="0">
                 <a:solidFill>
-                  <a:srgbClr val="0B3C49"/>
-                </a:solidFill>
-                <a:latin typeface="Calibri" pitchFamily="34" charset="0"/>
-                <a:ea typeface="Calibri" pitchFamily="34" charset="-122"/>
-                <a:cs typeface="Calibri" pitchFamily="34" charset="-120"/>
+                  <a:srgbClr val="7A003F"/>
+                </a:solidFill>
+                <a:latin typeface="Lucida Sans" pitchFamily="34" charset="0"/>
+                <a:ea typeface="Lucida Sans" pitchFamily="34" charset="-122"/>
+                <a:cs typeface="Lucida Sans" pitchFamily="34" charset="-120"/>
               </a:rPr>
               <a:t>Mini-Teach</a:t>
             </a:r>
@@ -9030,17 +9128,17 @@
               <a:buNone/>
             </a:pPr>
             <a:r>
-              <a:rPr lang="en-US" sz="1500" dirty="0">
-                <a:solidFill>
-                  <a:srgbClr val="1F2A30"/>
-                </a:solidFill>
-                <a:latin typeface="Calibri" pitchFamily="34" charset="0"/>
-                <a:ea typeface="Calibri" pitchFamily="34" charset="-122"/>
-                <a:cs typeface="Calibri" pitchFamily="34" charset="-120"/>
+              <a:rPr lang="en-US" sz="1250" dirty="0">
+                <a:solidFill>
+                  <a:srgbClr val="1D1D1B"/>
+                </a:solidFill>
+                <a:latin typeface="Lucida Sans" pitchFamily="34" charset="0"/>
+                <a:ea typeface="Lucida Sans" pitchFamily="34" charset="-122"/>
+                <a:cs typeface="Lucida Sans" pitchFamily="34" charset="-120"/>
               </a:rPr>
               <a:t>Expert:innen-Stationen mit Leitkarte</a:t>
             </a:r>
-            <a:endParaRPr lang="en-US" sz="1500" dirty="0"/>
+            <a:endParaRPr lang="en-US" sz="1250" dirty="0"/>
           </a:p>
         </p:txBody>
       </p:sp>
@@ -9059,11 +9157,11 @@
             <a:avLst/>
           </a:prstGeom>
           <a:solidFill>
-            <a:srgbClr val="0B6E69"/>
+            <a:srgbClr val="7A003F"/>
           </a:solidFill>
           <a:ln w="12700">
             <a:solidFill>
-              <a:srgbClr val="0B6E69"/>
+              <a:srgbClr val="7A003F"/>
             </a:solidFill>
             <a:prstDash val="solid"/>
           </a:ln>
@@ -9098,9 +9196,9 @@
                 <a:solidFill>
                   <a:srgbClr val="FFFFFF"/>
                 </a:solidFill>
-                <a:latin typeface="Calibri" pitchFamily="34" charset="0"/>
-                <a:ea typeface="Calibri" pitchFamily="34" charset="-122"/>
-                <a:cs typeface="Calibri" pitchFamily="34" charset="-120"/>
+                <a:latin typeface="Lucida Sans" pitchFamily="34" charset="0"/>
+                <a:ea typeface="Lucida Sans" pitchFamily="34" charset="-122"/>
+                <a:cs typeface="Lucida Sans" pitchFamily="34" charset="-120"/>
               </a:rPr>
               <a:t>6</a:t>
             </a:r>
@@ -9135,11 +9233,11 @@
             <a:r>
               <a:rPr lang="en-US" sz="1400" b="1" dirty="0">
                 <a:solidFill>
-                  <a:srgbClr val="0B6E69"/>
-                </a:solidFill>
-                <a:latin typeface="Calibri" pitchFamily="34" charset="0"/>
-                <a:ea typeface="Calibri" pitchFamily="34" charset="-122"/>
-                <a:cs typeface="Calibri" pitchFamily="34" charset="-120"/>
+                  <a:srgbClr val="7A003F"/>
+                </a:solidFill>
+                <a:latin typeface="Lucida Sans" pitchFamily="34" charset="0"/>
+                <a:ea typeface="Lucida Sans" pitchFamily="34" charset="-122"/>
+                <a:cs typeface="Lucida Sans" pitchFamily="34" charset="-120"/>
               </a:rPr>
               <a:t>75–90</a:t>
             </a:r>
@@ -9164,11 +9262,11 @@
             </a:avLst>
           </a:prstGeom>
           <a:solidFill>
-            <a:srgbClr val="E6F2F1"/>
+            <a:srgbClr val="F2F2F2"/>
           </a:solidFill>
           <a:ln w="12700">
             <a:solidFill>
-              <a:srgbClr val="E6F2F1"/>
+              <a:srgbClr val="F2F2F2"/>
             </a:solidFill>
             <a:prstDash val="solid"/>
           </a:ln>
@@ -9201,11 +9299,11 @@
             <a:r>
               <a:rPr lang="en-US" sz="1600" b="1" dirty="0">
                 <a:solidFill>
-                  <a:srgbClr val="0B3C49"/>
-                </a:solidFill>
-                <a:latin typeface="Calibri" pitchFamily="34" charset="0"/>
-                <a:ea typeface="Calibri" pitchFamily="34" charset="-122"/>
-                <a:cs typeface="Calibri" pitchFamily="34" charset="-120"/>
+                  <a:srgbClr val="7A003F"/>
+                </a:solidFill>
+                <a:latin typeface="Lucida Sans" pitchFamily="34" charset="0"/>
+                <a:ea typeface="Lucida Sans" pitchFamily="34" charset="-122"/>
+                <a:cs typeface="Lucida Sans" pitchFamily="34" charset="-120"/>
               </a:rPr>
               <a:t>Sicherung, Ausblick</a:t>
             </a:r>
@@ -9238,17 +9336,17 @@
               <a:buNone/>
             </a:pPr>
             <a:r>
-              <a:rPr lang="en-US" sz="1500" dirty="0">
-                <a:solidFill>
-                  <a:srgbClr val="1F2A30"/>
-                </a:solidFill>
-                <a:latin typeface="Calibri" pitchFamily="34" charset="0"/>
-                <a:ea typeface="Calibri" pitchFamily="34" charset="-122"/>
-                <a:cs typeface="Calibri" pitchFamily="34" charset="-120"/>
+              <a:rPr lang="en-US" sz="1250" dirty="0">
+                <a:solidFill>
+                  <a:srgbClr val="1D1D1B"/>
+                </a:solidFill>
+                <a:latin typeface="Lucida Sans" pitchFamily="34" charset="0"/>
+                <a:ea typeface="Lucida Sans" pitchFamily="34" charset="-122"/>
+                <a:cs typeface="Lucida Sans" pitchFamily="34" charset="-120"/>
               </a:rPr>
               <a:t>Modell und Wirklichkeit, Fachbezug, Sitzung 3</a:t>
             </a:r>
-            <a:endParaRPr lang="en-US" sz="1500" dirty="0"/>
+            <a:endParaRPr lang="en-US" sz="1250" dirty="0"/>
           </a:p>
         </p:txBody>
       </p:sp>
@@ -9282,11 +9380,11 @@
             <a:lvl1pPr>
               <a:defRPr sz="1000">
                 <a:solidFill>
-                  <a:srgbClr val="5B6B73"/>
-                </a:solidFill>
-                <a:latin typeface="Calibri"/>
-                <a:ea typeface="Calibri"/>
-                <a:cs typeface="Calibri"/>
+                  <a:srgbClr val="706F6F"/>
+                </a:solidFill>
+                <a:latin typeface="Lucida Sans"/>
+                <a:ea typeface="Lucida Sans"/>
+                <a:cs typeface="Lucida Sans"/>
               </a:defRPr>
             </a:lvl1pPr>
           </a:lstStyle>
@@ -9330,13 +9428,13 @@
           <p:cNvPr id="2" name="Text 1"/>
           <p:cNvSpPr/>
           <p:nvPr>
-            <p:ph idx="101" type="title" hasCustomPrompt="1"/>
+            <p:ph idx="102" type="title" hasCustomPrompt="1"/>
           </p:nvPr>
         </p:nvSpPr>
         <p:spPr>
           <a:xfrm>
-            <a:off x="548640" y="320040"/>
-            <a:ext cx="11094415" cy="777240"/>
+            <a:off x="548640" y="274320"/>
+            <a:ext cx="8351215" cy="896112"/>
           </a:xfrm>
           <a:prstGeom prst="rect">
             <a:avLst/>
@@ -9348,21 +9446,21 @@
           <a:bodyPr wrap="square" lIns="0" tIns="0" rIns="0" bIns="0" rtlCol="0" anchor="ctr"/>
           <a:lstStyle/>
           <a:p>
-            <a:pPr indent="0" marL="0">
-              <a:buNone/>
-            </a:pPr>
-            <a:r>
-              <a:rPr lang="en-US" sz="3200" b="1" dirty="0">
-                <a:solidFill>
-                  <a:srgbClr val="0B3C49"/>
-                </a:solidFill>
-                <a:latin typeface="Cambria" pitchFamily="34" charset="0"/>
-                <a:ea typeface="Cambria" pitchFamily="34" charset="-122"/>
-                <a:cs typeface="Cambria" pitchFamily="34" charset="-120"/>
+            <a:pPr algn="l" indent="0" marL="0">
+              <a:buNone/>
+            </a:pPr>
+            <a:r>
+              <a:rPr lang="en-US" sz="2600" b="1" dirty="0">
+                <a:solidFill>
+                  <a:srgbClr val="7A003F"/>
+                </a:solidFill>
+                <a:latin typeface="Lucida Sans" pitchFamily="34" charset="0"/>
+                <a:ea typeface="Lucida Sans" pitchFamily="34" charset="-122"/>
+                <a:cs typeface="Lucida Sans" pitchFamily="34" charset="-120"/>
               </a:rPr>
               <a:t>Welcher Lernpfad passt zu Ihnen?</a:t>
             </a:r>
-            <a:endParaRPr lang="en-US" sz="3200" dirty="0"/>
+            <a:endParaRPr lang="en-US" sz="2600" dirty="0"/>
           </a:p>
         </p:txBody>
       </p:sp>
@@ -9393,11 +9491,11 @@
             <a:r>
               <a:rPr lang="en-US" sz="1700" dirty="0">
                 <a:solidFill>
-                  <a:srgbClr val="5B6B73"/>
-                </a:solidFill>
-                <a:latin typeface="Calibri" pitchFamily="34" charset="0"/>
-                <a:ea typeface="Calibri" pitchFamily="34" charset="-122"/>
-                <a:cs typeface="Calibri" pitchFamily="34" charset="-120"/>
+                  <a:srgbClr val="706F6F"/>
+                </a:solidFill>
+                <a:latin typeface="Lucida Sans" pitchFamily="34" charset="0"/>
+                <a:ea typeface="Lucida Sans" pitchFamily="34" charset="-122"/>
+                <a:cs typeface="Lucida Sans" pitchFamily="34" charset="-120"/>
               </a:rPr>
               <a:t>Drei Ja/Nein-Fragen im Arbeitsheft: Blocksprache schon genutzt? Bedingung erklärbar? Textbasiert programmiert?</a:t>
             </a:r>
@@ -9422,11 +9520,11 @@
             </a:avLst>
           </a:prstGeom>
           <a:solidFill>
-            <a:srgbClr val="E6F2F1"/>
+            <a:srgbClr val="F2F2F2"/>
           </a:solidFill>
           <a:ln w="12700">
             <a:solidFill>
-              <a:srgbClr val="E6F2F1"/>
+              <a:srgbClr val="F2F2F2"/>
             </a:solidFill>
             <a:prstDash val="solid"/>
           </a:ln>
@@ -9447,11 +9545,11 @@
             <a:avLst/>
           </a:prstGeom>
           <a:solidFill>
-            <a:srgbClr val="0B6E69"/>
+            <a:srgbClr val="7A003F"/>
           </a:solidFill>
           <a:ln w="12700">
             <a:solidFill>
-              <a:srgbClr val="0B6E69"/>
+              <a:srgbClr val="7A003F"/>
             </a:solidFill>
             <a:prstDash val="solid"/>
           </a:ln>
@@ -9486,9 +9584,9 @@
                 <a:solidFill>
                   <a:srgbClr val="FFFFFF"/>
                 </a:solidFill>
-                <a:latin typeface="Calibri" pitchFamily="34" charset="0"/>
-                <a:ea typeface="Calibri" pitchFamily="34" charset="-122"/>
-                <a:cs typeface="Calibri" pitchFamily="34" charset="-120"/>
+                <a:latin typeface="Lucida Sans" pitchFamily="34" charset="0"/>
+                <a:ea typeface="Lucida Sans" pitchFamily="34" charset="-122"/>
+                <a:cs typeface="Lucida Sans" pitchFamily="34" charset="-120"/>
               </a:rPr>
               <a:t>A</a:t>
             </a:r>
@@ -9523,11 +9621,11 @@
             <a:r>
               <a:rPr lang="en-US" sz="1800" b="1" dirty="0">
                 <a:solidFill>
-                  <a:srgbClr val="0B3C49"/>
-                </a:solidFill>
-                <a:latin typeface="Calibri" pitchFamily="34" charset="0"/>
-                <a:ea typeface="Calibri" pitchFamily="34" charset="-122"/>
-                <a:cs typeface="Calibri" pitchFamily="34" charset="-120"/>
+                  <a:srgbClr val="7A003F"/>
+                </a:solidFill>
+                <a:latin typeface="Lucida Sans" pitchFamily="34" charset="0"/>
+                <a:ea typeface="Lucida Sans" pitchFamily="34" charset="-122"/>
+                <a:cs typeface="Lucida Sans" pitchFamily="34" charset="-120"/>
               </a:rPr>
               <a:t>Einstieg (0–1 × ja)</a:t>
             </a:r>
@@ -9566,11 +9664,11 @@
             <a:r>
               <a:rPr lang="en-US" sz="1700" dirty="0">
                 <a:solidFill>
-                  <a:srgbClr val="1F2A30"/>
-                </a:solidFill>
-                <a:latin typeface="Calibri" pitchFamily="34" charset="0"/>
-                <a:ea typeface="Calibri" pitchFamily="34" charset="-122"/>
-                <a:cs typeface="Calibri" pitchFamily="34" charset="-120"/>
+                  <a:srgbClr val="1D1D1B"/>
+                </a:solidFill>
+                <a:latin typeface="Lucida Sans" pitchFamily="34" charset="0"/>
+                <a:ea typeface="Lucida Sans" pitchFamily="34" charset="-122"/>
+                <a:cs typeface="Lucida Sans" pitchFamily="34" charset="-120"/>
               </a:rPr>
               <a:t>Pflicht: A1 Strecke messen</a:t>
             </a:r>
@@ -9587,11 +9685,11 @@
             <a:r>
               <a:rPr lang="en-US" sz="1700" dirty="0">
                 <a:solidFill>
-                  <a:srgbClr val="1F2A30"/>
-                </a:solidFill>
-                <a:latin typeface="Calibri" pitchFamily="34" charset="0"/>
-                <a:ea typeface="Calibri" pitchFamily="34" charset="-122"/>
-                <a:cs typeface="Calibri" pitchFamily="34" charset="-120"/>
+                  <a:srgbClr val="1D1D1B"/>
+                </a:solidFill>
+                <a:latin typeface="Lucida Sans" pitchFamily="34" charset="0"/>
+                <a:ea typeface="Lucida Sans" pitchFamily="34" charset="-122"/>
+                <a:cs typeface="Lucida Sans" pitchFamily="34" charset="-120"/>
               </a:rPr>
               <a:t>Wahl: A2 Vielecke oder A3 Hell-Dunkel-Licht</a:t>
             </a:r>
@@ -9616,11 +9714,11 @@
             </a:avLst>
           </a:prstGeom>
           <a:solidFill>
-            <a:srgbClr val="E6F2F1"/>
+            <a:srgbClr val="F2F2F2"/>
           </a:solidFill>
           <a:ln w="12700">
             <a:solidFill>
-              <a:srgbClr val="E6F2F1"/>
+              <a:srgbClr val="F2F2F2"/>
             </a:solidFill>
             <a:prstDash val="solid"/>
           </a:ln>
@@ -9641,11 +9739,11 @@
             <a:avLst/>
           </a:prstGeom>
           <a:solidFill>
-            <a:srgbClr val="0B6E69"/>
+            <a:srgbClr val="7A003F"/>
           </a:solidFill>
           <a:ln w="12700">
             <a:solidFill>
-              <a:srgbClr val="0B6E69"/>
+              <a:srgbClr val="7A003F"/>
             </a:solidFill>
             <a:prstDash val="solid"/>
           </a:ln>
@@ -9680,9 +9778,9 @@
                 <a:solidFill>
                   <a:srgbClr val="FFFFFF"/>
                 </a:solidFill>
-                <a:latin typeface="Calibri" pitchFamily="34" charset="0"/>
-                <a:ea typeface="Calibri" pitchFamily="34" charset="-122"/>
-                <a:cs typeface="Calibri" pitchFamily="34" charset="-120"/>
+                <a:latin typeface="Lucida Sans" pitchFamily="34" charset="0"/>
+                <a:ea typeface="Lucida Sans" pitchFamily="34" charset="-122"/>
+                <a:cs typeface="Lucida Sans" pitchFamily="34" charset="-120"/>
               </a:rPr>
               <a:t>B</a:t>
             </a:r>
@@ -9717,11 +9815,11 @@
             <a:r>
               <a:rPr lang="en-US" sz="1800" b="1" dirty="0">
                 <a:solidFill>
-                  <a:srgbClr val="0B3C49"/>
-                </a:solidFill>
-                <a:latin typeface="Calibri" pitchFamily="34" charset="0"/>
-                <a:ea typeface="Calibri" pitchFamily="34" charset="-122"/>
-                <a:cs typeface="Calibri" pitchFamily="34" charset="-120"/>
+                  <a:srgbClr val="7A003F"/>
+                </a:solidFill>
+                <a:latin typeface="Lucida Sans" pitchFamily="34" charset="0"/>
+                <a:ea typeface="Lucida Sans" pitchFamily="34" charset="-122"/>
+                <a:cs typeface="Lucida Sans" pitchFamily="34" charset="-120"/>
               </a:rPr>
               <a:t>Sensoren (2 × ja)</a:t>
             </a:r>
@@ -9760,11 +9858,11 @@
             <a:r>
               <a:rPr lang="en-US" sz="1700" dirty="0">
                 <a:solidFill>
-                  <a:srgbClr val="1F2A30"/>
-                </a:solidFill>
-                <a:latin typeface="Calibri" pitchFamily="34" charset="0"/>
-                <a:ea typeface="Calibri" pitchFamily="34" charset="-122"/>
-                <a:cs typeface="Calibri" pitchFamily="34" charset="-120"/>
+                  <a:srgbClr val="1D1D1B"/>
+                </a:solidFill>
+                <a:latin typeface="Lucida Sans" pitchFamily="34" charset="0"/>
+                <a:ea typeface="Lucida Sans" pitchFamily="34" charset="-122"/>
+                <a:cs typeface="Lucida Sans" pitchFamily="34" charset="-120"/>
               </a:rPr>
               <a:t>Pflicht: B1 Hindernis</a:t>
             </a:r>
@@ -9781,11 +9879,11 @@
             <a:r>
               <a:rPr lang="en-US" sz="1700" dirty="0">
                 <a:solidFill>
-                  <a:srgbClr val="1F2A30"/>
-                </a:solidFill>
-                <a:latin typeface="Calibri" pitchFamily="34" charset="0"/>
-                <a:ea typeface="Calibri" pitchFamily="34" charset="-122"/>
-                <a:cs typeface="Calibri" pitchFamily="34" charset="-120"/>
+                  <a:srgbClr val="1D1D1B"/>
+                </a:solidFill>
+                <a:latin typeface="Lucida Sans" pitchFamily="34" charset="0"/>
+                <a:ea typeface="Lucida Sans" pitchFamily="34" charset="-122"/>
+                <a:cs typeface="Lucida Sans" pitchFamily="34" charset="-120"/>
               </a:rPr>
               <a:t>Wahl: B2 Linienfolger oder B3 Zufall</a:t>
             </a:r>
@@ -9810,11 +9908,11 @@
             </a:avLst>
           </a:prstGeom>
           <a:solidFill>
-            <a:srgbClr val="E6F2F1"/>
+            <a:srgbClr val="F2F2F2"/>
           </a:solidFill>
           <a:ln w="12700">
             <a:solidFill>
-              <a:srgbClr val="E6F2F1"/>
+              <a:srgbClr val="F2F2F2"/>
             </a:solidFill>
             <a:prstDash val="solid"/>
           </a:ln>
@@ -9835,11 +9933,11 @@
             <a:avLst/>
           </a:prstGeom>
           <a:solidFill>
-            <a:srgbClr val="E8772E"/>
+            <a:srgbClr val="EF7D00"/>
           </a:solidFill>
           <a:ln w="12700">
             <a:solidFill>
-              <a:srgbClr val="E8772E"/>
+              <a:srgbClr val="EF7D00"/>
             </a:solidFill>
             <a:prstDash val="solid"/>
           </a:ln>
@@ -9872,11 +9970,11 @@
             <a:r>
               <a:rPr lang="en-US" sz="1600" b="1" dirty="0">
                 <a:solidFill>
-                  <a:srgbClr val="FFFFFF"/>
-                </a:solidFill>
-                <a:latin typeface="Calibri" pitchFamily="34" charset="0"/>
-                <a:ea typeface="Calibri" pitchFamily="34" charset="-122"/>
-                <a:cs typeface="Calibri" pitchFamily="34" charset="-120"/>
+                  <a:srgbClr val="1D1D1B"/>
+                </a:solidFill>
+                <a:latin typeface="Lucida Sans" pitchFamily="34" charset="0"/>
+                <a:ea typeface="Lucida Sans" pitchFamily="34" charset="-122"/>
+                <a:cs typeface="Lucida Sans" pitchFamily="34" charset="-120"/>
               </a:rPr>
               <a:t>C</a:t>
             </a:r>
@@ -9911,11 +10009,11 @@
             <a:r>
               <a:rPr lang="en-US" sz="1800" b="1" dirty="0">
                 <a:solidFill>
-                  <a:srgbClr val="0B3C49"/>
-                </a:solidFill>
-                <a:latin typeface="Calibri" pitchFamily="34" charset="0"/>
-                <a:ea typeface="Calibri" pitchFamily="34" charset="-122"/>
-                <a:cs typeface="Calibri" pitchFamily="34" charset="-120"/>
+                  <a:srgbClr val="7A003F"/>
+                </a:solidFill>
+                <a:latin typeface="Lucida Sans" pitchFamily="34" charset="0"/>
+                <a:ea typeface="Lucida Sans" pitchFamily="34" charset="-122"/>
+                <a:cs typeface="Lucida Sans" pitchFamily="34" charset="-120"/>
               </a:rPr>
               <a:t>Vertiefung (3 × ja)</a:t>
             </a:r>
@@ -9954,11 +10052,11 @@
             <a:r>
               <a:rPr lang="en-US" sz="1700" dirty="0">
                 <a:solidFill>
-                  <a:srgbClr val="1F2A30"/>
-                </a:solidFill>
-                <a:latin typeface="Calibri" pitchFamily="34" charset="0"/>
-                <a:ea typeface="Calibri" pitchFamily="34" charset="-122"/>
-                <a:cs typeface="Calibri" pitchFamily="34" charset="-120"/>
+                  <a:srgbClr val="1D1D1B"/>
+                </a:solidFill>
+                <a:latin typeface="Lucida Sans" pitchFamily="34" charset="0"/>
+                <a:ea typeface="Lucida Sans" pitchFamily="34" charset="-122"/>
+                <a:cs typeface="Lucida Sans" pitchFamily="34" charset="-120"/>
               </a:rPr>
               <a:t>Pflicht: C1 Linienfolger als Regler</a:t>
             </a:r>
@@ -9975,11 +10073,11 @@
             <a:r>
               <a:rPr lang="en-US" sz="1700" dirty="0">
                 <a:solidFill>
-                  <a:srgbClr val="1F2A30"/>
-                </a:solidFill>
-                <a:latin typeface="Calibri" pitchFamily="34" charset="0"/>
-                <a:ea typeface="Calibri" pitchFamily="34" charset="-122"/>
-                <a:cs typeface="Calibri" pitchFamily="34" charset="-120"/>
+                  <a:srgbClr val="1D1D1B"/>
+                </a:solidFill>
+                <a:latin typeface="Lucida Sans" pitchFamily="34" charset="0"/>
+                <a:ea typeface="Lucida Sans" pitchFamily="34" charset="-122"/>
+                <a:cs typeface="Lucida Sans" pitchFamily="34" charset="-120"/>
               </a:rPr>
               <a:t>Wahl: C2 Verhaltensmodell oder C3 Unterrichtsaufgabe</a:t>
             </a:r>
@@ -10004,11 +10102,11 @@
             </a:avLst>
           </a:prstGeom>
           <a:solidFill>
-            <a:srgbClr val="FCEBDD"/>
+            <a:srgbClr val="FDF0E3"/>
           </a:solidFill>
           <a:ln w="12700">
             <a:solidFill>
-              <a:srgbClr val="FCEBDD"/>
+              <a:srgbClr val="FDF0E3"/>
             </a:solidFill>
             <a:prstDash val="solid"/>
           </a:ln>
@@ -10029,11 +10127,11 @@
             <a:avLst/>
           </a:prstGeom>
           <a:solidFill>
-            <a:srgbClr val="E8772E"/>
+            <a:srgbClr val="EF7D00"/>
           </a:solidFill>
           <a:ln w="12700">
             <a:solidFill>
-              <a:srgbClr val="E8772E"/>
+              <a:srgbClr val="EF7D00"/>
             </a:solidFill>
             <a:prstDash val="solid"/>
           </a:ln>
@@ -10066,11 +10164,11 @@
             <a:r>
               <a:rPr lang="en-US" sz="2000" b="1" dirty="0">
                 <a:solidFill>
-                  <a:srgbClr val="FFFFFF"/>
-                </a:solidFill>
-                <a:latin typeface="Calibri" pitchFamily="34" charset="0"/>
-                <a:ea typeface="Calibri" pitchFamily="34" charset="-122"/>
-                <a:cs typeface="Calibri" pitchFamily="34" charset="-120"/>
+                  <a:srgbClr val="1D1D1B"/>
+                </a:solidFill>
+                <a:latin typeface="Lucida Sans" pitchFamily="34" charset="0"/>
+                <a:ea typeface="Lucida Sans" pitchFamily="34" charset="-122"/>
+                <a:cs typeface="Lucida Sans" pitchFamily="34" charset="-120"/>
               </a:rPr>
               <a:t>!</a:t>
             </a:r>
@@ -10105,11 +10203,11 @@
             <a:r>
               <a:rPr lang="en-US" sz="1500" dirty="0">
                 <a:solidFill>
-                  <a:srgbClr val="0B3C49"/>
-                </a:solidFill>
-                <a:latin typeface="Calibri" pitchFamily="34" charset="0"/>
-                <a:ea typeface="Calibri" pitchFamily="34" charset="-122"/>
-                <a:cs typeface="Calibri" pitchFamily="34" charset="-120"/>
+                  <a:srgbClr val="7A003F"/>
+                </a:solidFill>
+                <a:latin typeface="Lucida Sans" pitchFamily="34" charset="0"/>
+                <a:ea typeface="Lucida Sans" pitchFamily="34" charset="-122"/>
+                <a:cs typeface="Lucida Sans" pitchFamily="34" charset="-120"/>
               </a:rPr>
               <a:t>Empfehlung + Wechselrecht: Sie dürfen jederzeit wechseln – nach oben wie nach unten.</a:t>
             </a:r>
@@ -10147,11 +10245,11 @@
             <a:lvl1pPr>
               <a:defRPr sz="1000">
                 <a:solidFill>
-                  <a:srgbClr val="5B6B73"/>
-                </a:solidFill>
-                <a:latin typeface="Calibri"/>
-                <a:ea typeface="Calibri"/>
-                <a:cs typeface="Calibri"/>
+                  <a:srgbClr val="706F6F"/>
+                </a:solidFill>
+                <a:latin typeface="Lucida Sans"/>
+                <a:ea typeface="Lucida Sans"/>
+                <a:cs typeface="Lucida Sans"/>
               </a:defRPr>
             </a:lvl1pPr>
           </a:lstStyle>
@@ -10195,13 +10293,13 @@
           <p:cNvPr id="2" name="Text 1"/>
           <p:cNvSpPr/>
           <p:nvPr>
-            <p:ph idx="101" type="title" hasCustomPrompt="1"/>
+            <p:ph idx="102" type="title" hasCustomPrompt="1"/>
           </p:nvPr>
         </p:nvSpPr>
         <p:spPr>
           <a:xfrm>
-            <a:off x="548640" y="320040"/>
-            <a:ext cx="11094415" cy="777240"/>
+            <a:off x="548640" y="274320"/>
+            <a:ext cx="8351215" cy="896112"/>
           </a:xfrm>
           <a:prstGeom prst="rect">
             <a:avLst/>
@@ -10213,21 +10311,21 @@
           <a:bodyPr wrap="square" lIns="0" tIns="0" rIns="0" bIns="0" rtlCol="0" anchor="ctr"/>
           <a:lstStyle/>
           <a:p>
-            <a:pPr indent="0" marL="0">
-              <a:buNone/>
-            </a:pPr>
-            <a:r>
-              <a:rPr lang="en-US" sz="3200" b="1" dirty="0">
-                <a:solidFill>
-                  <a:srgbClr val="0B3C49"/>
-                </a:solidFill>
-                <a:latin typeface="Cambria" pitchFamily="34" charset="0"/>
-                <a:ea typeface="Cambria" pitchFamily="34" charset="-122"/>
-                <a:cs typeface="Cambria" pitchFamily="34" charset="-120"/>
+            <a:pPr algn="l" indent="0" marL="0">
+              <a:buNone/>
+            </a:pPr>
+            <a:r>
+              <a:rPr lang="en-US" sz="2600" b="1" dirty="0">
+                <a:solidFill>
+                  <a:srgbClr val="7A003F"/>
+                </a:solidFill>
+                <a:latin typeface="Lucida Sans" pitchFamily="34" charset="0"/>
+                <a:ea typeface="Lucida Sans" pitchFamily="34" charset="-122"/>
+                <a:cs typeface="Lucida Sans" pitchFamily="34" charset="-120"/>
               </a:rPr>
               <a:t>Mensch-Roboter: Programmieren ohne Computer</a:t>
             </a:r>
-            <a:endParaRPr lang="en-US" sz="3200" dirty="0"/>
+            <a:endParaRPr lang="en-US" sz="2600" dirty="0"/>
           </a:p>
         </p:txBody>
       </p:sp>
@@ -10258,11 +10356,11 @@
             <a:r>
               <a:rPr lang="en-US" sz="1700" dirty="0">
                 <a:solidFill>
-                  <a:srgbClr val="5B6B73"/>
-                </a:solidFill>
-                <a:latin typeface="Calibri" pitchFamily="34" charset="0"/>
-                <a:ea typeface="Calibri" pitchFamily="34" charset="-122"/>
-                <a:cs typeface="Calibri" pitchFamily="34" charset="-120"/>
+                  <a:srgbClr val="706F6F"/>
+                </a:solidFill>
+                <a:latin typeface="Lucida Sans" pitchFamily="34" charset="0"/>
+                <a:ea typeface="Lucida Sans" pitchFamily="34" charset="-122"/>
+                <a:cs typeface="Lucida Sans" pitchFamily="34" charset="-120"/>
               </a:rPr>
               <a:t>Eine Person ist Roboter, die andere programmiert mit Befehlskarten. Auftrag: einmal um einen Stuhl herum.</a:t>
             </a:r>
@@ -10287,11 +10385,11 @@
             </a:avLst>
           </a:prstGeom>
           <a:solidFill>
-            <a:srgbClr val="E6F2F1"/>
+            <a:srgbClr val="F2F2F2"/>
           </a:solidFill>
           <a:ln w="12700">
             <a:solidFill>
-              <a:srgbClr val="E6F2F1"/>
+              <a:srgbClr val="F2F2F2"/>
             </a:solidFill>
             <a:prstDash val="solid"/>
           </a:ln>
@@ -10312,11 +10410,11 @@
             <a:avLst/>
           </a:prstGeom>
           <a:solidFill>
-            <a:srgbClr val="0B6E69"/>
+            <a:srgbClr val="7A003F"/>
           </a:solidFill>
           <a:ln w="12700">
             <a:solidFill>
-              <a:srgbClr val="0B6E69"/>
+              <a:srgbClr val="7A003F"/>
             </a:solidFill>
             <a:prstDash val="solid"/>
           </a:ln>
@@ -10351,9 +10449,9 @@
                 <a:solidFill>
                   <a:srgbClr val="FFFFFF"/>
                 </a:solidFill>
-                <a:latin typeface="Calibri" pitchFamily="34" charset="0"/>
-                <a:ea typeface="Calibri" pitchFamily="34" charset="-122"/>
-                <a:cs typeface="Calibri" pitchFamily="34" charset="-120"/>
+                <a:latin typeface="Lucida Sans" pitchFamily="34" charset="0"/>
+                <a:ea typeface="Lucida Sans" pitchFamily="34" charset="-122"/>
+                <a:cs typeface="Lucida Sans" pitchFamily="34" charset="-120"/>
               </a:rPr>
               <a:t>1</a:t>
             </a:r>
@@ -10388,11 +10486,11 @@
             <a:r>
               <a:rPr lang="en-US" sz="1800" b="1" dirty="0">
                 <a:solidFill>
-                  <a:srgbClr val="0B3C49"/>
-                </a:solidFill>
-                <a:latin typeface="Calibri" pitchFamily="34" charset="0"/>
-                <a:ea typeface="Calibri" pitchFamily="34" charset="-122"/>
-                <a:cs typeface="Calibri" pitchFamily="34" charset="-120"/>
+                  <a:srgbClr val="7A003F"/>
+                </a:solidFill>
+                <a:latin typeface="Lucida Sans" pitchFamily="34" charset="0"/>
+                <a:ea typeface="Lucida Sans" pitchFamily="34" charset="-122"/>
+                <a:cs typeface="Lucida Sans" pitchFamily="34" charset="-120"/>
               </a:rPr>
               <a:t>Runde 1</a:t>
             </a:r>
@@ -10431,11 +10529,11 @@
             <a:r>
               <a:rPr lang="en-US" sz="1700" dirty="0">
                 <a:solidFill>
-                  <a:srgbClr val="1F2A30"/>
-                </a:solidFill>
-                <a:latin typeface="Calibri" pitchFamily="34" charset="0"/>
-                <a:ea typeface="Calibri" pitchFamily="34" charset="-122"/>
-                <a:cs typeface="Calibri" pitchFamily="34" charset="-120"/>
+                  <a:srgbClr val="1D1D1B"/>
+                </a:solidFill>
+                <a:latin typeface="Lucida Sans" pitchFamily="34" charset="0"/>
+                <a:ea typeface="Lucida Sans" pitchFamily="34" charset="-122"/>
+                <a:cs typeface="Lucida Sans" pitchFamily="34" charset="-120"/>
               </a:rPr>
               <a:t>Gehe n Schritte</a:t>
             </a:r>
@@ -10452,11 +10550,11 @@
             <a:r>
               <a:rPr lang="en-US" sz="1700" dirty="0">
                 <a:solidFill>
-                  <a:srgbClr val="1F2A30"/>
-                </a:solidFill>
-                <a:latin typeface="Calibri" pitchFamily="34" charset="0"/>
-                <a:ea typeface="Calibri" pitchFamily="34" charset="-122"/>
-                <a:cs typeface="Calibri" pitchFamily="34" charset="-120"/>
+                  <a:srgbClr val="1D1D1B"/>
+                </a:solidFill>
+                <a:latin typeface="Lucida Sans" pitchFamily="34" charset="0"/>
+                <a:ea typeface="Lucida Sans" pitchFamily="34" charset="-122"/>
+                <a:cs typeface="Lucida Sans" pitchFamily="34" charset="-120"/>
               </a:rPr>
               <a:t>Drehe links 90°</a:t>
             </a:r>
@@ -10473,11 +10571,11 @@
             <a:r>
               <a:rPr lang="en-US" sz="1700" dirty="0">
                 <a:solidFill>
-                  <a:srgbClr val="1F2A30"/>
-                </a:solidFill>
-                <a:latin typeface="Calibri" pitchFamily="34" charset="0"/>
-                <a:ea typeface="Calibri" pitchFamily="34" charset="-122"/>
-                <a:cs typeface="Calibri" pitchFamily="34" charset="-120"/>
+                  <a:srgbClr val="1D1D1B"/>
+                </a:solidFill>
+                <a:latin typeface="Lucida Sans" pitchFamily="34" charset="0"/>
+                <a:ea typeface="Lucida Sans" pitchFamily="34" charset="-122"/>
+                <a:cs typeface="Lucida Sans" pitchFamily="34" charset="-120"/>
               </a:rPr>
               <a:t>Drehe rechts 90°</a:t>
             </a:r>
@@ -10502,11 +10600,11 @@
             </a:avLst>
           </a:prstGeom>
           <a:solidFill>
-            <a:srgbClr val="E6F2F1"/>
+            <a:srgbClr val="F2F2F2"/>
           </a:solidFill>
           <a:ln w="12700">
             <a:solidFill>
-              <a:srgbClr val="E6F2F1"/>
+              <a:srgbClr val="F2F2F2"/>
             </a:solidFill>
             <a:prstDash val="solid"/>
           </a:ln>
@@ -10527,11 +10625,11 @@
             <a:avLst/>
           </a:prstGeom>
           <a:solidFill>
-            <a:srgbClr val="0B6E69"/>
+            <a:srgbClr val="7A003F"/>
           </a:solidFill>
           <a:ln w="12700">
             <a:solidFill>
-              <a:srgbClr val="0B6E69"/>
+              <a:srgbClr val="7A003F"/>
             </a:solidFill>
             <a:prstDash val="solid"/>
           </a:ln>
@@ -10566,9 +10664,9 @@
                 <a:solidFill>
                   <a:srgbClr val="FFFFFF"/>
                 </a:solidFill>
-                <a:latin typeface="Calibri" pitchFamily="34" charset="0"/>
-                <a:ea typeface="Calibri" pitchFamily="34" charset="-122"/>
-                <a:cs typeface="Calibri" pitchFamily="34" charset="-120"/>
+                <a:latin typeface="Lucida Sans" pitchFamily="34" charset="0"/>
+                <a:ea typeface="Lucida Sans" pitchFamily="34" charset="-122"/>
+                <a:cs typeface="Lucida Sans" pitchFamily="34" charset="-120"/>
               </a:rPr>
               <a:t>2</a:t>
             </a:r>
@@ -10603,11 +10701,11 @@
             <a:r>
               <a:rPr lang="en-US" sz="1800" b="1" dirty="0">
                 <a:solidFill>
-                  <a:srgbClr val="0B3C49"/>
-                </a:solidFill>
-                <a:latin typeface="Calibri" pitchFamily="34" charset="0"/>
-                <a:ea typeface="Calibri" pitchFamily="34" charset="-122"/>
-                <a:cs typeface="Calibri" pitchFamily="34" charset="-120"/>
+                  <a:srgbClr val="7A003F"/>
+                </a:solidFill>
+                <a:latin typeface="Lucida Sans" pitchFamily="34" charset="0"/>
+                <a:ea typeface="Lucida Sans" pitchFamily="34" charset="-122"/>
+                <a:cs typeface="Lucida Sans" pitchFamily="34" charset="-120"/>
               </a:rPr>
               <a:t>Runde 2</a:t>
             </a:r>
@@ -10646,11 +10744,11 @@
             <a:r>
               <a:rPr lang="en-US" sz="1700" dirty="0">
                 <a:solidFill>
-                  <a:srgbClr val="1F2A30"/>
-                </a:solidFill>
-                <a:latin typeface="Calibri" pitchFamily="34" charset="0"/>
-                <a:ea typeface="Calibri" pitchFamily="34" charset="-122"/>
-                <a:cs typeface="Calibri" pitchFamily="34" charset="-120"/>
+                  <a:srgbClr val="1D1D1B"/>
+                </a:solidFill>
+                <a:latin typeface="Lucida Sans" pitchFamily="34" charset="0"/>
+                <a:ea typeface="Lucida Sans" pitchFamily="34" charset="-122"/>
+                <a:cs typeface="Lucida Sans" pitchFamily="34" charset="-120"/>
               </a:rPr>
               <a:t>zusätzlich:</a:t>
             </a:r>
@@ -10667,11 +10765,11 @@
             <a:r>
               <a:rPr lang="en-US" sz="1700" dirty="0">
                 <a:solidFill>
-                  <a:srgbClr val="1F2A30"/>
-                </a:solidFill>
-                <a:latin typeface="Calibri" pitchFamily="34" charset="0"/>
-                <a:ea typeface="Calibri" pitchFamily="34" charset="-122"/>
-                <a:cs typeface="Calibri" pitchFamily="34" charset="-120"/>
+                  <a:srgbClr val="1D1D1B"/>
+                </a:solidFill>
+                <a:latin typeface="Lucida Sans" pitchFamily="34" charset="0"/>
+                <a:ea typeface="Lucida Sans" pitchFamily="34" charset="-122"/>
+                <a:cs typeface="Lucida Sans" pitchFamily="34" charset="-120"/>
               </a:rPr>
               <a:t>Wiederhole n mal [ … ]</a:t>
             </a:r>
@@ -10696,11 +10794,11 @@
             </a:avLst>
           </a:prstGeom>
           <a:solidFill>
-            <a:srgbClr val="E6F2F1"/>
+            <a:srgbClr val="F2F2F2"/>
           </a:solidFill>
           <a:ln w="12700">
             <a:solidFill>
-              <a:srgbClr val="E6F2F1"/>
+              <a:srgbClr val="F2F2F2"/>
             </a:solidFill>
             <a:prstDash val="solid"/>
           </a:ln>
@@ -10721,11 +10819,11 @@
             <a:avLst/>
           </a:prstGeom>
           <a:solidFill>
-            <a:srgbClr val="E8772E"/>
+            <a:srgbClr val="EF7D00"/>
           </a:solidFill>
           <a:ln w="12700">
             <a:solidFill>
-              <a:srgbClr val="E8772E"/>
+              <a:srgbClr val="EF7D00"/>
             </a:solidFill>
             <a:prstDash val="solid"/>
           </a:ln>
@@ -10758,11 +10856,11 @@
             <a:r>
               <a:rPr lang="en-US" sz="1600" b="1" dirty="0">
                 <a:solidFill>
-                  <a:srgbClr val="FFFFFF"/>
-                </a:solidFill>
-                <a:latin typeface="Calibri" pitchFamily="34" charset="0"/>
-                <a:ea typeface="Calibri" pitchFamily="34" charset="-122"/>
-                <a:cs typeface="Calibri" pitchFamily="34" charset="-120"/>
+                  <a:srgbClr val="1D1D1B"/>
+                </a:solidFill>
+                <a:latin typeface="Lucida Sans" pitchFamily="34" charset="0"/>
+                <a:ea typeface="Lucida Sans" pitchFamily="34" charset="-122"/>
+                <a:cs typeface="Lucida Sans" pitchFamily="34" charset="-120"/>
               </a:rPr>
               <a:t>3</a:t>
             </a:r>
@@ -10797,11 +10895,11 @@
             <a:r>
               <a:rPr lang="en-US" sz="1800" b="1" dirty="0">
                 <a:solidFill>
-                  <a:srgbClr val="0B3C49"/>
-                </a:solidFill>
-                <a:latin typeface="Calibri" pitchFamily="34" charset="0"/>
-                <a:ea typeface="Calibri" pitchFamily="34" charset="-122"/>
-                <a:cs typeface="Calibri" pitchFamily="34" charset="-120"/>
+                  <a:srgbClr val="7A003F"/>
+                </a:solidFill>
+                <a:latin typeface="Lucida Sans" pitchFamily="34" charset="0"/>
+                <a:ea typeface="Lucida Sans" pitchFamily="34" charset="-122"/>
+                <a:cs typeface="Lucida Sans" pitchFamily="34" charset="-120"/>
               </a:rPr>
               <a:t>Runde 3</a:t>
             </a:r>
@@ -10840,11 +10938,11 @@
             <a:r>
               <a:rPr lang="en-US" sz="1700" dirty="0">
                 <a:solidFill>
-                  <a:srgbClr val="1F2A30"/>
-                </a:solidFill>
-                <a:latin typeface="Calibri" pitchFamily="34" charset="0"/>
-                <a:ea typeface="Calibri" pitchFamily="34" charset="-122"/>
-                <a:cs typeface="Calibri" pitchFamily="34" charset="-120"/>
+                  <a:srgbClr val="1D1D1B"/>
+                </a:solidFill>
+                <a:latin typeface="Lucida Sans" pitchFamily="34" charset="0"/>
+                <a:ea typeface="Lucida Sans" pitchFamily="34" charset="-122"/>
+                <a:cs typeface="Lucida Sans" pitchFamily="34" charset="-120"/>
               </a:rPr>
               <a:t>zusätzlich:</a:t>
             </a:r>
@@ -10861,11 +10959,11 @@
             <a:r>
               <a:rPr lang="en-US" sz="1700" dirty="0">
                 <a:solidFill>
-                  <a:srgbClr val="1F2A30"/>
-                </a:solidFill>
-                <a:latin typeface="Calibri" pitchFamily="34" charset="0"/>
-                <a:ea typeface="Calibri" pitchFamily="34" charset="-122"/>
-                <a:cs typeface="Calibri" pitchFamily="34" charset="-120"/>
+                  <a:srgbClr val="1D1D1B"/>
+                </a:solidFill>
+                <a:latin typeface="Lucida Sans" pitchFamily="34" charset="0"/>
+                <a:ea typeface="Lucida Sans" pitchFamily="34" charset="-122"/>
+                <a:cs typeface="Lucida Sans" pitchFamily="34" charset="-120"/>
               </a:rPr>
               <a:t>Wenn Hindernis vor dir, dann [ … ] sonst [ … ]</a:t>
             </a:r>
@@ -10890,11 +10988,11 @@
             </a:avLst>
           </a:prstGeom>
           <a:solidFill>
-            <a:srgbClr val="FCEBDD"/>
+            <a:srgbClr val="FDF0E3"/>
           </a:solidFill>
           <a:ln w="12700">
             <a:solidFill>
-              <a:srgbClr val="FCEBDD"/>
+              <a:srgbClr val="FDF0E3"/>
             </a:solidFill>
             <a:prstDash val="solid"/>
           </a:ln>
@@ -10915,11 +11013,11 @@
             <a:avLst/>
           </a:prstGeom>
           <a:solidFill>
-            <a:srgbClr val="E8772E"/>
+            <a:srgbClr val="EF7D00"/>
           </a:solidFill>
           <a:ln w="12700">
             <a:solidFill>
-              <a:srgbClr val="E8772E"/>
+              <a:srgbClr val="EF7D00"/>
             </a:solidFill>
             <a:prstDash val="solid"/>
           </a:ln>
@@ -10952,11 +11050,11 @@
             <a:r>
               <a:rPr lang="en-US" sz="2000" b="1" dirty="0">
                 <a:solidFill>
-                  <a:srgbClr val="FFFFFF"/>
-                </a:solidFill>
-                <a:latin typeface="Calibri" pitchFamily="34" charset="0"/>
-                <a:ea typeface="Calibri" pitchFamily="34" charset="-122"/>
-                <a:cs typeface="Calibri" pitchFamily="34" charset="-120"/>
+                  <a:srgbClr val="1D1D1B"/>
+                </a:solidFill>
+                <a:latin typeface="Lucida Sans" pitchFamily="34" charset="0"/>
+                <a:ea typeface="Lucida Sans" pitchFamily="34" charset="-122"/>
+                <a:cs typeface="Lucida Sans" pitchFamily="34" charset="-120"/>
               </a:rPr>
               <a:t>!</a:t>
             </a:r>
@@ -10991,11 +11089,11 @@
             <a:r>
               <a:rPr lang="en-US" sz="1500" dirty="0">
                 <a:solidFill>
-                  <a:srgbClr val="0B3C49"/>
-                </a:solidFill>
-                <a:latin typeface="Calibri" pitchFamily="34" charset="0"/>
-                <a:ea typeface="Calibri" pitchFamily="34" charset="-122"/>
-                <a:cs typeface="Calibri" pitchFamily="34" charset="-120"/>
+                  <a:srgbClr val="7A003F"/>
+                </a:solidFill>
+                <a:latin typeface="Lucida Sans" pitchFamily="34" charset="0"/>
+                <a:ea typeface="Lucida Sans" pitchFamily="34" charset="-122"/>
+                <a:cs typeface="Lucida Sans" pitchFamily="34" charset="-120"/>
               </a:rPr>
               <a:t>Danach: Wie viele Karten brauchten Sie in jeder Runde? Was kann die Wenn-Karte, was die anderen nicht können?</a:t>
             </a:r>
@@ -11033,11 +11131,11 @@
             <a:lvl1pPr>
               <a:defRPr sz="1000">
                 <a:solidFill>
-                  <a:srgbClr val="5B6B73"/>
-                </a:solidFill>
-                <a:latin typeface="Calibri"/>
-                <a:ea typeface="Calibri"/>
-                <a:cs typeface="Calibri"/>
+                  <a:srgbClr val="706F6F"/>
+                </a:solidFill>
+                <a:latin typeface="Lucida Sans"/>
+                <a:ea typeface="Lucida Sans"/>
+                <a:cs typeface="Lucida Sans"/>
               </a:defRPr>
             </a:lvl1pPr>
           </a:lstStyle>
@@ -11081,13 +11179,13 @@
           <p:cNvPr id="2" name="Text 1"/>
           <p:cNvSpPr/>
           <p:nvPr>
-            <p:ph idx="101" type="title" hasCustomPrompt="1"/>
+            <p:ph idx="102" type="title" hasCustomPrompt="1"/>
           </p:nvPr>
         </p:nvSpPr>
         <p:spPr>
           <a:xfrm>
-            <a:off x="548640" y="320040"/>
-            <a:ext cx="11094415" cy="777240"/>
+            <a:off x="548640" y="274320"/>
+            <a:ext cx="8351215" cy="896112"/>
           </a:xfrm>
           <a:prstGeom prst="rect">
             <a:avLst/>
@@ -11099,21 +11197,21 @@
           <a:bodyPr wrap="square" lIns="0" tIns="0" rIns="0" bIns="0" rtlCol="0" anchor="ctr"/>
           <a:lstStyle/>
           <a:p>
-            <a:pPr indent="0" marL="0">
-              <a:buNone/>
-            </a:pPr>
-            <a:r>
-              <a:rPr lang="en-US" sz="3200" b="1" dirty="0">
-                <a:solidFill>
-                  <a:srgbClr val="0B3C49"/>
-                </a:solidFill>
-                <a:latin typeface="Cambria" pitchFamily="34" charset="0"/>
-                <a:ea typeface="Cambria" pitchFamily="34" charset="-122"/>
-                <a:cs typeface="Cambria" pitchFamily="34" charset="-120"/>
+            <a:pPr algn="l" indent="0" marL="0">
+              <a:buNone/>
+            </a:pPr>
+            <a:r>
+              <a:rPr lang="en-US" sz="2600" b="1" dirty="0">
+                <a:solidFill>
+                  <a:srgbClr val="7A003F"/>
+                </a:solidFill>
+                <a:latin typeface="Lucida Sans" pitchFamily="34" charset="0"/>
+                <a:ea typeface="Lucida Sans" pitchFamily="34" charset="-122"/>
+                <a:cs typeface="Lucida Sans" pitchFamily="34" charset="-120"/>
               </a:rPr>
               <a:t>Die drei Grundstrukturen in Open Roberta</a:t>
             </a:r>
-            <a:endParaRPr lang="en-US" sz="3200" dirty="0"/>
+            <a:endParaRPr lang="en-US" sz="2600" dirty="0"/>
           </a:p>
         </p:txBody>
       </p:sp>
@@ -11134,11 +11232,11 @@
             </a:avLst>
           </a:prstGeom>
           <a:solidFill>
-            <a:srgbClr val="E6F2F1"/>
+            <a:srgbClr val="F2F2F2"/>
           </a:solidFill>
           <a:ln w="12700">
             <a:solidFill>
-              <a:srgbClr val="E6F2F1"/>
+              <a:srgbClr val="F2F2F2"/>
             </a:solidFill>
             <a:prstDash val="solid"/>
           </a:ln>
@@ -11159,11 +11257,11 @@
             <a:avLst/>
           </a:prstGeom>
           <a:solidFill>
-            <a:srgbClr val="0B6E69"/>
+            <a:srgbClr val="7A003F"/>
           </a:solidFill>
           <a:ln w="12700">
             <a:solidFill>
-              <a:srgbClr val="0B6E69"/>
+              <a:srgbClr val="7A003F"/>
             </a:solidFill>
             <a:prstDash val="solid"/>
           </a:ln>
@@ -11198,9 +11296,9 @@
                 <a:solidFill>
                   <a:srgbClr val="FFFFFF"/>
                 </a:solidFill>
-                <a:latin typeface="Calibri" pitchFamily="34" charset="0"/>
-                <a:ea typeface="Calibri" pitchFamily="34" charset="-122"/>
-                <a:cs typeface="Calibri" pitchFamily="34" charset="-120"/>
+                <a:latin typeface="Lucida Sans" pitchFamily="34" charset="0"/>
+                <a:ea typeface="Lucida Sans" pitchFamily="34" charset="-122"/>
+                <a:cs typeface="Lucida Sans" pitchFamily="34" charset="-120"/>
               </a:rPr>
               <a:t>1</a:t>
             </a:r>
@@ -11235,11 +11333,11 @@
             <a:r>
               <a:rPr lang="en-US" sz="1800" b="1" dirty="0">
                 <a:solidFill>
-                  <a:srgbClr val="0B3C49"/>
-                </a:solidFill>
-                <a:latin typeface="Calibri" pitchFamily="34" charset="0"/>
-                <a:ea typeface="Calibri" pitchFamily="34" charset="-122"/>
-                <a:cs typeface="Calibri" pitchFamily="34" charset="-120"/>
+                  <a:srgbClr val="7A003F"/>
+                </a:solidFill>
+                <a:latin typeface="Lucida Sans" pitchFamily="34" charset="0"/>
+                <a:ea typeface="Lucida Sans" pitchFamily="34" charset="-122"/>
+                <a:cs typeface="Lucida Sans" pitchFamily="34" charset="-120"/>
               </a:rPr>
               <a:t>Sequenz</a:t>
             </a:r>
@@ -11278,11 +11376,11 @@
             <a:r>
               <a:rPr lang="en-US" sz="1500" dirty="0">
                 <a:solidFill>
-                  <a:srgbClr val="1F2A30"/>
-                </a:solidFill>
-                <a:latin typeface="Calibri" pitchFamily="34" charset="0"/>
-                <a:ea typeface="Calibri" pitchFamily="34" charset="-122"/>
-                <a:cs typeface="Calibri" pitchFamily="34" charset="-120"/>
+                  <a:srgbClr val="1D1D1B"/>
+                </a:solidFill>
+                <a:latin typeface="Lucida Sans" pitchFamily="34" charset="0"/>
+                <a:ea typeface="Lucida Sans" pitchFamily="34" charset="-122"/>
+                <a:cs typeface="Lucida Sans" pitchFamily="34" charset="-120"/>
               </a:rPr>
               <a:t>Anweisungen nacheinander</a:t>
             </a:r>
@@ -11299,11 +11397,11 @@
             <a:r>
               <a:rPr lang="en-US" sz="1500" dirty="0">
                 <a:solidFill>
-                  <a:srgbClr val="1F2A30"/>
-                </a:solidFill>
-                <a:latin typeface="Calibri" pitchFamily="34" charset="0"/>
-                <a:ea typeface="Calibri" pitchFamily="34" charset="-122"/>
-                <a:cs typeface="Calibri" pitchFamily="34" charset="-120"/>
+                  <a:srgbClr val="1D1D1B"/>
+                </a:solidFill>
+                <a:latin typeface="Lucida Sans" pitchFamily="34" charset="0"/>
+                <a:ea typeface="Lucida Sans" pitchFamily="34" charset="-122"/>
+                <a:cs typeface="Lucida Sans" pitchFamily="34" charset="-120"/>
               </a:rPr>
               <a:t>Blöcke untereinander</a:t>
             </a:r>
@@ -11320,11 +11418,11 @@
             <a:r>
               <a:rPr lang="en-US" sz="1500" dirty="0">
                 <a:solidFill>
-                  <a:srgbClr val="1F2A30"/>
-                </a:solidFill>
-                <a:latin typeface="Calibri" pitchFamily="34" charset="0"/>
-                <a:ea typeface="Calibri" pitchFamily="34" charset="-122"/>
-                <a:cs typeface="Calibri" pitchFamily="34" charset="-120"/>
+                  <a:srgbClr val="1D1D1B"/>
+                </a:solidFill>
+                <a:latin typeface="Lucida Sans" pitchFamily="34" charset="0"/>
+                <a:ea typeface="Lucida Sans" pitchFamily="34" charset="-122"/>
+                <a:cs typeface="Lucida Sans" pitchFamily="34" charset="-120"/>
               </a:rPr>
               <a:t>Beispiel: Fahre 20 cm → Drehe 90° → Fahre 20 cm</a:t>
             </a:r>
@@ -11349,11 +11447,11 @@
             </a:avLst>
           </a:prstGeom>
           <a:solidFill>
-            <a:srgbClr val="E6F2F1"/>
+            <a:srgbClr val="F2F2F2"/>
           </a:solidFill>
           <a:ln w="12700">
             <a:solidFill>
-              <a:srgbClr val="E6F2F1"/>
+              <a:srgbClr val="F2F2F2"/>
             </a:solidFill>
             <a:prstDash val="solid"/>
           </a:ln>
@@ -11374,11 +11472,11 @@
             <a:avLst/>
           </a:prstGeom>
           <a:solidFill>
-            <a:srgbClr val="0B6E69"/>
+            <a:srgbClr val="7A003F"/>
           </a:solidFill>
           <a:ln w="12700">
             <a:solidFill>
-              <a:srgbClr val="0B6E69"/>
+              <a:srgbClr val="7A003F"/>
             </a:solidFill>
             <a:prstDash val="solid"/>
           </a:ln>
@@ -11413,9 +11511,9 @@
                 <a:solidFill>
                   <a:srgbClr val="FFFFFF"/>
                 </a:solidFill>
-                <a:latin typeface="Calibri" pitchFamily="34" charset="0"/>
-                <a:ea typeface="Calibri" pitchFamily="34" charset="-122"/>
-                <a:cs typeface="Calibri" pitchFamily="34" charset="-120"/>
+                <a:latin typeface="Lucida Sans" pitchFamily="34" charset="0"/>
+                <a:ea typeface="Lucida Sans" pitchFamily="34" charset="-122"/>
+                <a:cs typeface="Lucida Sans" pitchFamily="34" charset="-120"/>
               </a:rPr>
               <a:t>2</a:t>
             </a:r>
@@ -11450,11 +11548,11 @@
             <a:r>
               <a:rPr lang="en-US" sz="1800" b="1" dirty="0">
                 <a:solidFill>
-                  <a:srgbClr val="0B3C49"/>
-                </a:solidFill>
-                <a:latin typeface="Calibri" pitchFamily="34" charset="0"/>
-                <a:ea typeface="Calibri" pitchFamily="34" charset="-122"/>
-                <a:cs typeface="Calibri" pitchFamily="34" charset="-120"/>
+                  <a:srgbClr val="7A003F"/>
+                </a:solidFill>
+                <a:latin typeface="Lucida Sans" pitchFamily="34" charset="0"/>
+                <a:ea typeface="Lucida Sans" pitchFamily="34" charset="-122"/>
+                <a:cs typeface="Lucida Sans" pitchFamily="34" charset="-120"/>
               </a:rPr>
               <a:t>Schleife</a:t>
             </a:r>
@@ -11493,11 +11591,11 @@
             <a:r>
               <a:rPr lang="en-US" sz="1500" dirty="0">
                 <a:solidFill>
-                  <a:srgbClr val="1F2A30"/>
-                </a:solidFill>
-                <a:latin typeface="Calibri" pitchFamily="34" charset="0"/>
-                <a:ea typeface="Calibri" pitchFamily="34" charset="-122"/>
-                <a:cs typeface="Calibri" pitchFamily="34" charset="-120"/>
+                  <a:srgbClr val="1D1D1B"/>
+                </a:solidFill>
+                <a:latin typeface="Lucida Sans" pitchFamily="34" charset="0"/>
+                <a:ea typeface="Lucida Sans" pitchFamily="34" charset="-122"/>
+                <a:cs typeface="Lucida Sans" pitchFamily="34" charset="-120"/>
               </a:rPr>
               <a:t>Wiederhole n mal (Zählschleife)</a:t>
             </a:r>
@@ -11514,11 +11612,11 @@
             <a:r>
               <a:rPr lang="en-US" sz="1500" dirty="0">
                 <a:solidFill>
-                  <a:srgbClr val="1F2A30"/>
-                </a:solidFill>
-                <a:latin typeface="Calibri" pitchFamily="34" charset="0"/>
-                <a:ea typeface="Calibri" pitchFamily="34" charset="-122"/>
-                <a:cs typeface="Calibri" pitchFamily="34" charset="-120"/>
+                  <a:srgbClr val="1D1D1B"/>
+                </a:solidFill>
+                <a:latin typeface="Lucida Sans" pitchFamily="34" charset="0"/>
+                <a:ea typeface="Lucida Sans" pitchFamily="34" charset="-122"/>
+                <a:cs typeface="Lucida Sans" pitchFamily="34" charset="-120"/>
               </a:rPr>
               <a:t>Wiederhole bis / solange …</a:t>
             </a:r>
@@ -11535,11 +11633,11 @@
             <a:r>
               <a:rPr lang="en-US" sz="1500" dirty="0">
                 <a:solidFill>
-                  <a:srgbClr val="1F2A30"/>
-                </a:solidFill>
-                <a:latin typeface="Calibri" pitchFamily="34" charset="0"/>
-                <a:ea typeface="Calibri" pitchFamily="34" charset="-122"/>
-                <a:cs typeface="Calibri" pitchFamily="34" charset="-120"/>
+                  <a:srgbClr val="1D1D1B"/>
+                </a:solidFill>
+                <a:latin typeface="Lucida Sans" pitchFamily="34" charset="0"/>
+                <a:ea typeface="Lucida Sans" pitchFamily="34" charset="-122"/>
+                <a:cs typeface="Lucida Sans" pitchFamily="34" charset="-120"/>
               </a:rPr>
               <a:t>Wiederhole unendlich oft (Startblock)</a:t>
             </a:r>
@@ -11564,11 +11662,11 @@
             </a:avLst>
           </a:prstGeom>
           <a:solidFill>
-            <a:srgbClr val="E6F2F1"/>
+            <a:srgbClr val="F2F2F2"/>
           </a:solidFill>
           <a:ln w="12700">
             <a:solidFill>
-              <a:srgbClr val="E6F2F1"/>
+              <a:srgbClr val="F2F2F2"/>
             </a:solidFill>
             <a:prstDash val="solid"/>
           </a:ln>
@@ -11589,11 +11687,11 @@
             <a:avLst/>
           </a:prstGeom>
           <a:solidFill>
-            <a:srgbClr val="0B6E69"/>
+            <a:srgbClr val="7A003F"/>
           </a:solidFill>
           <a:ln w="12700">
             <a:solidFill>
-              <a:srgbClr val="0B6E69"/>
+              <a:srgbClr val="7A003F"/>
             </a:solidFill>
             <a:prstDash val="solid"/>
           </a:ln>
@@ -11628,9 +11726,9 @@
                 <a:solidFill>
                   <a:srgbClr val="FFFFFF"/>
                 </a:solidFill>
-                <a:latin typeface="Calibri" pitchFamily="34" charset="0"/>
-                <a:ea typeface="Calibri" pitchFamily="34" charset="-122"/>
-                <a:cs typeface="Calibri" pitchFamily="34" charset="-120"/>
+                <a:latin typeface="Lucida Sans" pitchFamily="34" charset="0"/>
+                <a:ea typeface="Lucida Sans" pitchFamily="34" charset="-122"/>
+                <a:cs typeface="Lucida Sans" pitchFamily="34" charset="-120"/>
               </a:rPr>
               <a:t>3</a:t>
             </a:r>
@@ -11665,11 +11763,11 @@
             <a:r>
               <a:rPr lang="en-US" sz="1800" b="1" dirty="0">
                 <a:solidFill>
-                  <a:srgbClr val="0B3C49"/>
-                </a:solidFill>
-                <a:latin typeface="Calibri" pitchFamily="34" charset="0"/>
-                <a:ea typeface="Calibri" pitchFamily="34" charset="-122"/>
-                <a:cs typeface="Calibri" pitchFamily="34" charset="-120"/>
+                  <a:srgbClr val="7A003F"/>
+                </a:solidFill>
+                <a:latin typeface="Lucida Sans" pitchFamily="34" charset="0"/>
+                <a:ea typeface="Lucida Sans" pitchFamily="34" charset="-122"/>
+                <a:cs typeface="Lucida Sans" pitchFamily="34" charset="-120"/>
               </a:rPr>
               <a:t>Bedingung</a:t>
             </a:r>
@@ -11708,11 +11806,11 @@
             <a:r>
               <a:rPr lang="en-US" sz="1500" dirty="0">
                 <a:solidFill>
-                  <a:srgbClr val="1F2A30"/>
-                </a:solidFill>
-                <a:latin typeface="Calibri" pitchFamily="34" charset="0"/>
-                <a:ea typeface="Calibri" pitchFamily="34" charset="-122"/>
-                <a:cs typeface="Calibri" pitchFamily="34" charset="-120"/>
+                  <a:srgbClr val="1D1D1B"/>
+                </a:solidFill>
+                <a:latin typeface="Lucida Sans" pitchFamily="34" charset="0"/>
+                <a:ea typeface="Lucida Sans" pitchFamily="34" charset="-122"/>
+                <a:cs typeface="Lucida Sans" pitchFamily="34" charset="-120"/>
               </a:rPr>
               <a:t>Wenn … mache … sonst …</a:t>
             </a:r>
@@ -11729,11 +11827,11 @@
             <a:r>
               <a:rPr lang="en-US" sz="1500" dirty="0">
                 <a:solidFill>
-                  <a:srgbClr val="1F2A30"/>
-                </a:solidFill>
-                <a:latin typeface="Calibri" pitchFamily="34" charset="0"/>
-                <a:ea typeface="Calibri" pitchFamily="34" charset="-122"/>
-                <a:cs typeface="Calibri" pitchFamily="34" charset="-120"/>
+                  <a:srgbClr val="1D1D1B"/>
+                </a:solidFill>
+                <a:latin typeface="Lucida Sans" pitchFamily="34" charset="0"/>
+                <a:ea typeface="Lucida Sans" pitchFamily="34" charset="-122"/>
+                <a:cs typeface="Lucida Sans" pitchFamily="34" charset="-120"/>
               </a:rPr>
               <a:t>Vergleich mit Schwellenwert</a:t>
             </a:r>
@@ -11750,11 +11848,11 @@
             <a:r>
               <a:rPr lang="en-US" sz="1500" dirty="0">
                 <a:solidFill>
-                  <a:srgbClr val="1F2A30"/>
-                </a:solidFill>
-                <a:latin typeface="Calibri" pitchFamily="34" charset="0"/>
-                <a:ea typeface="Calibri" pitchFamily="34" charset="-122"/>
-                <a:cs typeface="Calibri" pitchFamily="34" charset="-120"/>
+                  <a:srgbClr val="1D1D1B"/>
+                </a:solidFill>
+                <a:latin typeface="Lucida Sans" pitchFamily="34" charset="0"/>
+                <a:ea typeface="Lucida Sans" pitchFamily="34" charset="-122"/>
+                <a:cs typeface="Lucida Sans" pitchFamily="34" charset="-120"/>
               </a:rPr>
               <a:t>Beispiel: Abstand &lt; 20 → LED rot</a:t>
             </a:r>
@@ -11779,11 +11877,11 @@
             </a:avLst>
           </a:prstGeom>
           <a:solidFill>
-            <a:srgbClr val="FCEBDD"/>
+            <a:srgbClr val="FDF0E3"/>
           </a:solidFill>
           <a:ln w="12700">
             <a:solidFill>
-              <a:srgbClr val="FCEBDD"/>
+              <a:srgbClr val="FDF0E3"/>
             </a:solidFill>
             <a:prstDash val="solid"/>
           </a:ln>
@@ -11804,11 +11902,11 @@
             <a:avLst/>
           </a:prstGeom>
           <a:solidFill>
-            <a:srgbClr val="E8772E"/>
+            <a:srgbClr val="EF7D00"/>
           </a:solidFill>
           <a:ln w="12700">
             <a:solidFill>
-              <a:srgbClr val="E8772E"/>
+              <a:srgbClr val="EF7D00"/>
             </a:solidFill>
             <a:prstDash val="solid"/>
           </a:ln>
@@ -11841,11 +11939,11 @@
             <a:r>
               <a:rPr lang="en-US" sz="2000" b="1" dirty="0">
                 <a:solidFill>
-                  <a:srgbClr val="FFFFFF"/>
-                </a:solidFill>
-                <a:latin typeface="Calibri" pitchFamily="34" charset="0"/>
-                <a:ea typeface="Calibri" pitchFamily="34" charset="-122"/>
-                <a:cs typeface="Calibri" pitchFamily="34" charset="-120"/>
+                  <a:srgbClr val="1D1D1B"/>
+                </a:solidFill>
+                <a:latin typeface="Lucida Sans" pitchFamily="34" charset="0"/>
+                <a:ea typeface="Lucida Sans" pitchFamily="34" charset="-122"/>
+                <a:cs typeface="Lucida Sans" pitchFamily="34" charset="-120"/>
               </a:rPr>
               <a:t>!</a:t>
             </a:r>
@@ -11880,11 +11978,11 @@
             <a:r>
               <a:rPr lang="en-US" sz="1500" dirty="0">
                 <a:solidFill>
-                  <a:srgbClr val="0B3C49"/>
-                </a:solidFill>
-                <a:latin typeface="Calibri" pitchFamily="34" charset="0"/>
-                <a:ea typeface="Calibri" pitchFamily="34" charset="-122"/>
-                <a:cs typeface="Calibri" pitchFamily="34" charset="-120"/>
+                  <a:srgbClr val="7A003F"/>
+                </a:solidFill>
+                <a:latin typeface="Lucida Sans" pitchFamily="34" charset="0"/>
+                <a:ea typeface="Lucida Sans" pitchFamily="34" charset="-122"/>
+                <a:cs typeface="Lucida Sans" pitchFamily="34" charset="-120"/>
               </a:rPr>
               <a:t>Schwellenwert = der Grenzwert, ab dem eine Bedingung „wahr“ wird. Er wird gemessen, nicht geraten.</a:t>
             </a:r>
@@ -11922,11 +12020,11 @@
             <a:lvl1pPr>
               <a:defRPr sz="1000">
                 <a:solidFill>
-                  <a:srgbClr val="5B6B73"/>
-                </a:solidFill>
-                <a:latin typeface="Calibri"/>
-                <a:ea typeface="Calibri"/>
-                <a:cs typeface="Calibri"/>
+                  <a:srgbClr val="706F6F"/>
+                </a:solidFill>
+                <a:latin typeface="Lucida Sans"/>
+                <a:ea typeface="Lucida Sans"/>
+                <a:cs typeface="Lucida Sans"/>
               </a:defRPr>
             </a:lvl1pPr>
           </a:lstStyle>
@@ -11970,13 +12068,13 @@
           <p:cNvPr id="2" name="Text 1"/>
           <p:cNvSpPr/>
           <p:nvPr>
-            <p:ph idx="101" type="title" hasCustomPrompt="1"/>
+            <p:ph idx="102" type="title" hasCustomPrompt="1"/>
           </p:nvPr>
         </p:nvSpPr>
         <p:spPr>
           <a:xfrm>
-            <a:off x="548640" y="320040"/>
-            <a:ext cx="11094415" cy="777240"/>
+            <a:off x="548640" y="274320"/>
+            <a:ext cx="8351215" cy="896112"/>
           </a:xfrm>
           <a:prstGeom prst="rect">
             <a:avLst/>
@@ -11988,21 +12086,21 @@
           <a:bodyPr wrap="square" lIns="0" tIns="0" rIns="0" bIns="0" rtlCol="0" anchor="ctr"/>
           <a:lstStyle/>
           <a:p>
-            <a:pPr indent="0" marL="0">
-              <a:buNone/>
-            </a:pPr>
-            <a:r>
-              <a:rPr lang="en-US" sz="3200" b="1" dirty="0">
-                <a:solidFill>
-                  <a:srgbClr val="0B3C49"/>
-                </a:solidFill>
-                <a:latin typeface="Cambria" pitchFamily="34" charset="0"/>
-                <a:ea typeface="Cambria" pitchFamily="34" charset="-122"/>
-                <a:cs typeface="Cambria" pitchFamily="34" charset="-120"/>
+            <a:pPr algn="l" indent="0" marL="0">
+              <a:buNone/>
+            </a:pPr>
+            <a:r>
+              <a:rPr lang="en-US" sz="2600" b="1" dirty="0">
+                <a:solidFill>
+                  <a:srgbClr val="7A003F"/>
+                </a:solidFill>
+                <a:latin typeface="Lucida Sans" pitchFamily="34" charset="0"/>
+                <a:ea typeface="Lucida Sans" pitchFamily="34" charset="-122"/>
+                <a:cs typeface="Lucida Sans" pitchFamily="34" charset="-120"/>
               </a:rPr>
               <a:t>PRIMM: erst vorhersagen, dann testen</a:t>
             </a:r>
-            <a:endParaRPr lang="en-US" sz="3200" dirty="0"/>
+            <a:endParaRPr lang="en-US" sz="2600" dirty="0"/>
           </a:p>
         </p:txBody>
       </p:sp>
@@ -12023,11 +12121,11 @@
             </a:avLst>
           </a:prstGeom>
           <a:solidFill>
-            <a:srgbClr val="E6F2F1"/>
+            <a:srgbClr val="F2F2F2"/>
           </a:solidFill>
           <a:ln w="12700">
             <a:solidFill>
-              <a:srgbClr val="E6F2F1"/>
+              <a:srgbClr val="F2F2F2"/>
             </a:solidFill>
             <a:prstDash val="solid"/>
           </a:ln>
@@ -12048,11 +12146,11 @@
             <a:avLst/>
           </a:prstGeom>
           <a:solidFill>
-            <a:srgbClr val="0B6E69"/>
+            <a:srgbClr val="7A003F"/>
           </a:solidFill>
           <a:ln w="12700">
             <a:solidFill>
-              <a:srgbClr val="0B6E69"/>
+              <a:srgbClr val="7A003F"/>
             </a:solidFill>
             <a:prstDash val="solid"/>
           </a:ln>
@@ -12087,9 +12185,9 @@
                 <a:solidFill>
                   <a:srgbClr val="FFFFFF"/>
                 </a:solidFill>
-                <a:latin typeface="Calibri" pitchFamily="34" charset="0"/>
-                <a:ea typeface="Calibri" pitchFamily="34" charset="-122"/>
-                <a:cs typeface="Calibri" pitchFamily="34" charset="-120"/>
+                <a:latin typeface="Lucida Sans" pitchFamily="34" charset="0"/>
+                <a:ea typeface="Lucida Sans" pitchFamily="34" charset="-122"/>
+                <a:cs typeface="Lucida Sans" pitchFamily="34" charset="-120"/>
               </a:rPr>
               <a:t>P</a:t>
             </a:r>
@@ -12124,11 +12222,11 @@
             <a:r>
               <a:rPr lang="en-US" sz="1500" b="1" dirty="0">
                 <a:solidFill>
-                  <a:srgbClr val="0B3C49"/>
-                </a:solidFill>
-                <a:latin typeface="Calibri" pitchFamily="34" charset="0"/>
-                <a:ea typeface="Calibri" pitchFamily="34" charset="-122"/>
-                <a:cs typeface="Calibri" pitchFamily="34" charset="-120"/>
+                  <a:srgbClr val="7A003F"/>
+                </a:solidFill>
+                <a:latin typeface="Lucida Sans" pitchFamily="34" charset="0"/>
+                <a:ea typeface="Lucida Sans" pitchFamily="34" charset="-122"/>
+                <a:cs typeface="Lucida Sans" pitchFamily="34" charset="-120"/>
               </a:rPr>
               <a:t>Predict</a:t>
             </a:r>
@@ -12163,11 +12261,11 @@
             <a:r>
               <a:rPr lang="en-US" sz="1400" dirty="0">
                 <a:solidFill>
-                  <a:srgbClr val="1F2A30"/>
-                </a:solidFill>
-                <a:latin typeface="Calibri" pitchFamily="34" charset="0"/>
-                <a:ea typeface="Calibri" pitchFamily="34" charset="-122"/>
-                <a:cs typeface="Calibri" pitchFamily="34" charset="-120"/>
+                  <a:srgbClr val="1D1D1B"/>
+                </a:solidFill>
+                <a:latin typeface="Lucida Sans" pitchFamily="34" charset="0"/>
+                <a:ea typeface="Lucida Sans" pitchFamily="34" charset="-122"/>
+                <a:cs typeface="Lucida Sans" pitchFamily="34" charset="-120"/>
               </a:rPr>
               <a:t>Was wird das Programm tun? Vorhersage notieren.</a:t>
             </a:r>
@@ -12192,11 +12290,11 @@
             </a:avLst>
           </a:prstGeom>
           <a:solidFill>
-            <a:srgbClr val="E6F2F1"/>
+            <a:srgbClr val="F2F2F2"/>
           </a:solidFill>
           <a:ln w="12700">
             <a:solidFill>
-              <a:srgbClr val="E6F2F1"/>
+              <a:srgbClr val="F2F2F2"/>
             </a:solidFill>
             <a:prstDash val="solid"/>
           </a:ln>
@@ -12217,11 +12315,11 @@
             <a:avLst/>
           </a:prstGeom>
           <a:solidFill>
-            <a:srgbClr val="0B6E69"/>
+            <a:srgbClr val="7A003F"/>
           </a:solidFill>
           <a:ln w="12700">
             <a:solidFill>
-              <a:srgbClr val="0B6E69"/>
+              <a:srgbClr val="7A003F"/>
             </a:solidFill>
             <a:prstDash val="solid"/>
           </a:ln>
@@ -12256,9 +12354,9 @@
                 <a:solidFill>
                   <a:srgbClr val="FFFFFF"/>
                 </a:solidFill>
-                <a:latin typeface="Calibri" pitchFamily="34" charset="0"/>
-                <a:ea typeface="Calibri" pitchFamily="34" charset="-122"/>
-                <a:cs typeface="Calibri" pitchFamily="34" charset="-120"/>
+                <a:latin typeface="Lucida Sans" pitchFamily="34" charset="0"/>
+                <a:ea typeface="Lucida Sans" pitchFamily="34" charset="-122"/>
+                <a:cs typeface="Lucida Sans" pitchFamily="34" charset="-120"/>
               </a:rPr>
               <a:t>R</a:t>
             </a:r>
@@ -12293,11 +12391,11 @@
             <a:r>
               <a:rPr lang="en-US" sz="1500" b="1" dirty="0">
                 <a:solidFill>
-                  <a:srgbClr val="0B3C49"/>
-                </a:solidFill>
-                <a:latin typeface="Calibri" pitchFamily="34" charset="0"/>
-                <a:ea typeface="Calibri" pitchFamily="34" charset="-122"/>
-                <a:cs typeface="Calibri" pitchFamily="34" charset="-120"/>
+                  <a:srgbClr val="7A003F"/>
+                </a:solidFill>
+                <a:latin typeface="Lucida Sans" pitchFamily="34" charset="0"/>
+                <a:ea typeface="Lucida Sans" pitchFamily="34" charset="-122"/>
+                <a:cs typeface="Lucida Sans" pitchFamily="34" charset="-120"/>
               </a:rPr>
               <a:t>Run</a:t>
             </a:r>
@@ -12332,11 +12430,11 @@
             <a:r>
               <a:rPr lang="en-US" sz="1400" dirty="0">
                 <a:solidFill>
-                  <a:srgbClr val="1F2A30"/>
-                </a:solidFill>
-                <a:latin typeface="Calibri" pitchFamily="34" charset="0"/>
-                <a:ea typeface="Calibri" pitchFamily="34" charset="-122"/>
-                <a:cs typeface="Calibri" pitchFamily="34" charset="-120"/>
+                  <a:srgbClr val="1D1D1B"/>
+                </a:solidFill>
+                <a:latin typeface="Lucida Sans" pitchFamily="34" charset="0"/>
+                <a:ea typeface="Lucida Sans" pitchFamily="34" charset="-122"/>
+                <a:cs typeface="Lucida Sans" pitchFamily="34" charset="-120"/>
               </a:rPr>
               <a:t>Am mBot2 ausführen und beobachten.</a:t>
             </a:r>
@@ -12361,11 +12459,11 @@
             </a:avLst>
           </a:prstGeom>
           <a:solidFill>
-            <a:srgbClr val="E6F2F1"/>
+            <a:srgbClr val="F2F2F2"/>
           </a:solidFill>
           <a:ln w="12700">
             <a:solidFill>
-              <a:srgbClr val="E6F2F1"/>
+              <a:srgbClr val="F2F2F2"/>
             </a:solidFill>
             <a:prstDash val="solid"/>
           </a:ln>
@@ -12386,11 +12484,11 @@
             <a:avLst/>
           </a:prstGeom>
           <a:solidFill>
-            <a:srgbClr val="0B6E69"/>
+            <a:srgbClr val="7A003F"/>
           </a:solidFill>
           <a:ln w="12700">
             <a:solidFill>
-              <a:srgbClr val="0B6E69"/>
+              <a:srgbClr val="7A003F"/>
             </a:solidFill>
             <a:prstDash val="solid"/>
           </a:ln>
@@ -12425,9 +12523,9 @@
                 <a:solidFill>
                   <a:srgbClr val="FFFFFF"/>
                 </a:solidFill>
-                <a:latin typeface="Calibri" pitchFamily="34" charset="0"/>
-                <a:ea typeface="Calibri" pitchFamily="34" charset="-122"/>
-                <a:cs typeface="Calibri" pitchFamily="34" charset="-120"/>
+                <a:latin typeface="Lucida Sans" pitchFamily="34" charset="0"/>
+                <a:ea typeface="Lucida Sans" pitchFamily="34" charset="-122"/>
+                <a:cs typeface="Lucida Sans" pitchFamily="34" charset="-120"/>
               </a:rPr>
               <a:t>I</a:t>
             </a:r>
@@ -12462,11 +12560,11 @@
             <a:r>
               <a:rPr lang="en-US" sz="1500" b="1" dirty="0">
                 <a:solidFill>
-                  <a:srgbClr val="0B3C49"/>
-                </a:solidFill>
-                <a:latin typeface="Calibri" pitchFamily="34" charset="0"/>
-                <a:ea typeface="Calibri" pitchFamily="34" charset="-122"/>
-                <a:cs typeface="Calibri" pitchFamily="34" charset="-120"/>
+                  <a:srgbClr val="7A003F"/>
+                </a:solidFill>
+                <a:latin typeface="Lucida Sans" pitchFamily="34" charset="0"/>
+                <a:ea typeface="Lucida Sans" pitchFamily="34" charset="-122"/>
+                <a:cs typeface="Lucida Sans" pitchFamily="34" charset="-120"/>
               </a:rPr>
               <a:t>Investigate</a:t>
             </a:r>
@@ -12501,11 +12599,11 @@
             <a:r>
               <a:rPr lang="en-US" sz="1400" dirty="0">
                 <a:solidFill>
-                  <a:srgbClr val="1F2A30"/>
-                </a:solidFill>
-                <a:latin typeface="Calibri" pitchFamily="34" charset="0"/>
-                <a:ea typeface="Calibri" pitchFamily="34" charset="-122"/>
-                <a:cs typeface="Calibri" pitchFamily="34" charset="-120"/>
+                  <a:srgbClr val="1D1D1B"/>
+                </a:solidFill>
+                <a:latin typeface="Lucida Sans" pitchFamily="34" charset="0"/>
+                <a:ea typeface="Lucida Sans" pitchFamily="34" charset="-122"/>
+                <a:cs typeface="Lucida Sans" pitchFamily="34" charset="-120"/>
               </a:rPr>
               <a:t>Warum passiert das? Was bewirkt welcher Block?</a:t>
             </a:r>
@@ -12530,11 +12628,11 @@
             </a:avLst>
           </a:prstGeom>
           <a:solidFill>
-            <a:srgbClr val="E6F2F1"/>
+            <a:srgbClr val="F2F2F2"/>
           </a:solidFill>
           <a:ln w="12700">
             <a:solidFill>
-              <a:srgbClr val="E6F2F1"/>
+              <a:srgbClr val="F2F2F2"/>
             </a:solidFill>
             <a:prstDash val="solid"/>
           </a:ln>
@@ -12555,11 +12653,11 @@
             <a:avLst/>
           </a:prstGeom>
           <a:solidFill>
-            <a:srgbClr val="0B6E69"/>
+            <a:srgbClr val="7A003F"/>
           </a:solidFill>
           <a:ln w="12700">
             <a:solidFill>
-              <a:srgbClr val="0B6E69"/>
+              <a:srgbClr val="7A003F"/>
             </a:solidFill>
             <a:prstDash val="solid"/>
           </a:ln>
@@ -12594,9 +12692,9 @@
                 <a:solidFill>
                   <a:srgbClr val="FFFFFF"/>
                 </a:solidFill>
-                <a:latin typeface="Calibri" pitchFamily="34" charset="0"/>
-                <a:ea typeface="Calibri" pitchFamily="34" charset="-122"/>
-                <a:cs typeface="Calibri" pitchFamily="34" charset="-120"/>
+                <a:latin typeface="Lucida Sans" pitchFamily="34" charset="0"/>
+                <a:ea typeface="Lucida Sans" pitchFamily="34" charset="-122"/>
+                <a:cs typeface="Lucida Sans" pitchFamily="34" charset="-120"/>
               </a:rPr>
               <a:t>M</a:t>
             </a:r>
@@ -12631,11 +12729,11 @@
             <a:r>
               <a:rPr lang="en-US" sz="1500" b="1" dirty="0">
                 <a:solidFill>
-                  <a:srgbClr val="0B3C49"/>
-                </a:solidFill>
-                <a:latin typeface="Calibri" pitchFamily="34" charset="0"/>
-                <a:ea typeface="Calibri" pitchFamily="34" charset="-122"/>
-                <a:cs typeface="Calibri" pitchFamily="34" charset="-120"/>
+                  <a:srgbClr val="7A003F"/>
+                </a:solidFill>
+                <a:latin typeface="Lucida Sans" pitchFamily="34" charset="0"/>
+                <a:ea typeface="Lucida Sans" pitchFamily="34" charset="-122"/>
+                <a:cs typeface="Lucida Sans" pitchFamily="34" charset="-120"/>
               </a:rPr>
               <a:t>Modify</a:t>
             </a:r>
@@ -12670,11 +12768,11 @@
             <a:r>
               <a:rPr lang="en-US" sz="1400" dirty="0">
                 <a:solidFill>
-                  <a:srgbClr val="1F2A30"/>
-                </a:solidFill>
-                <a:latin typeface="Calibri" pitchFamily="34" charset="0"/>
-                <a:ea typeface="Calibri" pitchFamily="34" charset="-122"/>
-                <a:cs typeface="Calibri" pitchFamily="34" charset="-120"/>
+                  <a:srgbClr val="1D1D1B"/>
+                </a:solidFill>
+                <a:latin typeface="Lucida Sans" pitchFamily="34" charset="0"/>
+                <a:ea typeface="Lucida Sans" pitchFamily="34" charset="-122"/>
+                <a:cs typeface="Lucida Sans" pitchFamily="34" charset="-120"/>
               </a:rPr>
               <a:t>Gezielt eine Sache ändern und erneut vorhersagen.</a:t>
             </a:r>
@@ -12699,11 +12797,11 @@
             </a:avLst>
           </a:prstGeom>
           <a:solidFill>
-            <a:srgbClr val="FCEBDD"/>
+            <a:srgbClr val="FDF0E3"/>
           </a:solidFill>
           <a:ln w="12700">
             <a:solidFill>
-              <a:srgbClr val="FCEBDD"/>
+              <a:srgbClr val="FDF0E3"/>
             </a:solidFill>
             <a:prstDash val="solid"/>
           </a:ln>
@@ -12724,11 +12822,11 @@
             <a:avLst/>
           </a:prstGeom>
           <a:solidFill>
-            <a:srgbClr val="E8772E"/>
+            <a:srgbClr val="EF7D00"/>
           </a:solidFill>
           <a:ln w="12700">
             <a:solidFill>
-              <a:srgbClr val="E8772E"/>
+              <a:srgbClr val="EF7D00"/>
             </a:solidFill>
             <a:prstDash val="solid"/>
           </a:ln>
@@ -12761,11 +12859,11 @@
             <a:r>
               <a:rPr lang="en-US" sz="1400" b="1" dirty="0">
                 <a:solidFill>
-                  <a:srgbClr val="FFFFFF"/>
-                </a:solidFill>
-                <a:latin typeface="Calibri" pitchFamily="34" charset="0"/>
-                <a:ea typeface="Calibri" pitchFamily="34" charset="-122"/>
-                <a:cs typeface="Calibri" pitchFamily="34" charset="-120"/>
+                  <a:srgbClr val="1D1D1B"/>
+                </a:solidFill>
+                <a:latin typeface="Lucida Sans" pitchFamily="34" charset="0"/>
+                <a:ea typeface="Lucida Sans" pitchFamily="34" charset="-122"/>
+                <a:cs typeface="Lucida Sans" pitchFamily="34" charset="-120"/>
               </a:rPr>
               <a:t>M</a:t>
             </a:r>
@@ -12800,11 +12898,11 @@
             <a:r>
               <a:rPr lang="en-US" sz="1500" b="1" dirty="0">
                 <a:solidFill>
-                  <a:srgbClr val="0B3C49"/>
-                </a:solidFill>
-                <a:latin typeface="Calibri" pitchFamily="34" charset="0"/>
-                <a:ea typeface="Calibri" pitchFamily="34" charset="-122"/>
-                <a:cs typeface="Calibri" pitchFamily="34" charset="-120"/>
+                  <a:srgbClr val="7A003F"/>
+                </a:solidFill>
+                <a:latin typeface="Lucida Sans" pitchFamily="34" charset="0"/>
+                <a:ea typeface="Lucida Sans" pitchFamily="34" charset="-122"/>
+                <a:cs typeface="Lucida Sans" pitchFamily="34" charset="-120"/>
               </a:rPr>
               <a:t>Make</a:t>
             </a:r>
@@ -12839,11 +12937,11 @@
             <a:r>
               <a:rPr lang="en-US" sz="1400" dirty="0">
                 <a:solidFill>
-                  <a:srgbClr val="1F2A30"/>
-                </a:solidFill>
-                <a:latin typeface="Calibri" pitchFamily="34" charset="0"/>
-                <a:ea typeface="Calibri" pitchFamily="34" charset="-122"/>
-                <a:cs typeface="Calibri" pitchFamily="34" charset="-120"/>
+                  <a:srgbClr val="1D1D1B"/>
+                </a:solidFill>
+                <a:latin typeface="Lucida Sans" pitchFamily="34" charset="0"/>
+                <a:ea typeface="Lucida Sans" pitchFamily="34" charset="-122"/>
+                <a:cs typeface="Lucida Sans" pitchFamily="34" charset="-120"/>
               </a:rPr>
               <a:t>Eigenes Programm für eine neue Aufgabe entwickeln.</a:t>
             </a:r>
@@ -12868,11 +12966,11 @@
             </a:avLst>
           </a:prstGeom>
           <a:solidFill>
-            <a:srgbClr val="FCEBDD"/>
+            <a:srgbClr val="FDF0E3"/>
           </a:solidFill>
           <a:ln w="12700">
             <a:solidFill>
-              <a:srgbClr val="FCEBDD"/>
+              <a:srgbClr val="FDF0E3"/>
             </a:solidFill>
             <a:prstDash val="solid"/>
           </a:ln>
@@ -12893,11 +12991,11 @@
             <a:avLst/>
           </a:prstGeom>
           <a:solidFill>
-            <a:srgbClr val="E8772E"/>
+            <a:srgbClr val="EF7D00"/>
           </a:solidFill>
           <a:ln w="12700">
             <a:solidFill>
-              <a:srgbClr val="E8772E"/>
+              <a:srgbClr val="EF7D00"/>
             </a:solidFill>
             <a:prstDash val="solid"/>
           </a:ln>
@@ -12930,11 +13028,11 @@
             <a:r>
               <a:rPr lang="en-US" sz="2000" b="1" dirty="0">
                 <a:solidFill>
-                  <a:srgbClr val="FFFFFF"/>
-                </a:solidFill>
-                <a:latin typeface="Calibri" pitchFamily="34" charset="0"/>
-                <a:ea typeface="Calibri" pitchFamily="34" charset="-122"/>
-                <a:cs typeface="Calibri" pitchFamily="34" charset="-120"/>
+                  <a:srgbClr val="1D1D1B"/>
+                </a:solidFill>
+                <a:latin typeface="Lucida Sans" pitchFamily="34" charset="0"/>
+                <a:ea typeface="Lucida Sans" pitchFamily="34" charset="-122"/>
+                <a:cs typeface="Lucida Sans" pitchFamily="34" charset="-120"/>
               </a:rPr>
               <a:t>!</a:t>
             </a:r>
@@ -12969,11 +13067,11 @@
             <a:r>
               <a:rPr lang="en-US" sz="1500" dirty="0">
                 <a:solidFill>
-                  <a:srgbClr val="0B3C49"/>
-                </a:solidFill>
-                <a:latin typeface="Calibri" pitchFamily="34" charset="0"/>
-                <a:ea typeface="Calibri" pitchFamily="34" charset="-122"/>
-                <a:cs typeface="Calibri" pitchFamily="34" charset="-120"/>
+                  <a:srgbClr val="7A003F"/>
+                </a:solidFill>
+                <a:latin typeface="Lucida Sans" pitchFamily="34" charset="0"/>
+                <a:ea typeface="Lucida Sans" pitchFamily="34" charset="-122"/>
+                <a:cs typeface="Lucida Sans" pitchFamily="34" charset="-120"/>
               </a:rPr>
               <a:t>Für den mBot2 gibt es in Open Roberta keinen Simulator. Die Vorhersage übernimmt seine Rolle: Sie macht sichtbar, wo das eigene Modell nicht stimmt.</a:t>
             </a:r>
@@ -13011,11 +13109,11 @@
             <a:lvl1pPr>
               <a:defRPr sz="1000">
                 <a:solidFill>
-                  <a:srgbClr val="5B6B73"/>
-                </a:solidFill>
-                <a:latin typeface="Calibri"/>
-                <a:ea typeface="Calibri"/>
-                <a:cs typeface="Calibri"/>
+                  <a:srgbClr val="706F6F"/>
+                </a:solidFill>
+                <a:latin typeface="Lucida Sans"/>
+                <a:ea typeface="Lucida Sans"/>
+                <a:cs typeface="Lucida Sans"/>
               </a:defRPr>
             </a:lvl1pPr>
           </a:lstStyle>
@@ -13059,13 +13157,13 @@
           <p:cNvPr id="2" name="Text 1"/>
           <p:cNvSpPr/>
           <p:nvPr>
-            <p:ph idx="101" type="title" hasCustomPrompt="1"/>
+            <p:ph idx="102" type="title" hasCustomPrompt="1"/>
           </p:nvPr>
         </p:nvSpPr>
         <p:spPr>
           <a:xfrm>
-            <a:off x="548640" y="320040"/>
-            <a:ext cx="11094415" cy="777240"/>
+            <a:off x="548640" y="274320"/>
+            <a:ext cx="8351215" cy="896112"/>
           </a:xfrm>
           <a:prstGeom prst="rect">
             <a:avLst/>
@@ -13077,21 +13175,21 @@
           <a:bodyPr wrap="square" lIns="0" tIns="0" rIns="0" bIns="0" rtlCol="0" anchor="ctr"/>
           <a:lstStyle/>
           <a:p>
-            <a:pPr indent="0" marL="0">
-              <a:buNone/>
-            </a:pPr>
-            <a:r>
-              <a:rPr lang="en-US" sz="3200" b="1" dirty="0">
-                <a:solidFill>
-                  <a:srgbClr val="0B3C49"/>
-                </a:solidFill>
-                <a:latin typeface="Cambria" pitchFamily="34" charset="0"/>
-                <a:ea typeface="Cambria" pitchFamily="34" charset="-122"/>
-                <a:cs typeface="Cambria" pitchFamily="34" charset="-120"/>
+            <a:pPr algn="l" indent="0" marL="0">
+              <a:buNone/>
+            </a:pPr>
+            <a:r>
+              <a:rPr lang="en-US" sz="2600" b="1" dirty="0">
+                <a:solidFill>
+                  <a:srgbClr val="7A003F"/>
+                </a:solidFill>
+                <a:latin typeface="Lucida Sans" pitchFamily="34" charset="0"/>
+                <a:ea typeface="Lucida Sans" pitchFamily="34" charset="-122"/>
+                <a:cs typeface="Lucida Sans" pitchFamily="34" charset="-120"/>
               </a:rPr>
               <a:t>Predict: Was tut der „Wachhund“?</a:t>
             </a:r>
-            <a:endParaRPr lang="en-US" sz="3200" dirty="0"/>
+            <a:endParaRPr lang="en-US" sz="2600" dirty="0"/>
           </a:p>
         </p:txBody>
       </p:sp>
@@ -13112,11 +13210,11 @@
             </a:avLst>
           </a:prstGeom>
           <a:solidFill>
-            <a:srgbClr val="16323B"/>
+            <a:srgbClr val="3C3C3B"/>
           </a:solidFill>
           <a:ln w="12700">
             <a:solidFill>
-              <a:srgbClr val="16323B"/>
+              <a:srgbClr val="3C3C3B"/>
             </a:solidFill>
             <a:prstDash val="solid"/>
           </a:ln>
@@ -13149,7 +13247,7 @@
             <a:r>
               <a:rPr lang="en-US" sz="1700" dirty="0">
                 <a:solidFill>
-                  <a:srgbClr val="E6F2F1"/>
+                  <a:srgbClr val="FFFFFF"/>
                 </a:solidFill>
                 <a:latin typeface="Courier New" pitchFamily="34" charset="0"/>
                 <a:ea typeface="Courier New" pitchFamily="34" charset="-122"/>
@@ -13166,7 +13264,7 @@
             <a:r>
               <a:rPr lang="en-US" sz="1700" dirty="0">
                 <a:solidFill>
-                  <a:srgbClr val="E6F2F1"/>
+                  <a:srgbClr val="FFFFFF"/>
                 </a:solidFill>
                 <a:latin typeface="Courier New" pitchFamily="34" charset="0"/>
                 <a:ea typeface="Courier New" pitchFamily="34" charset="-122"/>
@@ -13183,7 +13281,7 @@
             <a:r>
               <a:rPr lang="en-US" sz="1700" dirty="0">
                 <a:solidFill>
-                  <a:srgbClr val="E6F2F1"/>
+                  <a:srgbClr val="FFFFFF"/>
                 </a:solidFill>
                 <a:latin typeface="Courier New" pitchFamily="34" charset="0"/>
                 <a:ea typeface="Courier New" pitchFamily="34" charset="-122"/>
@@ -13200,7 +13298,7 @@
             <a:r>
               <a:rPr lang="en-US" sz="1700" dirty="0">
                 <a:solidFill>
-                  <a:srgbClr val="E6F2F1"/>
+                  <a:srgbClr val="FFFFFF"/>
                 </a:solidFill>
                 <a:latin typeface="Courier New" pitchFamily="34" charset="0"/>
                 <a:ea typeface="Courier New" pitchFamily="34" charset="-122"/>
@@ -13217,7 +13315,7 @@
             <a:r>
               <a:rPr lang="en-US" sz="1700" dirty="0">
                 <a:solidFill>
-                  <a:srgbClr val="E6F2F1"/>
+                  <a:srgbClr val="FFFFFF"/>
                 </a:solidFill>
                 <a:latin typeface="Courier New" pitchFamily="34" charset="0"/>
                 <a:ea typeface="Courier New" pitchFamily="34" charset="-122"/>
@@ -13234,7 +13332,7 @@
             <a:r>
               <a:rPr lang="en-US" sz="1700" dirty="0">
                 <a:solidFill>
-                  <a:srgbClr val="E6F2F1"/>
+                  <a:srgbClr val="FFFFFF"/>
                 </a:solidFill>
                 <a:latin typeface="Courier New" pitchFamily="34" charset="0"/>
                 <a:ea typeface="Courier New" pitchFamily="34" charset="-122"/>
@@ -13251,7 +13349,7 @@
             <a:r>
               <a:rPr lang="en-US" sz="1700" dirty="0">
                 <a:solidFill>
-                  <a:srgbClr val="E6F2F1"/>
+                  <a:srgbClr val="FFFFFF"/>
                 </a:solidFill>
                 <a:latin typeface="Courier New" pitchFamily="34" charset="0"/>
                 <a:ea typeface="Courier New" pitchFamily="34" charset="-122"/>
@@ -13268,7 +13366,7 @@
             <a:r>
               <a:rPr lang="en-US" sz="1700" dirty="0">
                 <a:solidFill>
-                  <a:srgbClr val="E6F2F1"/>
+                  <a:srgbClr val="FFFFFF"/>
                 </a:solidFill>
                 <a:latin typeface="Courier New" pitchFamily="34" charset="0"/>
                 <a:ea typeface="Courier New" pitchFamily="34" charset="-122"/>
@@ -13285,7 +13383,7 @@
             <a:r>
               <a:rPr lang="en-US" sz="1700" dirty="0">
                 <a:solidFill>
-                  <a:srgbClr val="E6F2F1"/>
+                  <a:srgbClr val="FFFFFF"/>
                 </a:solidFill>
                 <a:latin typeface="Courier New" pitchFamily="34" charset="0"/>
                 <a:ea typeface="Courier New" pitchFamily="34" charset="-122"/>
@@ -13302,7 +13400,7 @@
             <a:r>
               <a:rPr lang="en-US" sz="1700" dirty="0">
                 <a:solidFill>
-                  <a:srgbClr val="E6F2F1"/>
+                  <a:srgbClr val="FFFFFF"/>
                 </a:solidFill>
                 <a:latin typeface="Courier New" pitchFamily="34" charset="0"/>
                 <a:ea typeface="Courier New" pitchFamily="34" charset="-122"/>
@@ -13331,11 +13429,11 @@
             </a:avLst>
           </a:prstGeom>
           <a:solidFill>
-            <a:srgbClr val="E6F2F1"/>
+            <a:srgbClr val="F2F2F2"/>
           </a:solidFill>
           <a:ln w="12700">
             <a:solidFill>
-              <a:srgbClr val="E6F2F1"/>
+              <a:srgbClr val="F2F2F2"/>
             </a:solidFill>
             <a:prstDash val="solid"/>
           </a:ln>
@@ -13368,11 +13466,11 @@
             <a:r>
               <a:rPr lang="en-US" sz="1800" b="1" dirty="0">
                 <a:solidFill>
-                  <a:srgbClr val="0B3C49"/>
-                </a:solidFill>
-                <a:latin typeface="Calibri" pitchFamily="34" charset="0"/>
-                <a:ea typeface="Calibri" pitchFamily="34" charset="-122"/>
-                <a:cs typeface="Calibri" pitchFamily="34" charset="-120"/>
+                  <a:srgbClr val="7A003F"/>
+                </a:solidFill>
+                <a:latin typeface="Lucida Sans" pitchFamily="34" charset="0"/>
+                <a:ea typeface="Lucida Sans" pitchFamily="34" charset="-122"/>
+                <a:cs typeface="Lucida Sans" pitchFamily="34" charset="-120"/>
               </a:rPr>
               <a:t>Predict (2 Min.)</a:t>
             </a:r>
@@ -13407,11 +13505,11 @@
             <a:r>
               <a:rPr lang="en-US" sz="1700" dirty="0">
                 <a:solidFill>
-                  <a:srgbClr val="1F2A30"/>
-                </a:solidFill>
-                <a:latin typeface="Calibri" pitchFamily="34" charset="0"/>
-                <a:ea typeface="Calibri" pitchFamily="34" charset="-122"/>
-                <a:cs typeface="Calibri" pitchFamily="34" charset="-120"/>
+                  <a:srgbClr val="1D1D1B"/>
+                </a:solidFill>
+                <a:latin typeface="Lucida Sans" pitchFamily="34" charset="0"/>
+                <a:ea typeface="Lucida Sans" pitchFamily="34" charset="-122"/>
+                <a:cs typeface="Lucida Sans" pitchFamily="34" charset="-120"/>
               </a:rPr>
               <a:t>Was tut der mBot2? Notieren Sie Ihre Vorhersage im Arbeitsheft.</a:t>
             </a:r>
@@ -13436,11 +13534,11 @@
             </a:avLst>
           </a:prstGeom>
           <a:solidFill>
-            <a:srgbClr val="FCEBDD"/>
+            <a:srgbClr val="FDF0E3"/>
           </a:solidFill>
           <a:ln w="12700">
             <a:solidFill>
-              <a:srgbClr val="FCEBDD"/>
+              <a:srgbClr val="FDF0E3"/>
             </a:solidFill>
             <a:prstDash val="solid"/>
           </a:ln>
@@ -13473,11 +13571,11 @@
             <a:r>
               <a:rPr lang="en-US" sz="1800" b="1" dirty="0">
                 <a:solidFill>
-                  <a:srgbClr val="0B3C49"/>
-                </a:solidFill>
-                <a:latin typeface="Calibri" pitchFamily="34" charset="0"/>
-                <a:ea typeface="Calibri" pitchFamily="34" charset="-122"/>
-                <a:cs typeface="Calibri" pitchFamily="34" charset="-120"/>
+                  <a:srgbClr val="7A003F"/>
+                </a:solidFill>
+                <a:latin typeface="Lucida Sans" pitchFamily="34" charset="0"/>
+                <a:ea typeface="Lucida Sans" pitchFamily="34" charset="-122"/>
+                <a:cs typeface="Lucida Sans" pitchFamily="34" charset="-120"/>
               </a:rPr>
               <a:t>Investigate</a:t>
             </a:r>
@@ -13516,11 +13614,11 @@
             <a:r>
               <a:rPr lang="en-US" sz="1700" dirty="0">
                 <a:solidFill>
-                  <a:srgbClr val="1F2A30"/>
-                </a:solidFill>
-                <a:latin typeface="Calibri" pitchFamily="34" charset="0"/>
-                <a:ea typeface="Calibri" pitchFamily="34" charset="-122"/>
-                <a:cs typeface="Calibri" pitchFamily="34" charset="-120"/>
+                  <a:srgbClr val="1D1D1B"/>
+                </a:solidFill>
+                <a:latin typeface="Lucida Sans" pitchFamily="34" charset="0"/>
+                <a:ea typeface="Lucida Sans" pitchFamily="34" charset="-122"/>
+                <a:cs typeface="Lucida Sans" pitchFamily="34" charset="-120"/>
               </a:rPr>
               <a:t>Was passiert mit 5 statt 20?</a:t>
             </a:r>
@@ -13537,11 +13635,11 @@
             <a:r>
               <a:rPr lang="en-US" sz="1700" dirty="0">
                 <a:solidFill>
-                  <a:srgbClr val="1F2A30"/>
-                </a:solidFill>
-                <a:latin typeface="Calibri" pitchFamily="34" charset="0"/>
-                <a:ea typeface="Calibri" pitchFamily="34" charset="-122"/>
-                <a:cs typeface="Calibri" pitchFamily="34" charset="-120"/>
+                  <a:srgbClr val="1D1D1B"/>
+                </a:solidFill>
+                <a:latin typeface="Lucida Sans" pitchFamily="34" charset="0"/>
+                <a:ea typeface="Lucida Sans" pitchFamily="34" charset="-122"/>
+                <a:cs typeface="Lucida Sans" pitchFamily="34" charset="-120"/>
               </a:rPr>
               <a:t>Wo steckt die Schleife?</a:t>
             </a:r>
@@ -13558,11 +13656,11 @@
             <a:r>
               <a:rPr lang="en-US" sz="1700" dirty="0">
                 <a:solidFill>
-                  <a:srgbClr val="1F2A30"/>
-                </a:solidFill>
-                <a:latin typeface="Calibri" pitchFamily="34" charset="0"/>
-                <a:ea typeface="Calibri" pitchFamily="34" charset="-122"/>
-                <a:cs typeface="Calibri" pitchFamily="34" charset="-120"/>
+                  <a:srgbClr val="1D1D1B"/>
+                </a:solidFill>
+                <a:latin typeface="Lucida Sans" pitchFamily="34" charset="0"/>
+                <a:ea typeface="Lucida Sans" pitchFamily="34" charset="-122"/>
+                <a:cs typeface="Lucida Sans" pitchFamily="34" charset="-120"/>
               </a:rPr>
               <a:t>Was, wenn „sonst“ fehlt?</a:t>
             </a:r>
@@ -13600,11 +13698,11 @@
             <a:lvl1pPr>
               <a:defRPr sz="1000">
                 <a:solidFill>
-                  <a:srgbClr val="5B6B73"/>
-                </a:solidFill>
-                <a:latin typeface="Calibri"/>
-                <a:ea typeface="Calibri"/>
-                <a:cs typeface="Calibri"/>
+                  <a:srgbClr val="706F6F"/>
+                </a:solidFill>
+                <a:latin typeface="Lucida Sans"/>
+                <a:ea typeface="Lucida Sans"/>
+                <a:cs typeface="Lucida Sans"/>
               </a:defRPr>
             </a:lvl1pPr>
           </a:lstStyle>
@@ -13648,13 +13746,13 @@
           <p:cNvPr id="2" name="Text 1"/>
           <p:cNvSpPr/>
           <p:nvPr>
-            <p:ph idx="101" type="title" hasCustomPrompt="1"/>
+            <p:ph idx="102" type="title" hasCustomPrompt="1"/>
           </p:nvPr>
         </p:nvSpPr>
         <p:spPr>
           <a:xfrm>
-            <a:off x="548640" y="320040"/>
-            <a:ext cx="11094415" cy="777240"/>
+            <a:off x="548640" y="274320"/>
+            <a:ext cx="8351215" cy="896112"/>
           </a:xfrm>
           <a:prstGeom prst="rect">
             <a:avLst/>
@@ -13666,21 +13764,21 @@
           <a:bodyPr wrap="square" lIns="0" tIns="0" rIns="0" bIns="0" rtlCol="0" anchor="ctr"/>
           <a:lstStyle/>
           <a:p>
-            <a:pPr indent="0" marL="0">
-              <a:buNone/>
-            </a:pPr>
-            <a:r>
-              <a:rPr lang="en-US" sz="3200" b="1" dirty="0">
-                <a:solidFill>
-                  <a:srgbClr val="0B3C49"/>
-                </a:solidFill>
-                <a:latin typeface="Cambria" pitchFamily="34" charset="0"/>
-                <a:ea typeface="Cambria" pitchFamily="34" charset="-122"/>
-                <a:cs typeface="Cambria" pitchFamily="34" charset="-120"/>
+            <a:pPr algn="l" indent="0" marL="0">
+              <a:buNone/>
+            </a:pPr>
+            <a:r>
+              <a:rPr lang="en-US" sz="2600" b="1" dirty="0">
+                <a:solidFill>
+                  <a:srgbClr val="7A003F"/>
+                </a:solidFill>
+                <a:latin typeface="Lucida Sans" pitchFamily="34" charset="0"/>
+                <a:ea typeface="Lucida Sans" pitchFamily="34" charset="-122"/>
+                <a:cs typeface="Lucida Sans" pitchFamily="34" charset="-120"/>
               </a:rPr>
               <a:t>Zwei Muster für alle Aufgaben</a:t>
             </a:r>
-            <a:endParaRPr lang="en-US" sz="3200" dirty="0"/>
+            <a:endParaRPr lang="en-US" sz="2600" dirty="0"/>
           </a:p>
         </p:txBody>
       </p:sp>
@@ -13701,11 +13799,11 @@
             </a:avLst>
           </a:prstGeom>
           <a:solidFill>
-            <a:srgbClr val="E6F2F1"/>
+            <a:srgbClr val="F2F2F2"/>
           </a:solidFill>
           <a:ln w="12700">
             <a:solidFill>
-              <a:srgbClr val="E6F2F1"/>
+              <a:srgbClr val="F2F2F2"/>
             </a:solidFill>
             <a:prstDash val="solid"/>
           </a:ln>
@@ -13726,11 +13824,11 @@
             <a:avLst/>
           </a:prstGeom>
           <a:solidFill>
-            <a:srgbClr val="0B6E69"/>
+            <a:srgbClr val="7A003F"/>
           </a:solidFill>
           <a:ln w="12700">
             <a:solidFill>
-              <a:srgbClr val="0B6E69"/>
+              <a:srgbClr val="7A003F"/>
             </a:solidFill>
             <a:prstDash val="solid"/>
           </a:ln>
@@ -13765,9 +13863,9 @@
                 <a:solidFill>
                   <a:srgbClr val="FFFFFF"/>
                 </a:solidFill>
-                <a:latin typeface="Calibri" pitchFamily="34" charset="0"/>
-                <a:ea typeface="Calibri" pitchFamily="34" charset="-122"/>
-                <a:cs typeface="Calibri" pitchFamily="34" charset="-120"/>
+                <a:latin typeface="Lucida Sans" pitchFamily="34" charset="0"/>
+                <a:ea typeface="Lucida Sans" pitchFamily="34" charset="-122"/>
+                <a:cs typeface="Lucida Sans" pitchFamily="34" charset="-120"/>
               </a:rPr>
               <a:t>1</a:t>
             </a:r>
@@ -13802,11 +13900,11 @@
             <a:r>
               <a:rPr lang="en-US" sz="1800" b="1" dirty="0">
                 <a:solidFill>
-                  <a:srgbClr val="0B3C49"/>
-                </a:solidFill>
-                <a:latin typeface="Calibri" pitchFamily="34" charset="0"/>
-                <a:ea typeface="Calibri" pitchFamily="34" charset="-122"/>
-                <a:cs typeface="Calibri" pitchFamily="34" charset="-120"/>
+                  <a:srgbClr val="7A003F"/>
+                </a:solidFill>
+                <a:latin typeface="Lucida Sans" pitchFamily="34" charset="0"/>
+                <a:ea typeface="Lucida Sans" pitchFamily="34" charset="-122"/>
+                <a:cs typeface="Lucida Sans" pitchFamily="34" charset="-120"/>
               </a:rPr>
               <a:t>Messen vor Entscheiden</a:t>
             </a:r>
@@ -13845,11 +13943,11 @@
             <a:r>
               <a:rPr lang="en-US" sz="1700" dirty="0">
                 <a:solidFill>
-                  <a:srgbClr val="1F2A30"/>
-                </a:solidFill>
-                <a:latin typeface="Calibri" pitchFamily="34" charset="0"/>
-                <a:ea typeface="Calibri" pitchFamily="34" charset="-122"/>
-                <a:cs typeface="Calibri" pitchFamily="34" charset="-120"/>
+                  <a:srgbClr val="1D1D1B"/>
+                </a:solidFill>
+                <a:latin typeface="Lucida Sans" pitchFamily="34" charset="0"/>
+                <a:ea typeface="Lucida Sans" pitchFamily="34" charset="-122"/>
+                <a:cs typeface="Lucida Sans" pitchFamily="34" charset="-120"/>
               </a:rPr>
               <a:t>Sensorwert auf dem Display anzeigen</a:t>
             </a:r>
@@ -13866,11 +13964,11 @@
             <a:r>
               <a:rPr lang="en-US" sz="1700" dirty="0">
                 <a:solidFill>
-                  <a:srgbClr val="1F2A30"/>
-                </a:solidFill>
-                <a:latin typeface="Calibri" pitchFamily="34" charset="0"/>
-                <a:ea typeface="Calibri" pitchFamily="34" charset="-122"/>
-                <a:cs typeface="Calibri" pitchFamily="34" charset="-120"/>
+                  <a:srgbClr val="1D1D1B"/>
+                </a:solidFill>
+                <a:latin typeface="Lucida Sans" pitchFamily="34" charset="0"/>
+                <a:ea typeface="Lucida Sans" pitchFamily="34" charset="-122"/>
+                <a:cs typeface="Lucida Sans" pitchFamily="34" charset="-120"/>
               </a:rPr>
               <a:t>„wandle … um in Zeichenkette“ (Kategorie Text)</a:t>
             </a:r>
@@ -13887,11 +13985,11 @@
             <a:r>
               <a:rPr lang="en-US" sz="1700" dirty="0">
                 <a:solidFill>
-                  <a:srgbClr val="1F2A30"/>
-                </a:solidFill>
-                <a:latin typeface="Calibri" pitchFamily="34" charset="0"/>
-                <a:ea typeface="Calibri" pitchFamily="34" charset="-122"/>
-                <a:cs typeface="Calibri" pitchFamily="34" charset="-120"/>
+                  <a:srgbClr val="1D1D1B"/>
+                </a:solidFill>
+                <a:latin typeface="Lucida Sans" pitchFamily="34" charset="0"/>
+                <a:ea typeface="Lucida Sans" pitchFamily="34" charset="-122"/>
+                <a:cs typeface="Lucida Sans" pitchFamily="34" charset="-120"/>
               </a:rPr>
               <a:t>echte Werte notieren, dann Schwelle festlegen</a:t>
             </a:r>
@@ -13916,11 +14014,11 @@
             </a:avLst>
           </a:prstGeom>
           <a:solidFill>
-            <a:srgbClr val="E6F2F1"/>
+            <a:srgbClr val="F2F2F2"/>
           </a:solidFill>
           <a:ln w="12700">
             <a:solidFill>
-              <a:srgbClr val="E6F2F1"/>
+              <a:srgbClr val="F2F2F2"/>
             </a:solidFill>
             <a:prstDash val="solid"/>
           </a:ln>
@@ -13941,11 +14039,11 @@
             <a:avLst/>
           </a:prstGeom>
           <a:solidFill>
-            <a:srgbClr val="E8772E"/>
+            <a:srgbClr val="EF7D00"/>
           </a:solidFill>
           <a:ln w="12700">
             <a:solidFill>
-              <a:srgbClr val="E8772E"/>
+              <a:srgbClr val="EF7D00"/>
             </a:solidFill>
             <a:prstDash val="solid"/>
           </a:ln>
@@ -13978,11 +14076,11 @@
             <a:r>
               <a:rPr lang="en-US" sz="1600" b="1" dirty="0">
                 <a:solidFill>
-                  <a:srgbClr val="FFFFFF"/>
-                </a:solidFill>
-                <a:latin typeface="Calibri" pitchFamily="34" charset="0"/>
-                <a:ea typeface="Calibri" pitchFamily="34" charset="-122"/>
-                <a:cs typeface="Calibri" pitchFamily="34" charset="-120"/>
+                  <a:srgbClr val="1D1D1B"/>
+                </a:solidFill>
+                <a:latin typeface="Lucida Sans" pitchFamily="34" charset="0"/>
+                <a:ea typeface="Lucida Sans" pitchFamily="34" charset="-122"/>
+                <a:cs typeface="Lucida Sans" pitchFamily="34" charset="-120"/>
               </a:rPr>
               <a:t>2</a:t>
             </a:r>
@@ -14017,11 +14115,11 @@
             <a:r>
               <a:rPr lang="en-US" sz="1800" b="1" dirty="0">
                 <a:solidFill>
-                  <a:srgbClr val="0B3C49"/>
-                </a:solidFill>
-                <a:latin typeface="Calibri" pitchFamily="34" charset="0"/>
-                <a:ea typeface="Calibri" pitchFamily="34" charset="-122"/>
-                <a:cs typeface="Calibri" pitchFamily="34" charset="-120"/>
+                  <a:srgbClr val="7A003F"/>
+                </a:solidFill>
+                <a:latin typeface="Lucida Sans" pitchFamily="34" charset="0"/>
+                <a:ea typeface="Lucida Sans" pitchFamily="34" charset="-122"/>
+                <a:cs typeface="Lucida Sans" pitchFamily="34" charset="-120"/>
               </a:rPr>
               <a:t>Start mit A, Stopp mit B</a:t>
             </a:r>
@@ -14060,11 +14158,11 @@
             <a:r>
               <a:rPr lang="en-US" sz="1700" dirty="0">
                 <a:solidFill>
-                  <a:srgbClr val="1F2A30"/>
-                </a:solidFill>
-                <a:latin typeface="Calibri" pitchFamily="34" charset="0"/>
-                <a:ea typeface="Calibri" pitchFamily="34" charset="-122"/>
-                <a:cs typeface="Calibri" pitchFamily="34" charset="-120"/>
+                  <a:srgbClr val="1D1D1B"/>
+                </a:solidFill>
+                <a:latin typeface="Lucida Sans" pitchFamily="34" charset="0"/>
+                <a:ea typeface="Lucida Sans" pitchFamily="34" charset="-122"/>
+                <a:cs typeface="Lucida Sans" pitchFamily="34" charset="-120"/>
               </a:rPr>
               <a:t>Warte bis Taste A gedrückt?</a:t>
             </a:r>
@@ -14081,11 +14179,11 @@
             <a:r>
               <a:rPr lang="en-US" sz="1700" dirty="0">
                 <a:solidFill>
-                  <a:srgbClr val="1F2A30"/>
-                </a:solidFill>
-                <a:latin typeface="Calibri" pitchFamily="34" charset="0"/>
-                <a:ea typeface="Calibri" pitchFamily="34" charset="-122"/>
-                <a:cs typeface="Calibri" pitchFamily="34" charset="-120"/>
+                  <a:srgbClr val="1D1D1B"/>
+                </a:solidFill>
+                <a:latin typeface="Lucida Sans" pitchFamily="34" charset="0"/>
+                <a:ea typeface="Lucida Sans" pitchFamily="34" charset="-122"/>
+                <a:cs typeface="Lucida Sans" pitchFamily="34" charset="-120"/>
               </a:rPr>
               <a:t>Wiederhole bis Taste B gedrückt? [ Programm ]</a:t>
             </a:r>
@@ -14102,11 +14200,11 @@
             <a:r>
               <a:rPr lang="en-US" sz="1700" dirty="0">
                 <a:solidFill>
-                  <a:srgbClr val="1F2A30"/>
-                </a:solidFill>
-                <a:latin typeface="Calibri" pitchFamily="34" charset="0"/>
-                <a:ea typeface="Calibri" pitchFamily="34" charset="-122"/>
-                <a:cs typeface="Calibri" pitchFamily="34" charset="-120"/>
+                  <a:srgbClr val="1D1D1B"/>
+                </a:solidFill>
+                <a:latin typeface="Lucida Sans" pitchFamily="34" charset="0"/>
+                <a:ea typeface="Lucida Sans" pitchFamily="34" charset="-122"/>
+                <a:cs typeface="Lucida Sans" pitchFamily="34" charset="-120"/>
               </a:rPr>
               <a:t>Stoppe</a:t>
             </a:r>
@@ -14131,11 +14229,11 @@
             </a:avLst>
           </a:prstGeom>
           <a:solidFill>
-            <a:srgbClr val="FCEBDD"/>
+            <a:srgbClr val="FDF0E3"/>
           </a:solidFill>
           <a:ln w="12700">
             <a:solidFill>
-              <a:srgbClr val="FCEBDD"/>
+              <a:srgbClr val="FDF0E3"/>
             </a:solidFill>
             <a:prstDash val="solid"/>
           </a:ln>
@@ -14156,11 +14254,11 @@
             <a:avLst/>
           </a:prstGeom>
           <a:solidFill>
-            <a:srgbClr val="E8772E"/>
+            <a:srgbClr val="EF7D00"/>
           </a:solidFill>
           <a:ln w="12700">
             <a:solidFill>
-              <a:srgbClr val="E8772E"/>
+              <a:srgbClr val="EF7D00"/>
             </a:solidFill>
             <a:prstDash val="solid"/>
           </a:ln>
@@ -14193,11 +14291,11 @@
             <a:r>
               <a:rPr lang="en-US" sz="2000" b="1" dirty="0">
                 <a:solidFill>
-                  <a:srgbClr val="FFFFFF"/>
-                </a:solidFill>
-                <a:latin typeface="Calibri" pitchFamily="34" charset="0"/>
-                <a:ea typeface="Calibri" pitchFamily="34" charset="-122"/>
-                <a:cs typeface="Calibri" pitchFamily="34" charset="-120"/>
+                  <a:srgbClr val="1D1D1B"/>
+                </a:solidFill>
+                <a:latin typeface="Lucida Sans" pitchFamily="34" charset="0"/>
+                <a:ea typeface="Lucida Sans" pitchFamily="34" charset="-122"/>
+                <a:cs typeface="Lucida Sans" pitchFamily="34" charset="-120"/>
               </a:rPr>
               <a:t>!</a:t>
             </a:r>
@@ -14232,11 +14330,11 @@
             <a:r>
               <a:rPr lang="en-US" sz="1500" dirty="0">
                 <a:solidFill>
-                  <a:srgbClr val="0B3C49"/>
-                </a:solidFill>
-                <a:latin typeface="Calibri" pitchFamily="34" charset="0"/>
-                <a:ea typeface="Calibri" pitchFamily="34" charset="-122"/>
-                <a:cs typeface="Calibri" pitchFamily="34" charset="-120"/>
+                  <a:srgbClr val="7A003F"/>
+                </a:solidFill>
+                <a:latin typeface="Lucida Sans" pitchFamily="34" charset="0"/>
+                <a:ea typeface="Lucida Sans" pitchFamily="34" charset="-122"/>
+                <a:cs typeface="Lucida Sans" pitchFamily="34" charset="-120"/>
               </a:rPr>
               <a:t>Muster B ist zugleich der Not-Aus für die Klasse: Jedes Fahrprogramm lässt sich jederzeit anhalten.</a:t>
             </a:r>
@@ -14274,11 +14372,11 @@
             <a:lvl1pPr>
               <a:defRPr sz="1000">
                 <a:solidFill>
-                  <a:srgbClr val="5B6B73"/>
-                </a:solidFill>
-                <a:latin typeface="Calibri"/>
-                <a:ea typeface="Calibri"/>
-                <a:cs typeface="Calibri"/>
+                  <a:srgbClr val="706F6F"/>
+                </a:solidFill>
+                <a:latin typeface="Lucida Sans"/>
+                <a:ea typeface="Lucida Sans"/>
+                <a:cs typeface="Lucida Sans"/>
               </a:defRPr>
             </a:lvl1pPr>
           </a:lstStyle>
@@ -14343,7 +14441,7 @@
     </a:clrScheme>
     <a:fontScheme name="Office">
       <a:majorFont>
-        <a:latin typeface="Cambria"/>
+        <a:latin typeface="Lucida Sans"/>
         <a:ea typeface=""/>
         <a:cs typeface=""/>
         <a:font script="Jpan" typeface="游ゴシック Light"/>
@@ -14395,7 +14493,7 @@
         <a:font script="Tfng" typeface="Ebrima"/>
       </a:majorFont>
       <a:minorFont>
-        <a:latin typeface="Calibri"/>
+        <a:latin typeface="Lucida Sans"/>
         <a:ea typeface=""/>
         <a:cs typeface=""/>
         <a:font script="Jpan" typeface="游ゴシック"/>
